--- a/research_articles/masterclasses/consensus_distributed/consensus_distributed.pptx
+++ b/research_articles/masterclasses/consensus_distributed/consensus_distributed.pptx
@@ -3481,7 +3481,7 @@
                   <a:srgbClr val="002060"/>
                 </a:solidFill>
               </a:rPr>
-              <a:t>Ticket purchase suggests strong belief (ceiling) on future price appreciation </a:t>
+              <a:t>Ticket purchase suggests strong belief (+ ceiling) on future price appreciation </a:t>
             </a:r>
             <a:endParaRPr lang="en-AU" dirty="0">
               <a:solidFill>
@@ -4308,7 +4308,7 @@
                   <a:srgbClr val="002060"/>
                 </a:solidFill>
               </a:rPr>
-              <a:t>Ticket purchase suggests strong belief (ceiling) on future price appreciation </a:t>
+              <a:t>Ticket purchase suggests strong belief (+ ceiling) on future price appreciation </a:t>
             </a:r>
             <a:endParaRPr lang="en-AU" dirty="0">
               <a:solidFill>
@@ -5539,7 +5539,7 @@
                   <a:srgbClr val="002060"/>
                 </a:solidFill>
               </a:rPr>
-              <a:t>Ticket purchase suggests strong belief (ceiling) on future price appreciation </a:t>
+              <a:t>Ticket purchase suggests strong belief (+ ceiling) on future price appreciation </a:t>
             </a:r>
             <a:endParaRPr lang="en-AU" dirty="0">
               <a:solidFill>
@@ -8321,8 +8321,8 @@
           </a:prstGeom>
         </p:spPr>
       </p:pic>
-      <mc:AlternateContent xmlns:mc="http://schemas.openxmlformats.org/markup-compatibility/2006">
-        <mc:Choice xmlns:a14="http://schemas.microsoft.com/office/drawing/2010/main" Requires="a14">
+      <mc:AlternateContent xmlns:mc="http://schemas.openxmlformats.org/markup-compatibility/2006" xmlns:a14="http://schemas.microsoft.com/office/drawing/2010/main">
+        <mc:Choice Requires="a14">
           <p:sp>
             <p:nvSpPr>
               <p:cNvPr id="17" name="TextBox 16">
@@ -8351,6 +8351,7 @@
               </a:bodyPr>
               <a:lstStyle/>
               <a:p>
+                <a:pPr/>
                 <a14:m>
                   <m:oMathPara xmlns:m="http://schemas.openxmlformats.org/officeDocument/2006/math">
                     <m:oMathParaPr>
@@ -8482,7 +8483,7 @@
             </p:txBody>
           </p:sp>
         </mc:Choice>
-        <mc:Fallback>
+        <mc:Fallback xmlns="">
           <p:sp>
             <p:nvSpPr>
               <p:cNvPr id="17" name="TextBox 16">
@@ -8665,7 +8666,7 @@
           <a:p>
             <a:r>
               <a:rPr lang="en-US" dirty="0"/>
-              <a:t>The Decred chain has a very different ‘HODLer’ signature on-chain that that of Bitcoin.</a:t>
+              <a:t>The Decred chain has a distinct set of on-chain signatures for network participants to that of Bitcoin.</a:t>
             </a:r>
           </a:p>
           <a:p>
@@ -8691,7 +8692,15 @@
           <a:p>
             <a:r>
               <a:rPr lang="en-US" dirty="0"/>
-              <a:t>For Decred, the hybrid PoW/PoS consensus ticket system mean high conviction HODLing has coins moving</a:t>
+              <a:t>For Decred, the hybrid PoW/PoS consensus ticket system mean </a:t>
+            </a:r>
+            <a:r>
+              <a:rPr lang="en-US" b="1" dirty="0"/>
+              <a:t>high conviction HODLing </a:t>
+            </a:r>
+            <a:r>
+              <a:rPr lang="en-US" dirty="0"/>
+              <a:t>has coins moving often.</a:t>
             </a:r>
             <a:endParaRPr lang="en-AU" dirty="0"/>
           </a:p>
@@ -8893,8 +8902,8 @@
           </a:prstGeom>
         </p:spPr>
       </p:pic>
-      <mc:AlternateContent xmlns:mc="http://schemas.openxmlformats.org/markup-compatibility/2006">
-        <mc:Choice xmlns:a14="http://schemas.microsoft.com/office/drawing/2010/main" Requires="a14">
+      <mc:AlternateContent xmlns:mc="http://schemas.openxmlformats.org/markup-compatibility/2006" xmlns:a14="http://schemas.microsoft.com/office/drawing/2010/main">
+        <mc:Choice Requires="a14">
           <p:sp>
             <p:nvSpPr>
               <p:cNvPr id="8" name="TextBox 7">
@@ -8923,6 +8932,7 @@
               </a:bodyPr>
               <a:lstStyle/>
               <a:p>
+                <a:pPr/>
                 <a14:m>
                   <m:oMathPara xmlns:m="http://schemas.openxmlformats.org/officeDocument/2006/math">
                     <m:oMathParaPr>
@@ -9065,7 +9075,7 @@
             </p:txBody>
           </p:sp>
         </mc:Choice>
-        <mc:Fallback>
+        <mc:Fallback xmlns="">
           <p:sp>
             <p:nvSpPr>
               <p:cNvPr id="8" name="TextBox 7">
@@ -9762,8 +9772,8 @@
           </a:p>
         </p:txBody>
       </p:sp>
-      <mc:AlternateContent xmlns:mc="http://schemas.openxmlformats.org/markup-compatibility/2006">
-        <mc:Choice xmlns:a14="http://schemas.microsoft.com/office/drawing/2010/main" Requires="a14">
+      <mc:AlternateContent xmlns:mc="http://schemas.openxmlformats.org/markup-compatibility/2006" xmlns:a14="http://schemas.microsoft.com/office/drawing/2010/main">
+        <mc:Choice Requires="a14">
           <p:sp>
             <p:nvSpPr>
               <p:cNvPr id="17" name="TextBox 16">
@@ -9792,6 +9802,7 @@
               </a:bodyPr>
               <a:lstStyle/>
               <a:p>
+                <a:pPr/>
                 <a14:m>
                   <m:oMathPara xmlns:m="http://schemas.openxmlformats.org/officeDocument/2006/math">
                     <m:oMathParaPr>
@@ -9934,7 +9945,7 @@
             </p:txBody>
           </p:sp>
         </mc:Choice>
-        <mc:Fallback>
+        <mc:Fallback xmlns="">
           <p:sp>
             <p:nvSpPr>
               <p:cNvPr id="17" name="TextBox 16">
@@ -10460,8 +10471,8 @@
           </a:p>
         </p:txBody>
       </p:sp>
-      <mc:AlternateContent xmlns:mc="http://schemas.openxmlformats.org/markup-compatibility/2006">
-        <mc:Choice xmlns:a14="http://schemas.microsoft.com/office/drawing/2010/main" Requires="a14">
+      <mc:AlternateContent xmlns:mc="http://schemas.openxmlformats.org/markup-compatibility/2006" xmlns:a14="http://schemas.microsoft.com/office/drawing/2010/main">
+        <mc:Choice Requires="a14">
           <p:sp>
             <p:nvSpPr>
               <p:cNvPr id="17" name="TextBox 16">
@@ -10490,6 +10501,7 @@
               </a:bodyPr>
               <a:lstStyle/>
               <a:p>
+                <a:pPr/>
                 <a14:m>
                   <m:oMathPara xmlns:m="http://schemas.openxmlformats.org/officeDocument/2006/math">
                     <m:oMathParaPr>
@@ -10632,7 +10644,7 @@
             </p:txBody>
           </p:sp>
         </mc:Choice>
-        <mc:Fallback>
+        <mc:Fallback xmlns="">
           <p:sp>
             <p:nvSpPr>
               <p:cNvPr id="17" name="TextBox 16">
@@ -12106,13 +12118,13 @@
             </a:r>
             <a:r>
               <a:rPr lang="en-US" dirty="0"/>
-              <a:t> behind network transactions.</a:t>
+              <a:t> behind various network transaction patterns.</a:t>
             </a:r>
           </a:p>
           <a:p>
             <a:r>
               <a:rPr lang="en-US" dirty="0"/>
-              <a:t>Example actions related to Decred:</a:t>
+              <a:t>Examples related to Decred:</a:t>
             </a:r>
             <a:endParaRPr lang="en-AU" dirty="0"/>
           </a:p>
@@ -15040,7 +15052,7 @@
                   <a:srgbClr val="091440"/>
                 </a:solidFill>
               </a:rPr>
-              <a:t>Steep Gradient</a:t>
+              <a:t>Steep Gradient down</a:t>
             </a:r>
           </a:p>
           <a:p>

--- a/research_articles/masterclasses/consensus_distributed/consensus_distributed.pptx
+++ b/research_articles/masterclasses/consensus_distributed/consensus_distributed.pptx
@@ -5,7 +5,7 @@
     <p:sldMasterId id="2147483678" r:id="rId1"/>
   </p:sldMasterIdLst>
   <p:notesMasterIdLst>
-    <p:notesMasterId r:id="rId28"/>
+    <p:notesMasterId r:id="rId31"/>
   </p:notesMasterIdLst>
   <p:sldIdLst>
     <p:sldId id="595" r:id="rId2"/>
@@ -33,7 +33,10 @@
     <p:sldId id="623" r:id="rId24"/>
     <p:sldId id="625" r:id="rId25"/>
     <p:sldId id="626" r:id="rId26"/>
-    <p:sldId id="627" r:id="rId27"/>
+    <p:sldId id="628" r:id="rId27"/>
+    <p:sldId id="629" r:id="rId28"/>
+    <p:sldId id="630" r:id="rId29"/>
+    <p:sldId id="627" r:id="rId30"/>
   </p:sldIdLst>
   <p:sldSz cx="12192000" cy="6858000"/>
   <p:notesSz cx="6858000" cy="9144000"/>
@@ -11848,6 +11851,789 @@
 </file>
 
 <file path=ppt/slides/slide26.xml><?xml version="1.0" encoding="utf-8"?>
+<p:sld xmlns:a="http://schemas.openxmlformats.org/drawingml/2006/main" xmlns:r="http://schemas.openxmlformats.org/officeDocument/2006/relationships" xmlns:p="http://schemas.openxmlformats.org/presentationml/2006/main">
+  <p:cSld>
+    <p:spTree>
+      <p:nvGrpSpPr>
+        <p:cNvPr id="1" name=""/>
+        <p:cNvGrpSpPr/>
+        <p:nvPr/>
+      </p:nvGrpSpPr>
+      <p:grpSpPr>
+        <a:xfrm>
+          <a:off x="0" y="0"/>
+          <a:ext cx="0" cy="0"/>
+          <a:chOff x="0" y="0"/>
+          <a:chExt cx="0" cy="0"/>
+        </a:xfrm>
+      </p:grpSpPr>
+      <p:sp>
+        <p:nvSpPr>
+          <p:cNvPr id="2" name="Title 1">
+            <a:extLst>
+              <a:ext uri="{FF2B5EF4-FFF2-40B4-BE49-F238E27FC236}">
+                <a16:creationId xmlns:a16="http://schemas.microsoft.com/office/drawing/2014/main" id="{C711E6D6-E67B-4C74-A2F0-B8B7F9E5EF88}"/>
+              </a:ext>
+            </a:extLst>
+          </p:cNvPr>
+          <p:cNvSpPr>
+            <a:spLocks noGrp="1"/>
+          </p:cNvSpPr>
+          <p:nvPr>
+            <p:ph type="ctrTitle"/>
+          </p:nvPr>
+        </p:nvSpPr>
+        <p:spPr/>
+        <p:txBody>
+          <a:bodyPr/>
+          <a:lstStyle/>
+          <a:p>
+            <a:r>
+              <a:rPr lang="en-US" dirty="0"/>
+              <a:t>Treasury Performance</a:t>
+            </a:r>
+            <a:endParaRPr lang="en-AU" dirty="0"/>
+          </a:p>
+        </p:txBody>
+      </p:sp>
+      <p:sp>
+        <p:nvSpPr>
+          <p:cNvPr id="3" name="Subtitle 2">
+            <a:extLst>
+              <a:ext uri="{FF2B5EF4-FFF2-40B4-BE49-F238E27FC236}">
+                <a16:creationId xmlns:a16="http://schemas.microsoft.com/office/drawing/2014/main" id="{936F6549-BB15-4380-8980-51AE91A4E982}"/>
+              </a:ext>
+            </a:extLst>
+          </p:cNvPr>
+          <p:cNvSpPr>
+            <a:spLocks noGrp="1"/>
+          </p:cNvSpPr>
+          <p:nvPr>
+            <p:ph type="subTitle" idx="1"/>
+          </p:nvPr>
+        </p:nvSpPr>
+        <p:spPr/>
+        <p:txBody>
+          <a:bodyPr/>
+          <a:lstStyle/>
+          <a:p>
+            <a:endParaRPr lang="en-AU"/>
+          </a:p>
+        </p:txBody>
+      </p:sp>
+    </p:spTree>
+    <p:extLst>
+      <p:ext uri="{BB962C8B-B14F-4D97-AF65-F5344CB8AC3E}">
+        <p14:creationId xmlns:p14="http://schemas.microsoft.com/office/powerpoint/2010/main" val="670085239"/>
+      </p:ext>
+    </p:extLst>
+  </p:cSld>
+  <p:clrMapOvr>
+    <a:masterClrMapping/>
+  </p:clrMapOvr>
+</p:sld>
+</file>
+
+<file path=ppt/slides/slide27.xml><?xml version="1.0" encoding="utf-8"?>
+<p:sld xmlns:a="http://schemas.openxmlformats.org/drawingml/2006/main" xmlns:r="http://schemas.openxmlformats.org/officeDocument/2006/relationships" xmlns:p="http://schemas.openxmlformats.org/presentationml/2006/main">
+  <p:cSld>
+    <p:spTree>
+      <p:nvGrpSpPr>
+        <p:cNvPr id="1" name=""/>
+        <p:cNvGrpSpPr/>
+        <p:nvPr/>
+      </p:nvGrpSpPr>
+      <p:grpSpPr>
+        <a:xfrm>
+          <a:off x="0" y="0"/>
+          <a:ext cx="0" cy="0"/>
+          <a:chOff x="0" y="0"/>
+          <a:chExt cx="0" cy="0"/>
+        </a:xfrm>
+      </p:grpSpPr>
+      <p:sp>
+        <p:nvSpPr>
+          <p:cNvPr id="5" name="Rectangle 4">
+            <a:extLst>
+              <a:ext uri="{FF2B5EF4-FFF2-40B4-BE49-F238E27FC236}">
+                <a16:creationId xmlns:a16="http://schemas.microsoft.com/office/drawing/2014/main" id="{B1A59732-93A8-48A0-94E1-CDFE53FD961F}"/>
+              </a:ext>
+            </a:extLst>
+          </p:cNvPr>
+          <p:cNvSpPr/>
+          <p:nvPr/>
+        </p:nvSpPr>
+        <p:spPr>
+          <a:xfrm>
+            <a:off x="0" y="0"/>
+            <a:ext cx="11285316" cy="6858000"/>
+          </a:xfrm>
+          <a:prstGeom prst="rect">
+            <a:avLst/>
+          </a:prstGeom>
+          <a:solidFill>
+            <a:srgbClr val="F5F5F5"/>
+          </a:solidFill>
+          <a:ln>
+            <a:solidFill>
+              <a:srgbClr val="F5F5F5"/>
+            </a:solidFill>
+          </a:ln>
+        </p:spPr>
+        <p:style>
+          <a:lnRef idx="2">
+            <a:schemeClr val="accent1">
+              <a:shade val="50000"/>
+            </a:schemeClr>
+          </a:lnRef>
+          <a:fillRef idx="1">
+            <a:schemeClr val="accent1"/>
+          </a:fillRef>
+          <a:effectRef idx="0">
+            <a:schemeClr val="accent1"/>
+          </a:effectRef>
+          <a:fontRef idx="minor">
+            <a:schemeClr val="lt1"/>
+          </a:fontRef>
+        </p:style>
+        <p:txBody>
+          <a:bodyPr rtlCol="0" anchor="ctr"/>
+          <a:lstStyle/>
+          <a:p>
+            <a:pPr algn="ctr"/>
+            <a:endParaRPr lang="en-AU"/>
+          </a:p>
+        </p:txBody>
+      </p:sp>
+      <p:pic>
+        <p:nvPicPr>
+          <p:cNvPr id="13" name="Picture 12">
+            <a:extLst>
+              <a:ext uri="{FF2B5EF4-FFF2-40B4-BE49-F238E27FC236}">
+                <a16:creationId xmlns:a16="http://schemas.microsoft.com/office/drawing/2014/main" id="{D33779B1-40A4-4F5C-A385-4ED5AB9FC9E1}"/>
+              </a:ext>
+            </a:extLst>
+          </p:cNvPr>
+          <p:cNvPicPr>
+            <a:picLocks noChangeAspect="1"/>
+          </p:cNvPicPr>
+          <p:nvPr/>
+        </p:nvPicPr>
+        <p:blipFill>
+          <a:blip r:embed="rId2"/>
+          <a:stretch>
+            <a:fillRect/>
+          </a:stretch>
+        </p:blipFill>
+        <p:spPr>
+          <a:xfrm>
+            <a:off x="135732" y="1147884"/>
+            <a:ext cx="11055470" cy="5229230"/>
+          </a:xfrm>
+          <a:prstGeom prst="rect">
+            <a:avLst/>
+          </a:prstGeom>
+        </p:spPr>
+      </p:pic>
+      <p:pic>
+        <p:nvPicPr>
+          <p:cNvPr id="6" name="Picture 5">
+            <a:extLst>
+              <a:ext uri="{FF2B5EF4-FFF2-40B4-BE49-F238E27FC236}">
+                <a16:creationId xmlns:a16="http://schemas.microsoft.com/office/drawing/2014/main" id="{643518C2-CDE9-4203-B8D5-FD9FBAFF9A23}"/>
+              </a:ext>
+            </a:extLst>
+          </p:cNvPr>
+          <p:cNvPicPr>
+            <a:picLocks noChangeAspect="1"/>
+          </p:cNvPicPr>
+          <p:nvPr/>
+        </p:nvPicPr>
+        <p:blipFill>
+          <a:blip r:embed="rId3"/>
+          <a:stretch>
+            <a:fillRect/>
+          </a:stretch>
+        </p:blipFill>
+        <p:spPr>
+          <a:xfrm>
+            <a:off x="1090856" y="1132295"/>
+            <a:ext cx="3286125" cy="1304925"/>
+          </a:xfrm>
+          <a:prstGeom prst="rect">
+            <a:avLst/>
+          </a:prstGeom>
+        </p:spPr>
+      </p:pic>
+      <p:sp>
+        <p:nvSpPr>
+          <p:cNvPr id="7" name="TextBox 6">
+            <a:extLst>
+              <a:ext uri="{FF2B5EF4-FFF2-40B4-BE49-F238E27FC236}">
+                <a16:creationId xmlns:a16="http://schemas.microsoft.com/office/drawing/2014/main" id="{EC52148A-6BD7-4A18-B1A0-53C3F83330E4}"/>
+              </a:ext>
+            </a:extLst>
+          </p:cNvPr>
+          <p:cNvSpPr txBox="1"/>
+          <p:nvPr/>
+        </p:nvSpPr>
+        <p:spPr>
+          <a:xfrm>
+            <a:off x="7815021" y="875641"/>
+            <a:ext cx="2516698" cy="369332"/>
+          </a:xfrm>
+          <a:prstGeom prst="rect">
+            <a:avLst/>
+          </a:prstGeom>
+          <a:noFill/>
+        </p:spPr>
+        <p:txBody>
+          <a:bodyPr wrap="square" rtlCol="0">
+            <a:spAutoFit/>
+          </a:bodyPr>
+          <a:lstStyle/>
+          <a:p>
+            <a:pPr algn="ctr"/>
+            <a:r>
+              <a:rPr lang="en-US" b="1" dirty="0">
+                <a:solidFill>
+                  <a:srgbClr val="D1275D"/>
+                </a:solidFill>
+              </a:rPr>
+              <a:t>Inflow 982.5k DCR</a:t>
+            </a:r>
+          </a:p>
+        </p:txBody>
+      </p:sp>
+      <p:sp>
+        <p:nvSpPr>
+          <p:cNvPr id="8" name="TextBox 7">
+            <a:extLst>
+              <a:ext uri="{FF2B5EF4-FFF2-40B4-BE49-F238E27FC236}">
+                <a16:creationId xmlns:a16="http://schemas.microsoft.com/office/drawing/2014/main" id="{0D83EF7F-7508-4BB9-9EA9-3D94B379C427}"/>
+              </a:ext>
+            </a:extLst>
+          </p:cNvPr>
+          <p:cNvSpPr txBox="1"/>
+          <p:nvPr/>
+        </p:nvSpPr>
+        <p:spPr>
+          <a:xfrm>
+            <a:off x="7692176" y="2212902"/>
+            <a:ext cx="2639543" cy="646331"/>
+          </a:xfrm>
+          <a:prstGeom prst="rect">
+            <a:avLst/>
+          </a:prstGeom>
+          <a:noFill/>
+        </p:spPr>
+        <p:txBody>
+          <a:bodyPr wrap="square" rtlCol="0">
+            <a:spAutoFit/>
+          </a:bodyPr>
+          <a:lstStyle/>
+          <a:p>
+            <a:pPr algn="ctr"/>
+            <a:r>
+              <a:rPr lang="en-US" b="1" dirty="0">
+                <a:solidFill>
+                  <a:srgbClr val="C14DB1"/>
+                </a:solidFill>
+              </a:rPr>
+              <a:t>Balance 636.3k DCR</a:t>
+            </a:r>
+          </a:p>
+          <a:p>
+            <a:pPr algn="ctr"/>
+            <a:r>
+              <a:rPr lang="en-US" b="1" dirty="0">
+                <a:solidFill>
+                  <a:srgbClr val="C14DB1"/>
+                </a:solidFill>
+              </a:rPr>
+              <a:t>$8.908M @ $14/DCR</a:t>
+            </a:r>
+            <a:endParaRPr lang="en-AU" b="1" dirty="0">
+              <a:solidFill>
+                <a:srgbClr val="C14DB1"/>
+              </a:solidFill>
+            </a:endParaRPr>
+          </a:p>
+        </p:txBody>
+      </p:sp>
+      <p:sp>
+        <p:nvSpPr>
+          <p:cNvPr id="9" name="TextBox 8">
+            <a:extLst>
+              <a:ext uri="{FF2B5EF4-FFF2-40B4-BE49-F238E27FC236}">
+                <a16:creationId xmlns:a16="http://schemas.microsoft.com/office/drawing/2014/main" id="{A3EFD7FB-9463-43EB-9055-E892E803D1F9}"/>
+              </a:ext>
+            </a:extLst>
+          </p:cNvPr>
+          <p:cNvSpPr txBox="1"/>
+          <p:nvPr/>
+        </p:nvSpPr>
+        <p:spPr>
+          <a:xfrm>
+            <a:off x="7815021" y="4837036"/>
+            <a:ext cx="2639543" cy="830997"/>
+          </a:xfrm>
+          <a:prstGeom prst="rect">
+            <a:avLst/>
+          </a:prstGeom>
+          <a:noFill/>
+        </p:spPr>
+        <p:txBody>
+          <a:bodyPr wrap="square" rtlCol="0">
+            <a:spAutoFit/>
+          </a:bodyPr>
+          <a:lstStyle/>
+          <a:p>
+            <a:pPr algn="ctr"/>
+            <a:r>
+              <a:rPr lang="en-US" b="1" dirty="0">
+                <a:solidFill>
+                  <a:srgbClr val="23DBCE"/>
+                </a:solidFill>
+              </a:rPr>
+              <a:t>Spent 346.5k DCR</a:t>
+            </a:r>
+          </a:p>
+          <a:p>
+            <a:pPr algn="ctr"/>
+            <a:r>
+              <a:rPr lang="en-AU" b="1" dirty="0">
+                <a:solidFill>
+                  <a:srgbClr val="23DBCE"/>
+                </a:solidFill>
+              </a:rPr>
+              <a:t>$7.626M</a:t>
+            </a:r>
+          </a:p>
+          <a:p>
+            <a:pPr algn="ctr"/>
+            <a:r>
+              <a:rPr lang="en-AU" sz="1200" b="1" i="1" dirty="0">
+                <a:solidFill>
+                  <a:srgbClr val="23DBCE"/>
+                </a:solidFill>
+              </a:rPr>
+              <a:t>Priced on Spend Date</a:t>
+            </a:r>
+            <a:endParaRPr lang="en-AU" b="1" i="1" dirty="0">
+              <a:solidFill>
+                <a:srgbClr val="23DBCE"/>
+              </a:solidFill>
+            </a:endParaRPr>
+          </a:p>
+        </p:txBody>
+      </p:sp>
+      <p:pic>
+        <p:nvPicPr>
+          <p:cNvPr id="12" name="Picture 11">
+            <a:extLst>
+              <a:ext uri="{FF2B5EF4-FFF2-40B4-BE49-F238E27FC236}">
+                <a16:creationId xmlns:a16="http://schemas.microsoft.com/office/drawing/2014/main" id="{497F74C2-6A64-4D13-BB8F-3A920EC05C00}"/>
+              </a:ext>
+            </a:extLst>
+          </p:cNvPr>
+          <p:cNvPicPr>
+            <a:picLocks noChangeAspect="1"/>
+          </p:cNvPicPr>
+          <p:nvPr/>
+        </p:nvPicPr>
+        <p:blipFill>
+          <a:blip r:embed="rId4"/>
+          <a:stretch>
+            <a:fillRect/>
+          </a:stretch>
+        </p:blipFill>
+        <p:spPr>
+          <a:xfrm>
+            <a:off x="2404157" y="212803"/>
+            <a:ext cx="6477000" cy="581025"/>
+          </a:xfrm>
+          <a:prstGeom prst="rect">
+            <a:avLst/>
+          </a:prstGeom>
+        </p:spPr>
+      </p:pic>
+    </p:spTree>
+    <p:extLst>
+      <p:ext uri="{BB962C8B-B14F-4D97-AF65-F5344CB8AC3E}">
+        <p14:creationId xmlns:p14="http://schemas.microsoft.com/office/powerpoint/2010/main" val="3938361511"/>
+      </p:ext>
+    </p:extLst>
+  </p:cSld>
+  <p:clrMapOvr>
+    <a:masterClrMapping/>
+  </p:clrMapOvr>
+</p:sld>
+</file>
+
+<file path=ppt/slides/slide28.xml><?xml version="1.0" encoding="utf-8"?>
+<p:sld xmlns:a="http://schemas.openxmlformats.org/drawingml/2006/main" xmlns:r="http://schemas.openxmlformats.org/officeDocument/2006/relationships" xmlns:p="http://schemas.openxmlformats.org/presentationml/2006/main">
+  <p:cSld>
+    <p:spTree>
+      <p:nvGrpSpPr>
+        <p:cNvPr id="1" name=""/>
+        <p:cNvGrpSpPr/>
+        <p:nvPr/>
+      </p:nvGrpSpPr>
+      <p:grpSpPr>
+        <a:xfrm>
+          <a:off x="0" y="0"/>
+          <a:ext cx="0" cy="0"/>
+          <a:chOff x="0" y="0"/>
+          <a:chExt cx="0" cy="0"/>
+        </a:xfrm>
+      </p:grpSpPr>
+      <p:sp>
+        <p:nvSpPr>
+          <p:cNvPr id="5" name="Rectangle 4">
+            <a:extLst>
+              <a:ext uri="{FF2B5EF4-FFF2-40B4-BE49-F238E27FC236}">
+                <a16:creationId xmlns:a16="http://schemas.microsoft.com/office/drawing/2014/main" id="{D096F3FC-1E5B-42B2-9D30-7EA972629428}"/>
+              </a:ext>
+            </a:extLst>
+          </p:cNvPr>
+          <p:cNvSpPr/>
+          <p:nvPr/>
+        </p:nvSpPr>
+        <p:spPr>
+          <a:xfrm>
+            <a:off x="0" y="0"/>
+            <a:ext cx="11285316" cy="6858000"/>
+          </a:xfrm>
+          <a:prstGeom prst="rect">
+            <a:avLst/>
+          </a:prstGeom>
+          <a:solidFill>
+            <a:srgbClr val="F5F5F5"/>
+          </a:solidFill>
+          <a:ln>
+            <a:solidFill>
+              <a:srgbClr val="F5F5F5"/>
+            </a:solidFill>
+          </a:ln>
+        </p:spPr>
+        <p:style>
+          <a:lnRef idx="2">
+            <a:schemeClr val="accent1">
+              <a:shade val="50000"/>
+            </a:schemeClr>
+          </a:lnRef>
+          <a:fillRef idx="1">
+            <a:schemeClr val="accent1"/>
+          </a:fillRef>
+          <a:effectRef idx="0">
+            <a:schemeClr val="accent1"/>
+          </a:effectRef>
+          <a:fontRef idx="minor">
+            <a:schemeClr val="lt1"/>
+          </a:fontRef>
+        </p:style>
+        <p:txBody>
+          <a:bodyPr rtlCol="0" anchor="ctr"/>
+          <a:lstStyle/>
+          <a:p>
+            <a:pPr algn="ctr"/>
+            <a:endParaRPr lang="en-AU"/>
+          </a:p>
+        </p:txBody>
+      </p:sp>
+      <p:pic>
+        <p:nvPicPr>
+          <p:cNvPr id="17" name="Picture 16">
+            <a:extLst>
+              <a:ext uri="{FF2B5EF4-FFF2-40B4-BE49-F238E27FC236}">
+                <a16:creationId xmlns:a16="http://schemas.microsoft.com/office/drawing/2014/main" id="{D31F1E30-53EB-4053-9271-D62D631B0267}"/>
+              </a:ext>
+            </a:extLst>
+          </p:cNvPr>
+          <p:cNvPicPr>
+            <a:picLocks noChangeAspect="1"/>
+          </p:cNvPicPr>
+          <p:nvPr/>
+        </p:nvPicPr>
+        <p:blipFill rotWithShape="1">
+          <a:blip r:embed="rId2"/>
+          <a:srcRect b="5893"/>
+          <a:stretch/>
+        </p:blipFill>
+        <p:spPr>
+          <a:xfrm>
+            <a:off x="76200" y="1171094"/>
+            <a:ext cx="11209116" cy="5135460"/>
+          </a:xfrm>
+          <a:prstGeom prst="rect">
+            <a:avLst/>
+          </a:prstGeom>
+        </p:spPr>
+      </p:pic>
+      <p:cxnSp>
+        <p:nvCxnSpPr>
+          <p:cNvPr id="7" name="Straight Connector 6">
+            <a:extLst>
+              <a:ext uri="{FF2B5EF4-FFF2-40B4-BE49-F238E27FC236}">
+                <a16:creationId xmlns:a16="http://schemas.microsoft.com/office/drawing/2014/main" id="{BBD6C9FA-282C-49CB-8518-DDF1D5DA811F}"/>
+              </a:ext>
+            </a:extLst>
+          </p:cNvPr>
+          <p:cNvCxnSpPr>
+            <a:cxnSpLocks/>
+          </p:cNvCxnSpPr>
+          <p:nvPr/>
+        </p:nvCxnSpPr>
+        <p:spPr>
+          <a:xfrm flipH="1">
+            <a:off x="780177" y="2558642"/>
+            <a:ext cx="8355434" cy="0"/>
+          </a:xfrm>
+          <a:prstGeom prst="line">
+            <a:avLst/>
+          </a:prstGeom>
+          <a:ln w="28575">
+            <a:solidFill>
+              <a:srgbClr val="D1275D"/>
+            </a:solidFill>
+            <a:prstDash val="lgDash"/>
+          </a:ln>
+        </p:spPr>
+        <p:style>
+          <a:lnRef idx="1">
+            <a:schemeClr val="accent1"/>
+          </a:lnRef>
+          <a:fillRef idx="0">
+            <a:schemeClr val="accent1"/>
+          </a:fillRef>
+          <a:effectRef idx="0">
+            <a:schemeClr val="accent1"/>
+          </a:effectRef>
+          <a:fontRef idx="minor">
+            <a:schemeClr val="tx1"/>
+          </a:fontRef>
+        </p:style>
+      </p:cxnSp>
+      <p:pic>
+        <p:nvPicPr>
+          <p:cNvPr id="10" name="Picture 9">
+            <a:extLst>
+              <a:ext uri="{FF2B5EF4-FFF2-40B4-BE49-F238E27FC236}">
+                <a16:creationId xmlns:a16="http://schemas.microsoft.com/office/drawing/2014/main" id="{8C3D2EF4-BDD2-4DAD-B9CE-A30766D698F3}"/>
+              </a:ext>
+            </a:extLst>
+          </p:cNvPr>
+          <p:cNvPicPr>
+            <a:picLocks noChangeAspect="1"/>
+          </p:cNvPicPr>
+          <p:nvPr/>
+        </p:nvPicPr>
+        <p:blipFill rotWithShape="1">
+          <a:blip r:embed="rId3"/>
+          <a:srcRect l="85252" t="50000" b="40201"/>
+          <a:stretch/>
+        </p:blipFill>
+        <p:spPr>
+          <a:xfrm>
+            <a:off x="1182847" y="1373698"/>
+            <a:ext cx="2550253" cy="728786"/>
+          </a:xfrm>
+          <a:prstGeom prst="rect">
+            <a:avLst/>
+          </a:prstGeom>
+        </p:spPr>
+      </p:pic>
+      <p:sp>
+        <p:nvSpPr>
+          <p:cNvPr id="13" name="TextBox 12">
+            <a:extLst>
+              <a:ext uri="{FF2B5EF4-FFF2-40B4-BE49-F238E27FC236}">
+                <a16:creationId xmlns:a16="http://schemas.microsoft.com/office/drawing/2014/main" id="{7C27C4B0-C470-4757-85CE-C962F8E8AF52}"/>
+              </a:ext>
+            </a:extLst>
+          </p:cNvPr>
+          <p:cNvSpPr txBox="1"/>
+          <p:nvPr/>
+        </p:nvSpPr>
+        <p:spPr>
+          <a:xfrm>
+            <a:off x="3932365" y="1879995"/>
+            <a:ext cx="4526537" cy="646331"/>
+          </a:xfrm>
+          <a:prstGeom prst="rect">
+            <a:avLst/>
+          </a:prstGeom>
+          <a:noFill/>
+        </p:spPr>
+        <p:txBody>
+          <a:bodyPr wrap="square" rtlCol="0">
+            <a:spAutoFit/>
+          </a:bodyPr>
+          <a:lstStyle/>
+          <a:p>
+            <a:pPr algn="ctr"/>
+            <a:r>
+              <a:rPr lang="en-US" b="1" dirty="0">
+                <a:solidFill>
+                  <a:srgbClr val="D1275D"/>
+                </a:solidFill>
+              </a:rPr>
+              <a:t>Each Ticket Commands ~15.5DCR</a:t>
+            </a:r>
+          </a:p>
+          <a:p>
+            <a:pPr algn="ctr"/>
+            <a:r>
+              <a:rPr lang="en-US" b="1" dirty="0">
+                <a:solidFill>
+                  <a:srgbClr val="D1275D"/>
+                </a:solidFill>
+              </a:rPr>
+              <a:t>of Treasury Value</a:t>
+            </a:r>
+          </a:p>
+        </p:txBody>
+      </p:sp>
+      <p:cxnSp>
+        <p:nvCxnSpPr>
+          <p:cNvPr id="14" name="Straight Connector 13">
+            <a:extLst>
+              <a:ext uri="{FF2B5EF4-FFF2-40B4-BE49-F238E27FC236}">
+                <a16:creationId xmlns:a16="http://schemas.microsoft.com/office/drawing/2014/main" id="{03A0DA0C-1CED-4478-B7DF-D5FAF2FF55AC}"/>
+              </a:ext>
+            </a:extLst>
+          </p:cNvPr>
+          <p:cNvCxnSpPr>
+            <a:cxnSpLocks/>
+          </p:cNvCxnSpPr>
+          <p:nvPr/>
+        </p:nvCxnSpPr>
+        <p:spPr>
+          <a:xfrm flipH="1">
+            <a:off x="9076888" y="3524774"/>
+            <a:ext cx="1377192" cy="0"/>
+          </a:xfrm>
+          <a:prstGeom prst="line">
+            <a:avLst/>
+          </a:prstGeom>
+          <a:ln w="28575">
+            <a:solidFill>
+              <a:srgbClr val="23DBCE"/>
+            </a:solidFill>
+            <a:prstDash val="lgDash"/>
+          </a:ln>
+        </p:spPr>
+        <p:style>
+          <a:lnRef idx="1">
+            <a:schemeClr val="accent1"/>
+          </a:lnRef>
+          <a:fillRef idx="0">
+            <a:schemeClr val="accent1"/>
+          </a:fillRef>
+          <a:effectRef idx="0">
+            <a:schemeClr val="accent1"/>
+          </a:effectRef>
+          <a:fontRef idx="minor">
+            <a:schemeClr val="tx1"/>
+          </a:fontRef>
+        </p:style>
+      </p:cxnSp>
+      <p:sp>
+        <p:nvSpPr>
+          <p:cNvPr id="16" name="TextBox 15">
+            <a:extLst>
+              <a:ext uri="{FF2B5EF4-FFF2-40B4-BE49-F238E27FC236}">
+                <a16:creationId xmlns:a16="http://schemas.microsoft.com/office/drawing/2014/main" id="{296038F4-1AA5-490A-B8F5-61F405D1E914}"/>
+              </a:ext>
+            </a:extLst>
+          </p:cNvPr>
+          <p:cNvSpPr txBox="1"/>
+          <p:nvPr/>
+        </p:nvSpPr>
+        <p:spPr>
+          <a:xfrm>
+            <a:off x="7430547" y="3738824"/>
+            <a:ext cx="2923566" cy="646331"/>
+          </a:xfrm>
+          <a:prstGeom prst="rect">
+            <a:avLst/>
+          </a:prstGeom>
+          <a:noFill/>
+        </p:spPr>
+        <p:txBody>
+          <a:bodyPr wrap="square" rtlCol="0">
+            <a:spAutoFit/>
+          </a:bodyPr>
+          <a:lstStyle/>
+          <a:p>
+            <a:pPr algn="ctr"/>
+            <a:r>
+              <a:rPr lang="en-US" b="1" dirty="0">
+                <a:solidFill>
+                  <a:srgbClr val="23DBCE"/>
+                </a:solidFill>
+              </a:rPr>
+              <a:t>15.5DCR Equivalent to</a:t>
+            </a:r>
+          </a:p>
+          <a:p>
+            <a:pPr algn="ctr"/>
+            <a:r>
+              <a:rPr lang="en-US" b="1" dirty="0">
+                <a:solidFill>
+                  <a:srgbClr val="23DBCE"/>
+                </a:solidFill>
+              </a:rPr>
+              <a:t>~11% of Ticket Value</a:t>
+            </a:r>
+          </a:p>
+        </p:txBody>
+      </p:sp>
+      <p:pic>
+        <p:nvPicPr>
+          <p:cNvPr id="18" name="Picture 17">
+            <a:extLst>
+              <a:ext uri="{FF2B5EF4-FFF2-40B4-BE49-F238E27FC236}">
+                <a16:creationId xmlns:a16="http://schemas.microsoft.com/office/drawing/2014/main" id="{0EB0F4AF-7A41-4CFF-B658-C33AE0885AC7}"/>
+              </a:ext>
+            </a:extLst>
+          </p:cNvPr>
+          <p:cNvPicPr>
+            <a:picLocks noChangeAspect="1"/>
+          </p:cNvPicPr>
+          <p:nvPr/>
+        </p:nvPicPr>
+        <p:blipFill>
+          <a:blip r:embed="rId4"/>
+          <a:stretch>
+            <a:fillRect/>
+          </a:stretch>
+        </p:blipFill>
+        <p:spPr>
+          <a:xfrm>
+            <a:off x="2338387" y="247208"/>
+            <a:ext cx="6276975" cy="657225"/>
+          </a:xfrm>
+          <a:prstGeom prst="rect">
+            <a:avLst/>
+          </a:prstGeom>
+        </p:spPr>
+      </p:pic>
+    </p:spTree>
+    <p:extLst>
+      <p:ext uri="{BB962C8B-B14F-4D97-AF65-F5344CB8AC3E}">
+        <p14:creationId xmlns:p14="http://schemas.microsoft.com/office/powerpoint/2010/main" val="2945493968"/>
+      </p:ext>
+    </p:extLst>
+  </p:cSld>
+  <p:clrMapOvr>
+    <a:masterClrMapping/>
+  </p:clrMapOvr>
+</p:sld>
+</file>
+
+<file path=ppt/slides/slide29.xml><?xml version="1.0" encoding="utf-8"?>
 <p:sld xmlns:a="http://schemas.openxmlformats.org/drawingml/2006/main" xmlns:r="http://schemas.openxmlformats.org/officeDocument/2006/relationships" xmlns:p="http://schemas.openxmlformats.org/presentationml/2006/main">
   <p:cSld>
     <p:spTree>

--- a/research_articles/masterclasses/consensus_distributed/consensus_distributed.pptx
+++ b/research_articles/masterclasses/consensus_distributed/consensus_distributed.pptx
@@ -5,7 +5,7 @@
     <p:sldMasterId id="2147483678" r:id="rId1"/>
   </p:sldMasterIdLst>
   <p:notesMasterIdLst>
-    <p:notesMasterId r:id="rId31"/>
+    <p:notesMasterId r:id="rId32"/>
   </p:notesMasterIdLst>
   <p:sldIdLst>
     <p:sldId id="595" r:id="rId2"/>
@@ -37,6 +37,7 @@
     <p:sldId id="629" r:id="rId28"/>
     <p:sldId id="630" r:id="rId29"/>
     <p:sldId id="627" r:id="rId30"/>
+    <p:sldId id="631" r:id="rId31"/>
   </p:sldIdLst>
   <p:sldSz cx="12192000" cy="6858000"/>
   <p:notesSz cx="6858000" cy="9144000"/>
@@ -13265,6 +13266,124 @@
     <p:extLst>
       <p:ext uri="{BB962C8B-B14F-4D97-AF65-F5344CB8AC3E}">
         <p14:creationId xmlns:p14="http://schemas.microsoft.com/office/powerpoint/2010/main" val="2918585843"/>
+      </p:ext>
+    </p:extLst>
+  </p:cSld>
+  <p:clrMapOvr>
+    <a:masterClrMapping/>
+  </p:clrMapOvr>
+</p:sld>
+</file>
+
+<file path=ppt/slides/slide30.xml><?xml version="1.0" encoding="utf-8"?>
+<p:sld xmlns:a="http://schemas.openxmlformats.org/drawingml/2006/main" xmlns:r="http://schemas.openxmlformats.org/officeDocument/2006/relationships" xmlns:p="http://schemas.openxmlformats.org/presentationml/2006/main">
+  <p:cSld>
+    <p:spTree>
+      <p:nvGrpSpPr>
+        <p:cNvPr id="1" name=""/>
+        <p:cNvGrpSpPr/>
+        <p:nvPr/>
+      </p:nvGrpSpPr>
+      <p:grpSpPr>
+        <a:xfrm>
+          <a:off x="0" y="0"/>
+          <a:ext cx="0" cy="0"/>
+          <a:chOff x="0" y="0"/>
+          <a:chExt cx="0" cy="0"/>
+        </a:xfrm>
+      </p:grpSpPr>
+      <p:sp>
+        <p:nvSpPr>
+          <p:cNvPr id="2" name="Title 1">
+            <a:extLst>
+              <a:ext uri="{FF2B5EF4-FFF2-40B4-BE49-F238E27FC236}">
+                <a16:creationId xmlns:a16="http://schemas.microsoft.com/office/drawing/2014/main" id="{DB9E8E45-3BE1-4C78-8472-1714E89AB129}"/>
+              </a:ext>
+            </a:extLst>
+          </p:cNvPr>
+          <p:cNvSpPr>
+            <a:spLocks noGrp="1"/>
+          </p:cNvSpPr>
+          <p:nvPr>
+            <p:ph type="title"/>
+          </p:nvPr>
+        </p:nvSpPr>
+        <p:spPr/>
+        <p:txBody>
+          <a:bodyPr/>
+          <a:lstStyle/>
+          <a:p>
+            <a:r>
+              <a:rPr lang="en-US" dirty="0"/>
+              <a:t>Summary</a:t>
+            </a:r>
+            <a:endParaRPr lang="en-AU" dirty="0"/>
+          </a:p>
+        </p:txBody>
+      </p:sp>
+      <p:sp>
+        <p:nvSpPr>
+          <p:cNvPr id="3" name="Content Placeholder 2">
+            <a:extLst>
+              <a:ext uri="{FF2B5EF4-FFF2-40B4-BE49-F238E27FC236}">
+                <a16:creationId xmlns:a16="http://schemas.microsoft.com/office/drawing/2014/main" id="{32132A16-D761-4B9A-9032-B5A4FC5198EE}"/>
+              </a:ext>
+            </a:extLst>
+          </p:cNvPr>
+          <p:cNvSpPr>
+            <a:spLocks noGrp="1"/>
+          </p:cNvSpPr>
+          <p:nvPr>
+            <p:ph idx="1"/>
+          </p:nvPr>
+        </p:nvSpPr>
+        <p:spPr/>
+        <p:txBody>
+          <a:bodyPr>
+            <a:normAutofit/>
+          </a:bodyPr>
+          <a:lstStyle/>
+          <a:p>
+            <a:r>
+              <a:rPr lang="en-US" dirty="0"/>
+              <a:t>Great value and importance is placed on </a:t>
+            </a:r>
+            <a:r>
+              <a:rPr lang="en-US" b="1" dirty="0"/>
+              <a:t>Good Governance </a:t>
+            </a:r>
+            <a:r>
+              <a:rPr lang="en-US" dirty="0"/>
+              <a:t>by the Decred DAO.</a:t>
+            </a:r>
+          </a:p>
+          <a:p>
+            <a:endParaRPr lang="en-US" dirty="0"/>
+          </a:p>
+          <a:p>
+            <a:r>
+              <a:rPr lang="en-US" dirty="0"/>
+              <a:t>On-chain analysis provides data, tools and insights to network health upon which stakeholders can base decisions.</a:t>
+            </a:r>
+          </a:p>
+          <a:p>
+            <a:endParaRPr lang="en-US" dirty="0"/>
+          </a:p>
+          <a:p>
+            <a:r>
+              <a:rPr lang="en-US" dirty="0"/>
+              <a:t>Impressively, the Decred DAO has bootstrapped itself entirely by its own Treasury ensuring self-sovereignty and longevity.</a:t>
+            </a:r>
+          </a:p>
+          <a:p>
+            <a:endParaRPr lang="en-AU" dirty="0"/>
+          </a:p>
+        </p:txBody>
+      </p:sp>
+    </p:spTree>
+    <p:extLst>
+      <p:ext uri="{BB962C8B-B14F-4D97-AF65-F5344CB8AC3E}">
+        <p14:creationId xmlns:p14="http://schemas.microsoft.com/office/powerpoint/2010/main" val="3319829169"/>
       </p:ext>
     </p:extLst>
   </p:cSld>

--- a/research_articles/masterclasses/consensus_distributed/consensus_distributed.pptx
+++ b/research_articles/masterclasses/consensus_distributed/consensus_distributed.pptx
@@ -5,7 +5,7 @@
     <p:sldMasterId id="2147483678" r:id="rId1"/>
   </p:sldMasterIdLst>
   <p:notesMasterIdLst>
-    <p:notesMasterId r:id="rId32"/>
+    <p:notesMasterId r:id="rId35"/>
   </p:notesMasterIdLst>
   <p:sldIdLst>
     <p:sldId id="595" r:id="rId2"/>
@@ -16,28 +16,31 @@
     <p:sldId id="604" r:id="rId7"/>
     <p:sldId id="605" r:id="rId8"/>
     <p:sldId id="607" r:id="rId9"/>
-    <p:sldId id="608" r:id="rId10"/>
-    <p:sldId id="598" r:id="rId11"/>
-    <p:sldId id="600" r:id="rId12"/>
-    <p:sldId id="601" r:id="rId13"/>
-    <p:sldId id="612" r:id="rId14"/>
-    <p:sldId id="613" r:id="rId15"/>
-    <p:sldId id="614" r:id="rId16"/>
-    <p:sldId id="616" r:id="rId17"/>
-    <p:sldId id="618" r:id="rId18"/>
-    <p:sldId id="619" r:id="rId19"/>
-    <p:sldId id="621" r:id="rId20"/>
-    <p:sldId id="622" r:id="rId21"/>
-    <p:sldId id="620" r:id="rId22"/>
-    <p:sldId id="624" r:id="rId23"/>
-    <p:sldId id="623" r:id="rId24"/>
-    <p:sldId id="625" r:id="rId25"/>
-    <p:sldId id="626" r:id="rId26"/>
-    <p:sldId id="628" r:id="rId27"/>
-    <p:sldId id="629" r:id="rId28"/>
-    <p:sldId id="630" r:id="rId29"/>
-    <p:sldId id="627" r:id="rId30"/>
-    <p:sldId id="631" r:id="rId31"/>
+    <p:sldId id="634" r:id="rId10"/>
+    <p:sldId id="608" r:id="rId11"/>
+    <p:sldId id="598" r:id="rId12"/>
+    <p:sldId id="600" r:id="rId13"/>
+    <p:sldId id="601" r:id="rId14"/>
+    <p:sldId id="612" r:id="rId15"/>
+    <p:sldId id="613" r:id="rId16"/>
+    <p:sldId id="614" r:id="rId17"/>
+    <p:sldId id="616" r:id="rId18"/>
+    <p:sldId id="618" r:id="rId19"/>
+    <p:sldId id="633" r:id="rId20"/>
+    <p:sldId id="619" r:id="rId21"/>
+    <p:sldId id="621" r:id="rId22"/>
+    <p:sldId id="622" r:id="rId23"/>
+    <p:sldId id="620" r:id="rId24"/>
+    <p:sldId id="624" r:id="rId25"/>
+    <p:sldId id="632" r:id="rId26"/>
+    <p:sldId id="623" r:id="rId27"/>
+    <p:sldId id="625" r:id="rId28"/>
+    <p:sldId id="626" r:id="rId29"/>
+    <p:sldId id="628" r:id="rId30"/>
+    <p:sldId id="629" r:id="rId31"/>
+    <p:sldId id="630" r:id="rId32"/>
+    <p:sldId id="627" r:id="rId33"/>
+    <p:sldId id="631" r:id="rId34"/>
   </p:sldIdLst>
   <p:sldSz cx="12192000" cy="6858000"/>
   <p:notesSz cx="6858000" cy="9144000"/>
@@ -241,7 +244,7 @@
           <a:p>
             <a:fld id="{0E14D5B3-C0ED-4E5B-BEFF-6A7BA239570E}" type="datetimeFigureOut">
               <a:rPr lang="en-AU" smtClean="0"/>
-              <a:t>04-May-20</a:t>
+              <a:t>06-May-20</a:t>
             </a:fld>
             <a:endParaRPr lang="en-AU"/>
           </a:p>
@@ -2333,7 +2336,7 @@
           <a:p>
             <a:fld id="{B897D379-7DB5-4F5B-A6CE-2518FE7EEDA5}" type="datetime1">
               <a:rPr lang="en-AU" smtClean="0"/>
-              <a:t>04-May-20</a:t>
+              <a:t>06-May-20</a:t>
             </a:fld>
             <a:endParaRPr lang="en-AU"/>
           </a:p>
@@ -3163,64 +3166,10 @@
       </p:grpSpPr>
       <p:sp>
         <p:nvSpPr>
-          <p:cNvPr id="6" name="Rectangle 5">
-            <a:extLst>
-              <a:ext uri="{FF2B5EF4-FFF2-40B4-BE49-F238E27FC236}">
-                <a16:creationId xmlns:a16="http://schemas.microsoft.com/office/drawing/2014/main" id="{C21924BE-E4A9-4F11-BECA-8C0ADEC187EC}"/>
-              </a:ext>
-            </a:extLst>
-          </p:cNvPr>
-          <p:cNvSpPr/>
-          <p:nvPr/>
-        </p:nvSpPr>
-        <p:spPr>
-          <a:xfrm>
-            <a:off x="0" y="0"/>
-            <a:ext cx="11285316" cy="6858000"/>
-          </a:xfrm>
-          <a:prstGeom prst="rect">
-            <a:avLst/>
-          </a:prstGeom>
-          <a:solidFill>
-            <a:srgbClr val="F5F5F5"/>
-          </a:solidFill>
-          <a:ln>
-            <a:solidFill>
-              <a:srgbClr val="F5F5F5"/>
-            </a:solidFill>
-          </a:ln>
-        </p:spPr>
-        <p:style>
-          <a:lnRef idx="2">
-            <a:schemeClr val="accent1">
-              <a:shade val="50000"/>
-            </a:schemeClr>
-          </a:lnRef>
-          <a:fillRef idx="1">
-            <a:schemeClr val="accent1"/>
-          </a:fillRef>
-          <a:effectRef idx="0">
-            <a:schemeClr val="accent1"/>
-          </a:effectRef>
-          <a:fontRef idx="minor">
-            <a:schemeClr val="lt1"/>
-          </a:fontRef>
-        </p:style>
-        <p:txBody>
-          <a:bodyPr rtlCol="0" anchor="ctr"/>
-          <a:lstStyle/>
-          <a:p>
-            <a:pPr algn="ctr"/>
-            <a:endParaRPr lang="en-AU"/>
-          </a:p>
-        </p:txBody>
-      </p:sp>
-      <p:sp>
-        <p:nvSpPr>
-          <p:cNvPr id="3" name="Content Placeholder 2">
-            <a:extLst>
-              <a:ext uri="{FF2B5EF4-FFF2-40B4-BE49-F238E27FC236}">
-                <a16:creationId xmlns:a16="http://schemas.microsoft.com/office/drawing/2014/main" id="{D683652B-F0FB-48E8-8E47-17433395508A}"/>
+          <p:cNvPr id="2" name="Title 1">
+            <a:extLst>
+              <a:ext uri="{FF2B5EF4-FFF2-40B4-BE49-F238E27FC236}">
+                <a16:creationId xmlns:a16="http://schemas.microsoft.com/office/drawing/2014/main" id="{0D8D6E23-A9D9-4BDA-8337-C6A01F6E438A}"/>
               </a:ext>
             </a:extLst>
           </p:cNvPr>
@@ -3228,7 +3177,7 @@
             <a:spLocks noGrp="1"/>
           </p:cNvSpPr>
           <p:nvPr>
-            <p:ph idx="1"/>
+            <p:ph type="ctrTitle"/>
           </p:nvPr>
         </p:nvSpPr>
         <p:spPr/>
@@ -3236,298 +3185,47 @@
           <a:bodyPr/>
           <a:lstStyle/>
           <a:p>
-            <a:endParaRPr lang="en-AU"/>
+            <a:r>
+              <a:rPr lang="en-US" dirty="0"/>
+              <a:t>142-Day Sum of USD Ticket Value</a:t>
+            </a:r>
+            <a:endParaRPr lang="en-AU" dirty="0"/>
           </a:p>
         </p:txBody>
       </p:sp>
-      <p:pic>
-        <p:nvPicPr>
-          <p:cNvPr id="4" name="Picture 3">
-            <a:extLst>
-              <a:ext uri="{FF2B5EF4-FFF2-40B4-BE49-F238E27FC236}">
-                <a16:creationId xmlns:a16="http://schemas.microsoft.com/office/drawing/2014/main" id="{75F32C35-B102-4D0D-8674-D2B5628BF503}"/>
-              </a:ext>
-            </a:extLst>
-          </p:cNvPr>
-          <p:cNvPicPr>
-            <a:picLocks noChangeAspect="1"/>
-          </p:cNvPicPr>
-          <p:nvPr/>
-        </p:nvPicPr>
-        <p:blipFill rotWithShape="1">
-          <a:blip r:embed="rId2"/>
-          <a:srcRect t="1" b="522"/>
-          <a:stretch/>
-        </p:blipFill>
-        <p:spPr>
-          <a:xfrm>
-            <a:off x="64010" y="459419"/>
-            <a:ext cx="11157296" cy="5939161"/>
-          </a:xfrm>
-          <a:prstGeom prst="rect">
-            <a:avLst/>
-          </a:prstGeom>
-        </p:spPr>
-      </p:pic>
-      <p:sp>
-        <p:nvSpPr>
-          <p:cNvPr id="7" name="TextBox 6">
-            <a:extLst>
-              <a:ext uri="{FF2B5EF4-FFF2-40B4-BE49-F238E27FC236}">
-                <a16:creationId xmlns:a16="http://schemas.microsoft.com/office/drawing/2014/main" id="{01CD1036-828E-4EEC-AD08-0ABC81441C34}"/>
-              </a:ext>
-            </a:extLst>
-          </p:cNvPr>
-          <p:cNvSpPr txBox="1"/>
-          <p:nvPr/>
-        </p:nvSpPr>
-        <p:spPr>
-          <a:xfrm>
-            <a:off x="590914" y="1396302"/>
-            <a:ext cx="4155440" cy="646331"/>
-          </a:xfrm>
-          <a:prstGeom prst="rect">
-            <a:avLst/>
-          </a:prstGeom>
-          <a:noFill/>
-        </p:spPr>
+      <p:sp>
+        <p:nvSpPr>
+          <p:cNvPr id="3" name="Subtitle 2">
+            <a:extLst>
+              <a:ext uri="{FF2B5EF4-FFF2-40B4-BE49-F238E27FC236}">
+                <a16:creationId xmlns:a16="http://schemas.microsoft.com/office/drawing/2014/main" id="{47CCABE3-5CA9-49CE-B1EB-BAA7C056352B}"/>
+              </a:ext>
+            </a:extLst>
+          </p:cNvPr>
+          <p:cNvSpPr>
+            <a:spLocks noGrp="1"/>
+          </p:cNvSpPr>
+          <p:nvPr>
+            <p:ph type="subTitle" idx="1"/>
+          </p:nvPr>
+        </p:nvSpPr>
+        <p:spPr/>
         <p:txBody>
-          <a:bodyPr wrap="square" rtlCol="0">
-            <a:spAutoFit/>
-          </a:bodyPr>
+          <a:bodyPr/>
           <a:lstStyle/>
           <a:p>
-            <a:pPr algn="ctr"/>
             <a:r>
-              <a:rPr lang="en-US" b="1" u="sng" dirty="0">
-                <a:solidFill>
-                  <a:srgbClr val="002060"/>
-                </a:solidFill>
-              </a:rPr>
-              <a:t>142-day Sum of USD in Tickets </a:t>
+              <a:rPr lang="en-US" dirty="0"/>
+              <a:t>The cumulative sum of USD bound in tickets is a show of long term, strong hand holder conviction.</a:t>
             </a:r>
-          </a:p>
-          <a:p>
-            <a:pPr algn="ctr"/>
-            <a:r>
-              <a:rPr lang="en-US" b="1" dirty="0">
-                <a:solidFill>
-                  <a:srgbClr val="002060"/>
-                </a:solidFill>
-              </a:rPr>
-              <a:t>Coin Supply</a:t>
-            </a:r>
-            <a:endParaRPr lang="en-AU" b="1" dirty="0">
-              <a:solidFill>
-                <a:srgbClr val="002060"/>
-              </a:solidFill>
-            </a:endParaRPr>
+            <a:endParaRPr lang="en-AU" dirty="0"/>
           </a:p>
         </p:txBody>
       </p:sp>
-      <p:cxnSp>
-        <p:nvCxnSpPr>
-          <p:cNvPr id="9" name="Straight Arrow Connector 8">
-            <a:extLst>
-              <a:ext uri="{FF2B5EF4-FFF2-40B4-BE49-F238E27FC236}">
-                <a16:creationId xmlns:a16="http://schemas.microsoft.com/office/drawing/2014/main" id="{ED584F7E-DC64-4A61-B3CD-0670EF1C1A4B}"/>
-              </a:ext>
-            </a:extLst>
-          </p:cNvPr>
-          <p:cNvCxnSpPr>
-            <a:cxnSpLocks/>
-          </p:cNvCxnSpPr>
-          <p:nvPr/>
-        </p:nvCxnSpPr>
-        <p:spPr>
-          <a:xfrm>
-            <a:off x="4551680" y="1631180"/>
-            <a:ext cx="600564" cy="411453"/>
-          </a:xfrm>
-          <a:prstGeom prst="straightConnector1">
-            <a:avLst/>
-          </a:prstGeom>
-          <a:ln>
-            <a:solidFill>
-              <a:srgbClr val="091440"/>
-            </a:solidFill>
-            <a:tailEnd type="triangle"/>
-          </a:ln>
-        </p:spPr>
-        <p:style>
-          <a:lnRef idx="1">
-            <a:schemeClr val="accent1"/>
-          </a:lnRef>
-          <a:fillRef idx="0">
-            <a:schemeClr val="accent1"/>
-          </a:fillRef>
-          <a:effectRef idx="0">
-            <a:schemeClr val="accent1"/>
-          </a:effectRef>
-          <a:fontRef idx="minor">
-            <a:schemeClr val="tx1"/>
-          </a:fontRef>
-        </p:style>
-      </p:cxnSp>
-      <p:sp>
-        <p:nvSpPr>
-          <p:cNvPr id="11" name="TextBox 10">
-            <a:extLst>
-              <a:ext uri="{FF2B5EF4-FFF2-40B4-BE49-F238E27FC236}">
-                <a16:creationId xmlns:a16="http://schemas.microsoft.com/office/drawing/2014/main" id="{B3897E8D-B4B1-4C6B-94BC-260DB0D0EED4}"/>
-              </a:ext>
-            </a:extLst>
-          </p:cNvPr>
-          <p:cNvSpPr txBox="1"/>
-          <p:nvPr/>
-        </p:nvSpPr>
-        <p:spPr>
-          <a:xfrm>
-            <a:off x="9708031" y="2557145"/>
-            <a:ext cx="887836" cy="769441"/>
-          </a:xfrm>
-          <a:prstGeom prst="rect">
-            <a:avLst/>
-          </a:prstGeom>
-          <a:noFill/>
-        </p:spPr>
-        <p:txBody>
-          <a:bodyPr wrap="square" rtlCol="0">
-            <a:spAutoFit/>
-          </a:bodyPr>
-          <a:lstStyle/>
-          <a:p>
-            <a:pPr algn="ctr"/>
-            <a:r>
-              <a:rPr lang="en-US" sz="1100" b="1" i="1" dirty="0">
-                <a:solidFill>
-                  <a:srgbClr val="002060"/>
-                </a:solidFill>
-              </a:rPr>
-              <a:t>x61.8%</a:t>
-            </a:r>
-          </a:p>
-          <a:p>
-            <a:pPr algn="ctr"/>
-            <a:r>
-              <a:rPr lang="en-AU" sz="1100" b="1" i="1" dirty="0">
-                <a:solidFill>
-                  <a:srgbClr val="002060"/>
-                </a:solidFill>
-              </a:rPr>
-              <a:t>x50.0%</a:t>
-            </a:r>
-          </a:p>
-          <a:p>
-            <a:pPr algn="ctr"/>
-            <a:r>
-              <a:rPr lang="en-AU" sz="1100" b="1" i="1" dirty="0">
-                <a:solidFill>
-                  <a:srgbClr val="002060"/>
-                </a:solidFill>
-              </a:rPr>
-              <a:t>x38.2%</a:t>
-            </a:r>
-          </a:p>
-          <a:p>
-            <a:pPr algn="ctr"/>
-            <a:r>
-              <a:rPr lang="en-AU" sz="1100" b="1" i="1" dirty="0">
-                <a:solidFill>
-                  <a:srgbClr val="002060"/>
-                </a:solidFill>
-              </a:rPr>
-              <a:t>x23.6%</a:t>
-            </a:r>
-          </a:p>
-        </p:txBody>
-      </p:sp>
-      <p:sp>
-        <p:nvSpPr>
-          <p:cNvPr id="14" name="TextBox 13">
-            <a:extLst>
-              <a:ext uri="{FF2B5EF4-FFF2-40B4-BE49-F238E27FC236}">
-                <a16:creationId xmlns:a16="http://schemas.microsoft.com/office/drawing/2014/main" id="{0C257F41-6EED-4A93-BBDD-66E9E75A1301}"/>
-              </a:ext>
-            </a:extLst>
-          </p:cNvPr>
-          <p:cNvSpPr txBox="1"/>
-          <p:nvPr/>
-        </p:nvSpPr>
-        <p:spPr>
-          <a:xfrm>
-            <a:off x="590914" y="6443624"/>
-            <a:ext cx="10103487" cy="369332"/>
-          </a:xfrm>
-          <a:prstGeom prst="rect">
-            <a:avLst/>
-          </a:prstGeom>
-          <a:noFill/>
-        </p:spPr>
-        <p:txBody>
-          <a:bodyPr wrap="square" rtlCol="0">
-            <a:spAutoFit/>
-          </a:bodyPr>
-          <a:lstStyle/>
-          <a:p>
-            <a:pPr algn="ctr"/>
-            <a:r>
-              <a:rPr lang="en-US" b="1" dirty="0">
-                <a:solidFill>
-                  <a:srgbClr val="002060"/>
-                </a:solidFill>
-              </a:rPr>
-              <a:t>Psychology: </a:t>
-            </a:r>
-            <a:r>
-              <a:rPr lang="en-US" dirty="0">
-                <a:solidFill>
-                  <a:srgbClr val="002060"/>
-                </a:solidFill>
-              </a:rPr>
-              <a:t>Ticket purchase suggests strong belief (+ ceiling) on future price appreciation </a:t>
-            </a:r>
-            <a:endParaRPr lang="en-AU" dirty="0">
-              <a:solidFill>
-                <a:srgbClr val="002060"/>
-              </a:solidFill>
-            </a:endParaRPr>
-          </a:p>
-        </p:txBody>
-      </p:sp>
-      <p:pic>
-        <p:nvPicPr>
-          <p:cNvPr id="21" name="Picture 20">
-            <a:extLst>
-              <a:ext uri="{FF2B5EF4-FFF2-40B4-BE49-F238E27FC236}">
-                <a16:creationId xmlns:a16="http://schemas.microsoft.com/office/drawing/2014/main" id="{08DD48A3-7741-46E4-8377-66A735E6A3BB}"/>
-              </a:ext>
-            </a:extLst>
-          </p:cNvPr>
-          <p:cNvPicPr>
-            <a:picLocks noChangeAspect="1"/>
-          </p:cNvPicPr>
-          <p:nvPr/>
-        </p:nvPicPr>
-        <p:blipFill rotWithShape="1">
-          <a:blip r:embed="rId2"/>
-          <a:srcRect l="30585" t="1" r="27001" b="91470"/>
-          <a:stretch/>
-        </p:blipFill>
-        <p:spPr>
-          <a:xfrm>
-            <a:off x="2295925" y="319059"/>
-            <a:ext cx="7046039" cy="758184"/>
-          </a:xfrm>
-          <a:prstGeom prst="rect">
-            <a:avLst/>
-          </a:prstGeom>
-        </p:spPr>
-      </p:pic>
     </p:spTree>
     <p:extLst>
       <p:ext uri="{BB962C8B-B14F-4D97-AF65-F5344CB8AC3E}">
-        <p14:creationId xmlns:p14="http://schemas.microsoft.com/office/powerpoint/2010/main" val="2423034211"/>
+        <p14:creationId xmlns:p14="http://schemas.microsoft.com/office/powerpoint/2010/main" val="2899407925"/>
       </p:ext>
     </p:extLst>
   </p:cSld>
@@ -3664,6 +3362,399 @@
       </p:pic>
       <p:sp>
         <p:nvSpPr>
+          <p:cNvPr id="7" name="TextBox 6">
+            <a:extLst>
+              <a:ext uri="{FF2B5EF4-FFF2-40B4-BE49-F238E27FC236}">
+                <a16:creationId xmlns:a16="http://schemas.microsoft.com/office/drawing/2014/main" id="{01CD1036-828E-4EEC-AD08-0ABC81441C34}"/>
+              </a:ext>
+            </a:extLst>
+          </p:cNvPr>
+          <p:cNvSpPr txBox="1"/>
+          <p:nvPr/>
+        </p:nvSpPr>
+        <p:spPr>
+          <a:xfrm>
+            <a:off x="590914" y="1396302"/>
+            <a:ext cx="4155440" cy="646331"/>
+          </a:xfrm>
+          <a:prstGeom prst="rect">
+            <a:avLst/>
+          </a:prstGeom>
+          <a:noFill/>
+        </p:spPr>
+        <p:txBody>
+          <a:bodyPr wrap="square" rtlCol="0">
+            <a:spAutoFit/>
+          </a:bodyPr>
+          <a:lstStyle/>
+          <a:p>
+            <a:pPr algn="ctr"/>
+            <a:r>
+              <a:rPr lang="en-US" b="1" u="sng" dirty="0">
+                <a:solidFill>
+                  <a:srgbClr val="002060"/>
+                </a:solidFill>
+              </a:rPr>
+              <a:t>142-day Sum of USD in Tickets </a:t>
+            </a:r>
+          </a:p>
+          <a:p>
+            <a:pPr algn="ctr"/>
+            <a:r>
+              <a:rPr lang="en-US" b="1" dirty="0">
+                <a:solidFill>
+                  <a:srgbClr val="002060"/>
+                </a:solidFill>
+              </a:rPr>
+              <a:t>Coin Supply</a:t>
+            </a:r>
+            <a:endParaRPr lang="en-AU" b="1" dirty="0">
+              <a:solidFill>
+                <a:srgbClr val="002060"/>
+              </a:solidFill>
+            </a:endParaRPr>
+          </a:p>
+        </p:txBody>
+      </p:sp>
+      <p:cxnSp>
+        <p:nvCxnSpPr>
+          <p:cNvPr id="9" name="Straight Arrow Connector 8">
+            <a:extLst>
+              <a:ext uri="{FF2B5EF4-FFF2-40B4-BE49-F238E27FC236}">
+                <a16:creationId xmlns:a16="http://schemas.microsoft.com/office/drawing/2014/main" id="{ED584F7E-DC64-4A61-B3CD-0670EF1C1A4B}"/>
+              </a:ext>
+            </a:extLst>
+          </p:cNvPr>
+          <p:cNvCxnSpPr>
+            <a:cxnSpLocks/>
+          </p:cNvCxnSpPr>
+          <p:nvPr/>
+        </p:nvCxnSpPr>
+        <p:spPr>
+          <a:xfrm>
+            <a:off x="4551680" y="1631180"/>
+            <a:ext cx="600564" cy="411453"/>
+          </a:xfrm>
+          <a:prstGeom prst="straightConnector1">
+            <a:avLst/>
+          </a:prstGeom>
+          <a:ln>
+            <a:solidFill>
+              <a:srgbClr val="091440"/>
+            </a:solidFill>
+            <a:tailEnd type="triangle"/>
+          </a:ln>
+        </p:spPr>
+        <p:style>
+          <a:lnRef idx="1">
+            <a:schemeClr val="accent1"/>
+          </a:lnRef>
+          <a:fillRef idx="0">
+            <a:schemeClr val="accent1"/>
+          </a:fillRef>
+          <a:effectRef idx="0">
+            <a:schemeClr val="accent1"/>
+          </a:effectRef>
+          <a:fontRef idx="minor">
+            <a:schemeClr val="tx1"/>
+          </a:fontRef>
+        </p:style>
+      </p:cxnSp>
+      <p:sp>
+        <p:nvSpPr>
+          <p:cNvPr id="11" name="TextBox 10">
+            <a:extLst>
+              <a:ext uri="{FF2B5EF4-FFF2-40B4-BE49-F238E27FC236}">
+                <a16:creationId xmlns:a16="http://schemas.microsoft.com/office/drawing/2014/main" id="{B3897E8D-B4B1-4C6B-94BC-260DB0D0EED4}"/>
+              </a:ext>
+            </a:extLst>
+          </p:cNvPr>
+          <p:cNvSpPr txBox="1"/>
+          <p:nvPr/>
+        </p:nvSpPr>
+        <p:spPr>
+          <a:xfrm>
+            <a:off x="9708031" y="2557145"/>
+            <a:ext cx="887836" cy="769441"/>
+          </a:xfrm>
+          <a:prstGeom prst="rect">
+            <a:avLst/>
+          </a:prstGeom>
+          <a:noFill/>
+        </p:spPr>
+        <p:txBody>
+          <a:bodyPr wrap="square" rtlCol="0">
+            <a:spAutoFit/>
+          </a:bodyPr>
+          <a:lstStyle/>
+          <a:p>
+            <a:pPr algn="ctr"/>
+            <a:r>
+              <a:rPr lang="en-US" sz="1100" b="1" i="1" dirty="0">
+                <a:solidFill>
+                  <a:srgbClr val="002060"/>
+                </a:solidFill>
+              </a:rPr>
+              <a:t>x61.8%</a:t>
+            </a:r>
+          </a:p>
+          <a:p>
+            <a:pPr algn="ctr"/>
+            <a:r>
+              <a:rPr lang="en-AU" sz="1100" b="1" i="1" dirty="0">
+                <a:solidFill>
+                  <a:srgbClr val="002060"/>
+                </a:solidFill>
+              </a:rPr>
+              <a:t>x50.0%</a:t>
+            </a:r>
+          </a:p>
+          <a:p>
+            <a:pPr algn="ctr"/>
+            <a:r>
+              <a:rPr lang="en-AU" sz="1100" b="1" i="1" dirty="0">
+                <a:solidFill>
+                  <a:srgbClr val="002060"/>
+                </a:solidFill>
+              </a:rPr>
+              <a:t>x38.2%</a:t>
+            </a:r>
+          </a:p>
+          <a:p>
+            <a:pPr algn="ctr"/>
+            <a:r>
+              <a:rPr lang="en-AU" sz="1100" b="1" i="1" dirty="0">
+                <a:solidFill>
+                  <a:srgbClr val="002060"/>
+                </a:solidFill>
+              </a:rPr>
+              <a:t>x23.6%</a:t>
+            </a:r>
+          </a:p>
+        </p:txBody>
+      </p:sp>
+      <p:sp>
+        <p:nvSpPr>
+          <p:cNvPr id="14" name="TextBox 13">
+            <a:extLst>
+              <a:ext uri="{FF2B5EF4-FFF2-40B4-BE49-F238E27FC236}">
+                <a16:creationId xmlns:a16="http://schemas.microsoft.com/office/drawing/2014/main" id="{0C257F41-6EED-4A93-BBDD-66E9E75A1301}"/>
+              </a:ext>
+            </a:extLst>
+          </p:cNvPr>
+          <p:cNvSpPr txBox="1"/>
+          <p:nvPr/>
+        </p:nvSpPr>
+        <p:spPr>
+          <a:xfrm>
+            <a:off x="590914" y="6443624"/>
+            <a:ext cx="10103487" cy="369332"/>
+          </a:xfrm>
+          <a:prstGeom prst="rect">
+            <a:avLst/>
+          </a:prstGeom>
+          <a:noFill/>
+        </p:spPr>
+        <p:txBody>
+          <a:bodyPr wrap="square" rtlCol="0">
+            <a:spAutoFit/>
+          </a:bodyPr>
+          <a:lstStyle/>
+          <a:p>
+            <a:pPr algn="ctr"/>
+            <a:r>
+              <a:rPr lang="en-US" b="1" dirty="0">
+                <a:solidFill>
+                  <a:srgbClr val="002060"/>
+                </a:solidFill>
+              </a:rPr>
+              <a:t>Psychology: </a:t>
+            </a:r>
+            <a:r>
+              <a:rPr lang="en-US" dirty="0">
+                <a:solidFill>
+                  <a:srgbClr val="002060"/>
+                </a:solidFill>
+              </a:rPr>
+              <a:t>Ticket purchase suggests strong belief (+ ceiling) on future price appreciation </a:t>
+            </a:r>
+            <a:endParaRPr lang="en-AU" dirty="0">
+              <a:solidFill>
+                <a:srgbClr val="002060"/>
+              </a:solidFill>
+            </a:endParaRPr>
+          </a:p>
+        </p:txBody>
+      </p:sp>
+      <p:pic>
+        <p:nvPicPr>
+          <p:cNvPr id="21" name="Picture 20">
+            <a:extLst>
+              <a:ext uri="{FF2B5EF4-FFF2-40B4-BE49-F238E27FC236}">
+                <a16:creationId xmlns:a16="http://schemas.microsoft.com/office/drawing/2014/main" id="{08DD48A3-7741-46E4-8377-66A735E6A3BB}"/>
+              </a:ext>
+            </a:extLst>
+          </p:cNvPr>
+          <p:cNvPicPr>
+            <a:picLocks noChangeAspect="1"/>
+          </p:cNvPicPr>
+          <p:nvPr/>
+        </p:nvPicPr>
+        <p:blipFill rotWithShape="1">
+          <a:blip r:embed="rId2"/>
+          <a:srcRect l="30585" t="1" r="27001" b="91470"/>
+          <a:stretch/>
+        </p:blipFill>
+        <p:spPr>
+          <a:xfrm>
+            <a:off x="2295925" y="319059"/>
+            <a:ext cx="7046039" cy="758184"/>
+          </a:xfrm>
+          <a:prstGeom prst="rect">
+            <a:avLst/>
+          </a:prstGeom>
+        </p:spPr>
+      </p:pic>
+    </p:spTree>
+    <p:extLst>
+      <p:ext uri="{BB962C8B-B14F-4D97-AF65-F5344CB8AC3E}">
+        <p14:creationId xmlns:p14="http://schemas.microsoft.com/office/powerpoint/2010/main" val="2423034211"/>
+      </p:ext>
+    </p:extLst>
+  </p:cSld>
+  <p:clrMapOvr>
+    <a:masterClrMapping/>
+  </p:clrMapOvr>
+</p:sld>
+</file>
+
+<file path=ppt/slides/slide12.xml><?xml version="1.0" encoding="utf-8"?>
+<p:sld xmlns:a="http://schemas.openxmlformats.org/drawingml/2006/main" xmlns:r="http://schemas.openxmlformats.org/officeDocument/2006/relationships" xmlns:p="http://schemas.openxmlformats.org/presentationml/2006/main">
+  <p:cSld>
+    <p:spTree>
+      <p:nvGrpSpPr>
+        <p:cNvPr id="1" name=""/>
+        <p:cNvGrpSpPr/>
+        <p:nvPr/>
+      </p:nvGrpSpPr>
+      <p:grpSpPr>
+        <a:xfrm>
+          <a:off x="0" y="0"/>
+          <a:ext cx="0" cy="0"/>
+          <a:chOff x="0" y="0"/>
+          <a:chExt cx="0" cy="0"/>
+        </a:xfrm>
+      </p:grpSpPr>
+      <p:sp>
+        <p:nvSpPr>
+          <p:cNvPr id="6" name="Rectangle 5">
+            <a:extLst>
+              <a:ext uri="{FF2B5EF4-FFF2-40B4-BE49-F238E27FC236}">
+                <a16:creationId xmlns:a16="http://schemas.microsoft.com/office/drawing/2014/main" id="{C21924BE-E4A9-4F11-BECA-8C0ADEC187EC}"/>
+              </a:ext>
+            </a:extLst>
+          </p:cNvPr>
+          <p:cNvSpPr/>
+          <p:nvPr/>
+        </p:nvSpPr>
+        <p:spPr>
+          <a:xfrm>
+            <a:off x="0" y="0"/>
+            <a:ext cx="11285316" cy="6858000"/>
+          </a:xfrm>
+          <a:prstGeom prst="rect">
+            <a:avLst/>
+          </a:prstGeom>
+          <a:solidFill>
+            <a:srgbClr val="F5F5F5"/>
+          </a:solidFill>
+          <a:ln>
+            <a:solidFill>
+              <a:srgbClr val="F5F5F5"/>
+            </a:solidFill>
+          </a:ln>
+        </p:spPr>
+        <p:style>
+          <a:lnRef idx="2">
+            <a:schemeClr val="accent1">
+              <a:shade val="50000"/>
+            </a:schemeClr>
+          </a:lnRef>
+          <a:fillRef idx="1">
+            <a:schemeClr val="accent1"/>
+          </a:fillRef>
+          <a:effectRef idx="0">
+            <a:schemeClr val="accent1"/>
+          </a:effectRef>
+          <a:fontRef idx="minor">
+            <a:schemeClr val="lt1"/>
+          </a:fontRef>
+        </p:style>
+        <p:txBody>
+          <a:bodyPr rtlCol="0" anchor="ctr"/>
+          <a:lstStyle/>
+          <a:p>
+            <a:pPr algn="ctr"/>
+            <a:endParaRPr lang="en-AU"/>
+          </a:p>
+        </p:txBody>
+      </p:sp>
+      <p:sp>
+        <p:nvSpPr>
+          <p:cNvPr id="3" name="Content Placeholder 2">
+            <a:extLst>
+              <a:ext uri="{FF2B5EF4-FFF2-40B4-BE49-F238E27FC236}">
+                <a16:creationId xmlns:a16="http://schemas.microsoft.com/office/drawing/2014/main" id="{D683652B-F0FB-48E8-8E47-17433395508A}"/>
+              </a:ext>
+            </a:extLst>
+          </p:cNvPr>
+          <p:cNvSpPr>
+            <a:spLocks noGrp="1"/>
+          </p:cNvSpPr>
+          <p:nvPr>
+            <p:ph idx="1"/>
+          </p:nvPr>
+        </p:nvSpPr>
+        <p:spPr/>
+        <p:txBody>
+          <a:bodyPr/>
+          <a:lstStyle/>
+          <a:p>
+            <a:endParaRPr lang="en-AU"/>
+          </a:p>
+        </p:txBody>
+      </p:sp>
+      <p:pic>
+        <p:nvPicPr>
+          <p:cNvPr id="4" name="Picture 3">
+            <a:extLst>
+              <a:ext uri="{FF2B5EF4-FFF2-40B4-BE49-F238E27FC236}">
+                <a16:creationId xmlns:a16="http://schemas.microsoft.com/office/drawing/2014/main" id="{75F32C35-B102-4D0D-8674-D2B5628BF503}"/>
+              </a:ext>
+            </a:extLst>
+          </p:cNvPr>
+          <p:cNvPicPr>
+            <a:picLocks noChangeAspect="1"/>
+          </p:cNvPicPr>
+          <p:nvPr/>
+        </p:nvPicPr>
+        <p:blipFill rotWithShape="1">
+          <a:blip r:embed="rId2"/>
+          <a:srcRect t="1" b="522"/>
+          <a:stretch/>
+        </p:blipFill>
+        <p:spPr>
+          <a:xfrm>
+            <a:off x="64010" y="459419"/>
+            <a:ext cx="11157296" cy="5939161"/>
+          </a:xfrm>
+          <a:prstGeom prst="rect">
+            <a:avLst/>
+          </a:prstGeom>
+        </p:spPr>
+      </p:pic>
+      <p:sp>
+        <p:nvSpPr>
           <p:cNvPr id="11" name="TextBox 10">
             <a:extLst>
               <a:ext uri="{FF2B5EF4-FFF2-40B4-BE49-F238E27FC236}">
@@ -4435,7 +4526,7 @@
 </p:sld>
 </file>
 
-<file path=ppt/slides/slide12.xml><?xml version="1.0" encoding="utf-8"?>
+<file path=ppt/slides/slide13.xml><?xml version="1.0" encoding="utf-8"?>
 <p:sld xmlns:a="http://schemas.openxmlformats.org/drawingml/2006/main" xmlns:r="http://schemas.openxmlformats.org/officeDocument/2006/relationships" xmlns:p="http://schemas.openxmlformats.org/presentationml/2006/main">
   <p:cSld>
     <p:spTree>
@@ -5657,90 +5748,6 @@
     <p:extLst>
       <p:ext uri="{BB962C8B-B14F-4D97-AF65-F5344CB8AC3E}">
         <p14:creationId xmlns:p14="http://schemas.microsoft.com/office/powerpoint/2010/main" val="3569894587"/>
-      </p:ext>
-    </p:extLst>
-  </p:cSld>
-  <p:clrMapOvr>
-    <a:masterClrMapping/>
-  </p:clrMapOvr>
-</p:sld>
-</file>
-
-<file path=ppt/slides/slide13.xml><?xml version="1.0" encoding="utf-8"?>
-<p:sld xmlns:a="http://schemas.openxmlformats.org/drawingml/2006/main" xmlns:r="http://schemas.openxmlformats.org/officeDocument/2006/relationships" xmlns:p="http://schemas.openxmlformats.org/presentationml/2006/main">
-  <p:cSld>
-    <p:spTree>
-      <p:nvGrpSpPr>
-        <p:cNvPr id="1" name=""/>
-        <p:cNvGrpSpPr/>
-        <p:nvPr/>
-      </p:nvGrpSpPr>
-      <p:grpSpPr>
-        <a:xfrm>
-          <a:off x="0" y="0"/>
-          <a:ext cx="0" cy="0"/>
-          <a:chOff x="0" y="0"/>
-          <a:chExt cx="0" cy="0"/>
-        </a:xfrm>
-      </p:grpSpPr>
-      <p:sp>
-        <p:nvSpPr>
-          <p:cNvPr id="2" name="Title 1">
-            <a:extLst>
-              <a:ext uri="{FF2B5EF4-FFF2-40B4-BE49-F238E27FC236}">
-                <a16:creationId xmlns:a16="http://schemas.microsoft.com/office/drawing/2014/main" id="{C711E6D6-E67B-4C74-A2F0-B8B7F9E5EF88}"/>
-              </a:ext>
-            </a:extLst>
-          </p:cNvPr>
-          <p:cNvSpPr>
-            <a:spLocks noGrp="1"/>
-          </p:cNvSpPr>
-          <p:nvPr>
-            <p:ph type="ctrTitle"/>
-          </p:nvPr>
-        </p:nvSpPr>
-        <p:spPr/>
-        <p:txBody>
-          <a:bodyPr/>
-          <a:lstStyle/>
-          <a:p>
-            <a:r>
-              <a:rPr lang="en-US" dirty="0"/>
-              <a:t>Block Subsidy Models</a:t>
-            </a:r>
-            <a:endParaRPr lang="en-AU" dirty="0"/>
-          </a:p>
-        </p:txBody>
-      </p:sp>
-      <p:sp>
-        <p:nvSpPr>
-          <p:cNvPr id="3" name="Subtitle 2">
-            <a:extLst>
-              <a:ext uri="{FF2B5EF4-FFF2-40B4-BE49-F238E27FC236}">
-                <a16:creationId xmlns:a16="http://schemas.microsoft.com/office/drawing/2014/main" id="{936F6549-BB15-4380-8980-51AE91A4E982}"/>
-              </a:ext>
-            </a:extLst>
-          </p:cNvPr>
-          <p:cNvSpPr>
-            <a:spLocks noGrp="1"/>
-          </p:cNvSpPr>
-          <p:nvPr>
-            <p:ph type="subTitle" idx="1"/>
-          </p:nvPr>
-        </p:nvSpPr>
-        <p:spPr/>
-        <p:txBody>
-          <a:bodyPr/>
-          <a:lstStyle/>
-          <a:p>
-            <a:endParaRPr lang="en-AU"/>
-          </a:p>
-        </p:txBody>
-      </p:sp>
-    </p:spTree>
-    <p:extLst>
-      <p:ext uri="{BB962C8B-B14F-4D97-AF65-F5344CB8AC3E}">
-        <p14:creationId xmlns:p14="http://schemas.microsoft.com/office/powerpoint/2010/main" val="3790171923"/>
       </p:ext>
     </p:extLst>
   </p:cSld>
@@ -5769,6 +5776,94 @@
       </p:grpSpPr>
       <p:sp>
         <p:nvSpPr>
+          <p:cNvPr id="2" name="Title 1">
+            <a:extLst>
+              <a:ext uri="{FF2B5EF4-FFF2-40B4-BE49-F238E27FC236}">
+                <a16:creationId xmlns:a16="http://schemas.microsoft.com/office/drawing/2014/main" id="{C711E6D6-E67B-4C74-A2F0-B8B7F9E5EF88}"/>
+              </a:ext>
+            </a:extLst>
+          </p:cNvPr>
+          <p:cNvSpPr>
+            <a:spLocks noGrp="1"/>
+          </p:cNvSpPr>
+          <p:nvPr>
+            <p:ph type="ctrTitle"/>
+          </p:nvPr>
+        </p:nvSpPr>
+        <p:spPr/>
+        <p:txBody>
+          <a:bodyPr/>
+          <a:lstStyle/>
+          <a:p>
+            <a:r>
+              <a:rPr lang="en-US" dirty="0"/>
+              <a:t>Block Subsidy Models</a:t>
+            </a:r>
+            <a:endParaRPr lang="en-AU" dirty="0"/>
+          </a:p>
+        </p:txBody>
+      </p:sp>
+      <p:sp>
+        <p:nvSpPr>
+          <p:cNvPr id="3" name="Subtitle 2">
+            <a:extLst>
+              <a:ext uri="{FF2B5EF4-FFF2-40B4-BE49-F238E27FC236}">
+                <a16:creationId xmlns:a16="http://schemas.microsoft.com/office/drawing/2014/main" id="{936F6549-BB15-4380-8980-51AE91A4E982}"/>
+              </a:ext>
+            </a:extLst>
+          </p:cNvPr>
+          <p:cNvSpPr>
+            <a:spLocks noGrp="1"/>
+          </p:cNvSpPr>
+          <p:nvPr>
+            <p:ph type="subTitle" idx="1"/>
+          </p:nvPr>
+        </p:nvSpPr>
+        <p:spPr/>
+        <p:txBody>
+          <a:bodyPr/>
+          <a:lstStyle/>
+          <a:p>
+            <a:r>
+              <a:rPr lang="en-US" dirty="0"/>
+              <a:t>Pricing the Decred block reward on the date of issuance represents the aggregate income basis, or cashflow, for each party of the network.</a:t>
+            </a:r>
+            <a:endParaRPr lang="en-AU" dirty="0"/>
+          </a:p>
+        </p:txBody>
+      </p:sp>
+    </p:spTree>
+    <p:extLst>
+      <p:ext uri="{BB962C8B-B14F-4D97-AF65-F5344CB8AC3E}">
+        <p14:creationId xmlns:p14="http://schemas.microsoft.com/office/powerpoint/2010/main" val="3790171923"/>
+      </p:ext>
+    </p:extLst>
+  </p:cSld>
+  <p:clrMapOvr>
+    <a:masterClrMapping/>
+  </p:clrMapOvr>
+</p:sld>
+</file>
+
+<file path=ppt/slides/slide15.xml><?xml version="1.0" encoding="utf-8"?>
+<p:sld xmlns:a="http://schemas.openxmlformats.org/drawingml/2006/main" xmlns:r="http://schemas.openxmlformats.org/officeDocument/2006/relationships" xmlns:p="http://schemas.openxmlformats.org/presentationml/2006/main">
+  <p:cSld>
+    <p:spTree>
+      <p:nvGrpSpPr>
+        <p:cNvPr id="1" name=""/>
+        <p:cNvGrpSpPr/>
+        <p:nvPr/>
+      </p:nvGrpSpPr>
+      <p:grpSpPr>
+        <a:xfrm>
+          <a:off x="0" y="0"/>
+          <a:ext cx="0" cy="0"/>
+          <a:chOff x="0" y="0"/>
+          <a:chExt cx="0" cy="0"/>
+        </a:xfrm>
+      </p:grpSpPr>
+      <p:sp>
+        <p:nvSpPr>
           <p:cNvPr id="5" name="Rectangle 4">
             <a:extLst>
               <a:ext uri="{FF2B5EF4-FFF2-40B4-BE49-F238E27FC236}">
@@ -5897,7 +5992,7 @@
         </p:nvSpPr>
         <p:spPr>
           <a:xfrm>
-            <a:off x="1413874" y="2131023"/>
+            <a:off x="1422263" y="2240080"/>
             <a:ext cx="2690766" cy="646331"/>
           </a:xfrm>
           <a:prstGeom prst="rect">
@@ -5956,8 +6051,8 @@
         </p:nvCxnSpPr>
         <p:spPr>
           <a:xfrm>
-            <a:off x="4104640" y="2454189"/>
-            <a:ext cx="1237089" cy="776691"/>
+            <a:off x="4113029" y="2563246"/>
+            <a:ext cx="1096534" cy="700071"/>
           </a:xfrm>
           <a:prstGeom prst="straightConnector1">
             <a:avLst/>
@@ -6129,7 +6224,7 @@
 </p:sld>
 </file>
 
-<file path=ppt/slides/slide15.xml><?xml version="1.0" encoding="utf-8"?>
+<file path=ppt/slides/slide16.xml><?xml version="1.0" encoding="utf-8"?>
 <p:sld xmlns:a="http://schemas.openxmlformats.org/drawingml/2006/main" xmlns:r="http://schemas.openxmlformats.org/officeDocument/2006/relationships" xmlns:p="http://schemas.openxmlformats.org/presentationml/2006/main">
   <p:cSld>
     <p:spTree>
@@ -6712,7 +6807,7 @@
 </p:sld>
 </file>
 
-<file path=ppt/slides/slide16.xml><?xml version="1.0" encoding="utf-8"?>
+<file path=ppt/slides/slide17.xml><?xml version="1.0" encoding="utf-8"?>
 <p:sld xmlns:a="http://schemas.openxmlformats.org/drawingml/2006/main" xmlns:r="http://schemas.openxmlformats.org/officeDocument/2006/relationships" xmlns:p="http://schemas.openxmlformats.org/presentationml/2006/main">
   <p:cSld>
     <p:spTree>
@@ -7420,7 +7515,7 @@
 </p:sld>
 </file>
 
-<file path=ppt/slides/slide17.xml><?xml version="1.0" encoding="utf-8"?>
+<file path=ppt/slides/slide18.xml><?xml version="1.0" encoding="utf-8"?>
 <p:sld xmlns:a="http://schemas.openxmlformats.org/drawingml/2006/main" xmlns:r="http://schemas.openxmlformats.org/officeDocument/2006/relationships" xmlns:p="http://schemas.openxmlformats.org/presentationml/2006/main">
   <p:cSld>
     <p:spTree>
@@ -8058,7 +8153,7 @@
 </p:sld>
 </file>
 
-<file path=ppt/slides/slide18.xml><?xml version="1.0" encoding="utf-8"?>
+<file path=ppt/slides/slide19.xml><?xml version="1.0" encoding="utf-8"?>
 <p:sld xmlns:a="http://schemas.openxmlformats.org/drawingml/2006/main" xmlns:r="http://schemas.openxmlformats.org/officeDocument/2006/relationships" xmlns:p="http://schemas.openxmlformats.org/presentationml/2006/main">
   <p:cSld>
     <p:spTree>
@@ -8077,6 +8172,752 @@
       </p:grpSpPr>
       <p:sp>
         <p:nvSpPr>
+          <p:cNvPr id="5" name="Rectangle 4">
+            <a:extLst>
+              <a:ext uri="{FF2B5EF4-FFF2-40B4-BE49-F238E27FC236}">
+                <a16:creationId xmlns:a16="http://schemas.microsoft.com/office/drawing/2014/main" id="{65BC7828-B07E-4FA9-A18C-037E14FE6404}"/>
+              </a:ext>
+            </a:extLst>
+          </p:cNvPr>
+          <p:cNvSpPr/>
+          <p:nvPr/>
+        </p:nvSpPr>
+        <p:spPr>
+          <a:xfrm>
+            <a:off x="0" y="0"/>
+            <a:ext cx="11285316" cy="6858000"/>
+          </a:xfrm>
+          <a:prstGeom prst="rect">
+            <a:avLst/>
+          </a:prstGeom>
+          <a:solidFill>
+            <a:srgbClr val="F5F5F5"/>
+          </a:solidFill>
+          <a:ln>
+            <a:solidFill>
+              <a:srgbClr val="F5F5F5"/>
+            </a:solidFill>
+          </a:ln>
+        </p:spPr>
+        <p:style>
+          <a:lnRef idx="2">
+            <a:schemeClr val="accent1">
+              <a:shade val="50000"/>
+            </a:schemeClr>
+          </a:lnRef>
+          <a:fillRef idx="1">
+            <a:schemeClr val="accent1"/>
+          </a:fillRef>
+          <a:effectRef idx="0">
+            <a:schemeClr val="accent1"/>
+          </a:effectRef>
+          <a:fontRef idx="minor">
+            <a:schemeClr val="lt1"/>
+          </a:fontRef>
+        </p:style>
+        <p:txBody>
+          <a:bodyPr rtlCol="0" anchor="ctr"/>
+          <a:lstStyle/>
+          <a:p>
+            <a:pPr algn="ctr"/>
+            <a:endParaRPr lang="en-AU"/>
+          </a:p>
+        </p:txBody>
+      </p:sp>
+      <p:pic>
+        <p:nvPicPr>
+          <p:cNvPr id="13" name="Picture 12">
+            <a:extLst>
+              <a:ext uri="{FF2B5EF4-FFF2-40B4-BE49-F238E27FC236}">
+                <a16:creationId xmlns:a16="http://schemas.microsoft.com/office/drawing/2014/main" id="{DC8EEEC9-5E21-4C41-AA7F-59AAEA610215}"/>
+              </a:ext>
+            </a:extLst>
+          </p:cNvPr>
+          <p:cNvPicPr>
+            <a:picLocks noChangeAspect="1"/>
+          </p:cNvPicPr>
+          <p:nvPr/>
+        </p:nvPicPr>
+        <p:blipFill>
+          <a:blip r:embed="rId2"/>
+          <a:stretch>
+            <a:fillRect/>
+          </a:stretch>
+        </p:blipFill>
+        <p:spPr>
+          <a:xfrm>
+            <a:off x="176785" y="1300480"/>
+            <a:ext cx="11066321" cy="4893756"/>
+          </a:xfrm>
+          <a:prstGeom prst="rect">
+            <a:avLst/>
+          </a:prstGeom>
+        </p:spPr>
+      </p:pic>
+      <p:pic>
+        <p:nvPicPr>
+          <p:cNvPr id="9" name="Picture 8">
+            <a:extLst>
+              <a:ext uri="{FF2B5EF4-FFF2-40B4-BE49-F238E27FC236}">
+                <a16:creationId xmlns:a16="http://schemas.microsoft.com/office/drawing/2014/main" id="{F40772D4-A601-40BF-88C5-55BF1C0FFBD5}"/>
+              </a:ext>
+            </a:extLst>
+          </p:cNvPr>
+          <p:cNvPicPr>
+            <a:picLocks noChangeAspect="1"/>
+          </p:cNvPicPr>
+          <p:nvPr/>
+        </p:nvPicPr>
+        <p:blipFill>
+          <a:blip r:embed="rId3"/>
+          <a:stretch>
+            <a:fillRect/>
+          </a:stretch>
+        </p:blipFill>
+        <p:spPr>
+          <a:xfrm>
+            <a:off x="792480" y="1369737"/>
+            <a:ext cx="9804399" cy="4573863"/>
+          </a:xfrm>
+          <a:prstGeom prst="rect">
+            <a:avLst/>
+          </a:prstGeom>
+        </p:spPr>
+      </p:pic>
+      <p:grpSp>
+        <p:nvGrpSpPr>
+          <p:cNvPr id="14" name="Group 13">
+            <a:extLst>
+              <a:ext uri="{FF2B5EF4-FFF2-40B4-BE49-F238E27FC236}">
+                <a16:creationId xmlns:a16="http://schemas.microsoft.com/office/drawing/2014/main" id="{080CABBC-817A-4774-859D-FE4087DCC06B}"/>
+              </a:ext>
+            </a:extLst>
+          </p:cNvPr>
+          <p:cNvGrpSpPr/>
+          <p:nvPr/>
+        </p:nvGrpSpPr>
+        <p:grpSpPr>
+          <a:xfrm>
+            <a:off x="8656955" y="4213588"/>
+            <a:ext cx="1847850" cy="1626824"/>
+            <a:chOff x="5172075" y="2740388"/>
+            <a:chExt cx="1847850" cy="1626824"/>
+          </a:xfrm>
+        </p:grpSpPr>
+        <p:pic>
+          <p:nvPicPr>
+            <p:cNvPr id="15" name="Picture 14">
+              <a:extLst>
+                <a:ext uri="{FF2B5EF4-FFF2-40B4-BE49-F238E27FC236}">
+                  <a16:creationId xmlns:a16="http://schemas.microsoft.com/office/drawing/2014/main" id="{2B79B23B-E847-464A-B9D0-59177D99E6E5}"/>
+                </a:ext>
+              </a:extLst>
+            </p:cNvPr>
+            <p:cNvPicPr>
+              <a:picLocks noChangeAspect="1"/>
+            </p:cNvPicPr>
+            <p:nvPr/>
+          </p:nvPicPr>
+          <p:blipFill rotWithShape="1">
+            <a:blip r:embed="rId4"/>
+            <a:srcRect t="31627"/>
+            <a:stretch/>
+          </p:blipFill>
+          <p:spPr>
+            <a:xfrm>
+              <a:off x="5172075" y="3084241"/>
+              <a:ext cx="1847850" cy="1282971"/>
+            </a:xfrm>
+            <a:prstGeom prst="rect">
+              <a:avLst/>
+            </a:prstGeom>
+          </p:spPr>
+        </p:pic>
+        <p:pic>
+          <p:nvPicPr>
+            <p:cNvPr id="16" name="Picture 15">
+              <a:extLst>
+                <a:ext uri="{FF2B5EF4-FFF2-40B4-BE49-F238E27FC236}">
+                  <a16:creationId xmlns:a16="http://schemas.microsoft.com/office/drawing/2014/main" id="{34C2B195-E3E1-46C5-8EA5-01ED7EF02BC7}"/>
+                </a:ext>
+              </a:extLst>
+            </p:cNvPr>
+            <p:cNvPicPr>
+              <a:picLocks noChangeAspect="1"/>
+            </p:cNvPicPr>
+            <p:nvPr/>
+          </p:nvPicPr>
+          <p:blipFill rotWithShape="1">
+            <a:blip r:embed="rId4"/>
+            <a:srcRect b="81675"/>
+            <a:stretch/>
+          </p:blipFill>
+          <p:spPr>
+            <a:xfrm>
+              <a:off x="5172075" y="2740388"/>
+              <a:ext cx="1847850" cy="343853"/>
+            </a:xfrm>
+            <a:prstGeom prst="rect">
+              <a:avLst/>
+            </a:prstGeom>
+          </p:spPr>
+        </p:pic>
+      </p:grpSp>
+      <p:pic>
+        <p:nvPicPr>
+          <p:cNvPr id="6" name="Picture 5">
+            <a:extLst>
+              <a:ext uri="{FF2B5EF4-FFF2-40B4-BE49-F238E27FC236}">
+                <a16:creationId xmlns:a16="http://schemas.microsoft.com/office/drawing/2014/main" id="{19A984C9-00F2-40F5-9525-110F59472028}"/>
+              </a:ext>
+            </a:extLst>
+          </p:cNvPr>
+          <p:cNvPicPr>
+            <a:picLocks noChangeAspect="1"/>
+          </p:cNvPicPr>
+          <p:nvPr/>
+        </p:nvPicPr>
+        <p:blipFill rotWithShape="1">
+          <a:blip r:embed="rId5"/>
+          <a:srcRect l="24963" r="21596" b="91065"/>
+          <a:stretch/>
+        </p:blipFill>
+        <p:spPr>
+          <a:xfrm>
+            <a:off x="1747520" y="447223"/>
+            <a:ext cx="8466290" cy="706486"/>
+          </a:xfrm>
+          <a:prstGeom prst="rect">
+            <a:avLst/>
+          </a:prstGeom>
+          <a:solidFill>
+            <a:srgbClr val="070F30"/>
+          </a:solidFill>
+        </p:spPr>
+      </p:pic>
+      <p:sp>
+        <p:nvSpPr>
+          <p:cNvPr id="17" name="Rectangle 16">
+            <a:extLst>
+              <a:ext uri="{FF2B5EF4-FFF2-40B4-BE49-F238E27FC236}">
+                <a16:creationId xmlns:a16="http://schemas.microsoft.com/office/drawing/2014/main" id="{83DB25FE-5CC0-4B6D-A812-8CF9C9DD8E51}"/>
+              </a:ext>
+            </a:extLst>
+          </p:cNvPr>
+          <p:cNvSpPr/>
+          <p:nvPr/>
+        </p:nvSpPr>
+        <p:spPr>
+          <a:xfrm>
+            <a:off x="2667000" y="4419601"/>
+            <a:ext cx="381000" cy="1137920"/>
+          </a:xfrm>
+          <a:prstGeom prst="rect">
+            <a:avLst/>
+          </a:prstGeom>
+          <a:solidFill>
+            <a:srgbClr val="F91727">
+              <a:alpha val="15000"/>
+            </a:srgbClr>
+          </a:solidFill>
+          <a:ln w="22225">
+            <a:solidFill>
+              <a:srgbClr val="F91727"/>
+            </a:solidFill>
+            <a:prstDash val="dash"/>
+          </a:ln>
+        </p:spPr>
+        <p:style>
+          <a:lnRef idx="2">
+            <a:schemeClr val="accent1">
+              <a:shade val="50000"/>
+            </a:schemeClr>
+          </a:lnRef>
+          <a:fillRef idx="1">
+            <a:schemeClr val="accent1"/>
+          </a:fillRef>
+          <a:effectRef idx="0">
+            <a:schemeClr val="accent1"/>
+          </a:effectRef>
+          <a:fontRef idx="minor">
+            <a:schemeClr val="lt1"/>
+          </a:fontRef>
+        </p:style>
+        <p:txBody>
+          <a:bodyPr rtlCol="0" anchor="ctr"/>
+          <a:lstStyle/>
+          <a:p>
+            <a:pPr algn="ctr"/>
+            <a:endParaRPr lang="en-AU"/>
+          </a:p>
+        </p:txBody>
+      </p:sp>
+      <p:sp>
+        <p:nvSpPr>
+          <p:cNvPr id="18" name="Rectangle 17">
+            <a:extLst>
+              <a:ext uri="{FF2B5EF4-FFF2-40B4-BE49-F238E27FC236}">
+                <a16:creationId xmlns:a16="http://schemas.microsoft.com/office/drawing/2014/main" id="{AE3AD8F5-A9E9-48AD-934A-3CE8DA6B807B}"/>
+              </a:ext>
+            </a:extLst>
+          </p:cNvPr>
+          <p:cNvSpPr/>
+          <p:nvPr/>
+        </p:nvSpPr>
+        <p:spPr>
+          <a:xfrm>
+            <a:off x="9741869" y="1676900"/>
+            <a:ext cx="308909" cy="1608762"/>
+          </a:xfrm>
+          <a:prstGeom prst="rect">
+            <a:avLst/>
+          </a:prstGeom>
+          <a:solidFill>
+            <a:srgbClr val="F91727">
+              <a:alpha val="15000"/>
+            </a:srgbClr>
+          </a:solidFill>
+          <a:ln w="22225">
+            <a:solidFill>
+              <a:srgbClr val="F91727"/>
+            </a:solidFill>
+            <a:prstDash val="dash"/>
+          </a:ln>
+        </p:spPr>
+        <p:style>
+          <a:lnRef idx="2">
+            <a:schemeClr val="accent1">
+              <a:shade val="50000"/>
+            </a:schemeClr>
+          </a:lnRef>
+          <a:fillRef idx="1">
+            <a:schemeClr val="accent1"/>
+          </a:fillRef>
+          <a:effectRef idx="0">
+            <a:schemeClr val="accent1"/>
+          </a:effectRef>
+          <a:fontRef idx="minor">
+            <a:schemeClr val="lt1"/>
+          </a:fontRef>
+        </p:style>
+        <p:txBody>
+          <a:bodyPr rtlCol="0" anchor="ctr"/>
+          <a:lstStyle/>
+          <a:p>
+            <a:pPr algn="ctr"/>
+            <a:endParaRPr lang="en-AU"/>
+          </a:p>
+        </p:txBody>
+      </p:sp>
+      <p:sp>
+        <p:nvSpPr>
+          <p:cNvPr id="20" name="TextBox 19">
+            <a:extLst>
+              <a:ext uri="{FF2B5EF4-FFF2-40B4-BE49-F238E27FC236}">
+                <a16:creationId xmlns:a16="http://schemas.microsoft.com/office/drawing/2014/main" id="{5FD568BF-395E-4A69-8D4E-12AD7AEB5CC6}"/>
+              </a:ext>
+            </a:extLst>
+          </p:cNvPr>
+          <p:cNvSpPr txBox="1"/>
+          <p:nvPr/>
+        </p:nvSpPr>
+        <p:spPr>
+          <a:xfrm>
+            <a:off x="5079161" y="4665395"/>
+            <a:ext cx="3177667" cy="646331"/>
+          </a:xfrm>
+          <a:prstGeom prst="rect">
+            <a:avLst/>
+          </a:prstGeom>
+          <a:noFill/>
+        </p:spPr>
+        <p:txBody>
+          <a:bodyPr wrap="square" rtlCol="0">
+            <a:spAutoFit/>
+          </a:bodyPr>
+          <a:lstStyle/>
+          <a:p>
+            <a:pPr algn="ctr"/>
+            <a:r>
+              <a:rPr lang="en-US" b="1" dirty="0">
+                <a:solidFill>
+                  <a:srgbClr val="D1275D"/>
+                </a:solidFill>
+              </a:rPr>
+              <a:t>Difficulty Ribbon Confirms Miner Squeeze</a:t>
+            </a:r>
+            <a:endParaRPr lang="en-AU" b="1" dirty="0">
+              <a:solidFill>
+                <a:srgbClr val="D1275D"/>
+              </a:solidFill>
+            </a:endParaRPr>
+          </a:p>
+        </p:txBody>
+      </p:sp>
+      <p:sp>
+        <p:nvSpPr>
+          <p:cNvPr id="24" name="TextBox 23">
+            <a:extLst>
+              <a:ext uri="{FF2B5EF4-FFF2-40B4-BE49-F238E27FC236}">
+                <a16:creationId xmlns:a16="http://schemas.microsoft.com/office/drawing/2014/main" id="{690A071F-0D19-4C5E-B31E-AED9E756060E}"/>
+              </a:ext>
+            </a:extLst>
+          </p:cNvPr>
+          <p:cNvSpPr txBox="1"/>
+          <p:nvPr/>
+        </p:nvSpPr>
+        <p:spPr>
+          <a:xfrm>
+            <a:off x="590914" y="6353423"/>
+            <a:ext cx="10103487" cy="369332"/>
+          </a:xfrm>
+          <a:prstGeom prst="rect">
+            <a:avLst/>
+          </a:prstGeom>
+          <a:noFill/>
+        </p:spPr>
+        <p:txBody>
+          <a:bodyPr wrap="square" rtlCol="0">
+            <a:spAutoFit/>
+          </a:bodyPr>
+          <a:lstStyle/>
+          <a:p>
+            <a:pPr algn="ctr"/>
+            <a:r>
+              <a:rPr lang="en-US" b="1" dirty="0">
+                <a:solidFill>
+                  <a:srgbClr val="002060"/>
+                </a:solidFill>
+              </a:rPr>
+              <a:t>Psychology: </a:t>
+            </a:r>
+            <a:r>
+              <a:rPr lang="en-US" dirty="0">
+                <a:solidFill>
+                  <a:srgbClr val="002060"/>
+                </a:solidFill>
+              </a:rPr>
+              <a:t>Aggregate network ‘cash-flow’ represents an incentive cost-basis for each party</a:t>
+            </a:r>
+            <a:endParaRPr lang="en-AU" dirty="0">
+              <a:solidFill>
+                <a:srgbClr val="002060"/>
+              </a:solidFill>
+            </a:endParaRPr>
+          </a:p>
+        </p:txBody>
+      </p:sp>
+      <p:sp>
+        <p:nvSpPr>
+          <p:cNvPr id="19" name="TextBox 18">
+            <a:extLst>
+              <a:ext uri="{FF2B5EF4-FFF2-40B4-BE49-F238E27FC236}">
+                <a16:creationId xmlns:a16="http://schemas.microsoft.com/office/drawing/2014/main" id="{B93D5EC7-8BE0-4367-98E6-776A2FF16DB7}"/>
+              </a:ext>
+            </a:extLst>
+          </p:cNvPr>
+          <p:cNvSpPr txBox="1"/>
+          <p:nvPr/>
+        </p:nvSpPr>
+        <p:spPr>
+          <a:xfrm>
+            <a:off x="1422263" y="2240080"/>
+            <a:ext cx="2690766" cy="646331"/>
+          </a:xfrm>
+          <a:prstGeom prst="rect">
+            <a:avLst/>
+          </a:prstGeom>
+          <a:noFill/>
+        </p:spPr>
+        <p:txBody>
+          <a:bodyPr wrap="square" rtlCol="0">
+            <a:spAutoFit/>
+          </a:bodyPr>
+          <a:lstStyle/>
+          <a:p>
+            <a:pPr algn="ctr"/>
+            <a:r>
+              <a:rPr lang="en-US" b="1" dirty="0">
+                <a:solidFill>
+                  <a:srgbClr val="002060"/>
+                </a:solidFill>
+              </a:rPr>
+              <a:t>Decred Network </a:t>
+            </a:r>
+          </a:p>
+          <a:p>
+            <a:pPr algn="ctr"/>
+            <a:r>
+              <a:rPr lang="en-US" b="1" dirty="0">
+                <a:solidFill>
+                  <a:srgbClr val="002060"/>
+                </a:solidFill>
+              </a:rPr>
+              <a:t>Cumulative Income</a:t>
+            </a:r>
+            <a:endParaRPr lang="en-AU" b="1" dirty="0">
+              <a:solidFill>
+                <a:srgbClr val="002060"/>
+              </a:solidFill>
+            </a:endParaRPr>
+          </a:p>
+        </p:txBody>
+      </p:sp>
+      <p:cxnSp>
+        <p:nvCxnSpPr>
+          <p:cNvPr id="21" name="Straight Arrow Connector 20">
+            <a:extLst>
+              <a:ext uri="{FF2B5EF4-FFF2-40B4-BE49-F238E27FC236}">
+                <a16:creationId xmlns:a16="http://schemas.microsoft.com/office/drawing/2014/main" id="{CE37BC91-29EA-44F8-BDD8-7E0A363A907D}"/>
+              </a:ext>
+            </a:extLst>
+          </p:cNvPr>
+          <p:cNvCxnSpPr>
+            <a:cxnSpLocks/>
+            <a:stCxn id="19" idx="3"/>
+          </p:cNvCxnSpPr>
+          <p:nvPr/>
+        </p:nvCxnSpPr>
+        <p:spPr>
+          <a:xfrm>
+            <a:off x="4113029" y="2563246"/>
+            <a:ext cx="1096534" cy="700071"/>
+          </a:xfrm>
+          <a:prstGeom prst="straightConnector1">
+            <a:avLst/>
+          </a:prstGeom>
+          <a:ln>
+            <a:solidFill>
+              <a:srgbClr val="091440"/>
+            </a:solidFill>
+            <a:tailEnd type="triangle"/>
+          </a:ln>
+        </p:spPr>
+        <p:style>
+          <a:lnRef idx="1">
+            <a:schemeClr val="accent1"/>
+          </a:lnRef>
+          <a:fillRef idx="0">
+            <a:schemeClr val="accent1"/>
+          </a:fillRef>
+          <a:effectRef idx="0">
+            <a:schemeClr val="accent1"/>
+          </a:effectRef>
+          <a:fontRef idx="minor">
+            <a:schemeClr val="tx1"/>
+          </a:fontRef>
+        </p:style>
+      </p:cxnSp>
+    </p:spTree>
+    <p:extLst>
+      <p:ext uri="{BB962C8B-B14F-4D97-AF65-F5344CB8AC3E}">
+        <p14:creationId xmlns:p14="http://schemas.microsoft.com/office/powerpoint/2010/main" val="2831854317"/>
+      </p:ext>
+    </p:extLst>
+  </p:cSld>
+  <p:clrMapOvr>
+    <a:masterClrMapping/>
+  </p:clrMapOvr>
+</p:sld>
+</file>
+
+<file path=ppt/slides/slide2.xml><?xml version="1.0" encoding="utf-8"?>
+<p:sld xmlns:a="http://schemas.openxmlformats.org/drawingml/2006/main" xmlns:r="http://schemas.openxmlformats.org/officeDocument/2006/relationships" xmlns:p="http://schemas.openxmlformats.org/presentationml/2006/main">
+  <p:cSld>
+    <p:spTree>
+      <p:nvGrpSpPr>
+        <p:cNvPr id="1" name=""/>
+        <p:cNvGrpSpPr/>
+        <p:nvPr/>
+      </p:nvGrpSpPr>
+      <p:grpSpPr>
+        <a:xfrm>
+          <a:off x="0" y="0"/>
+          <a:ext cx="0" cy="0"/>
+          <a:chOff x="0" y="0"/>
+          <a:chExt cx="0" cy="0"/>
+        </a:xfrm>
+      </p:grpSpPr>
+      <p:sp>
+        <p:nvSpPr>
+          <p:cNvPr id="5" name="Rectangle 4">
+            <a:extLst>
+              <a:ext uri="{FF2B5EF4-FFF2-40B4-BE49-F238E27FC236}">
+                <a16:creationId xmlns:a16="http://schemas.microsoft.com/office/drawing/2014/main" id="{2B23BDE7-682E-4354-ABA9-9C7FEA05B1AA}"/>
+              </a:ext>
+            </a:extLst>
+          </p:cNvPr>
+          <p:cNvSpPr/>
+          <p:nvPr/>
+        </p:nvSpPr>
+        <p:spPr>
+          <a:xfrm>
+            <a:off x="0" y="0"/>
+            <a:ext cx="11285316" cy="6858000"/>
+          </a:xfrm>
+          <a:prstGeom prst="rect">
+            <a:avLst/>
+          </a:prstGeom>
+          <a:solidFill>
+            <a:srgbClr val="F5F5F5"/>
+          </a:solidFill>
+          <a:ln>
+            <a:solidFill>
+              <a:srgbClr val="F5F5F5"/>
+            </a:solidFill>
+          </a:ln>
+        </p:spPr>
+        <p:style>
+          <a:lnRef idx="2">
+            <a:schemeClr val="accent1">
+              <a:shade val="50000"/>
+            </a:schemeClr>
+          </a:lnRef>
+          <a:fillRef idx="1">
+            <a:schemeClr val="accent1"/>
+          </a:fillRef>
+          <a:effectRef idx="0">
+            <a:schemeClr val="accent1"/>
+          </a:effectRef>
+          <a:fontRef idx="minor">
+            <a:schemeClr val="lt1"/>
+          </a:fontRef>
+        </p:style>
+        <p:txBody>
+          <a:bodyPr rtlCol="0" anchor="ctr"/>
+          <a:lstStyle/>
+          <a:p>
+            <a:pPr algn="ctr"/>
+            <a:endParaRPr lang="en-AU"/>
+          </a:p>
+        </p:txBody>
+      </p:sp>
+      <p:sp>
+        <p:nvSpPr>
+          <p:cNvPr id="2" name="Title 1">
+            <a:extLst>
+              <a:ext uri="{FF2B5EF4-FFF2-40B4-BE49-F238E27FC236}">
+                <a16:creationId xmlns:a16="http://schemas.microsoft.com/office/drawing/2014/main" id="{5BF52258-78F6-4A45-A5E7-448B002BD3C8}"/>
+              </a:ext>
+            </a:extLst>
+          </p:cNvPr>
+          <p:cNvSpPr>
+            <a:spLocks noGrp="1"/>
+          </p:cNvSpPr>
+          <p:nvPr>
+            <p:ph type="title"/>
+          </p:nvPr>
+        </p:nvSpPr>
+        <p:spPr/>
+        <p:txBody>
+          <a:bodyPr/>
+          <a:lstStyle/>
+          <a:p>
+            <a:r>
+              <a:rPr lang="en-US" dirty="0"/>
+              <a:t>Decred On-chain</a:t>
+            </a:r>
+            <a:endParaRPr lang="en-AU" dirty="0"/>
+          </a:p>
+        </p:txBody>
+      </p:sp>
+      <p:sp>
+        <p:nvSpPr>
+          <p:cNvPr id="3" name="Content Placeholder 2">
+            <a:extLst>
+              <a:ext uri="{FF2B5EF4-FFF2-40B4-BE49-F238E27FC236}">
+                <a16:creationId xmlns:a16="http://schemas.microsoft.com/office/drawing/2014/main" id="{9CE31CC3-EC65-44FA-AB5B-B03A27759B8A}"/>
+              </a:ext>
+            </a:extLst>
+          </p:cNvPr>
+          <p:cNvSpPr>
+            <a:spLocks noGrp="1"/>
+          </p:cNvSpPr>
+          <p:nvPr>
+            <p:ph idx="1"/>
+          </p:nvPr>
+        </p:nvSpPr>
+        <p:spPr/>
+        <p:txBody>
+          <a:bodyPr>
+            <a:normAutofit/>
+          </a:bodyPr>
+          <a:lstStyle/>
+          <a:p>
+            <a:r>
+              <a:rPr lang="en-US" dirty="0"/>
+              <a:t>The Decred chain has a distinct set of on-chain signatures for network participants to that of Bitcoin.</a:t>
+            </a:r>
+          </a:p>
+          <a:p>
+            <a:endParaRPr lang="en-US" dirty="0"/>
+          </a:p>
+          <a:p>
+            <a:r>
+              <a:rPr lang="en-US" dirty="0"/>
+              <a:t>For Bitcoin, high conviction HODLing shows up as a </a:t>
+            </a:r>
+            <a:r>
+              <a:rPr lang="en-US" b="1" dirty="0"/>
+              <a:t>single withdrawal transaction</a:t>
+            </a:r>
+            <a:r>
+              <a:rPr lang="en-US" dirty="0"/>
+              <a:t> followed a period of dormancy.</a:t>
+            </a:r>
+          </a:p>
+          <a:p>
+            <a:endParaRPr lang="en-US" dirty="0"/>
+          </a:p>
+          <a:p>
+            <a:r>
+              <a:rPr lang="en-US" dirty="0"/>
+              <a:t>For Decred, the hybrid PoW/PoS consensus ticket system mean </a:t>
+            </a:r>
+            <a:r>
+              <a:rPr lang="en-US" b="1" dirty="0"/>
+              <a:t>high conviction HODLing </a:t>
+            </a:r>
+            <a:r>
+              <a:rPr lang="en-US" dirty="0"/>
+              <a:t>has coins moving often.</a:t>
+            </a:r>
+            <a:endParaRPr lang="en-AU" dirty="0"/>
+          </a:p>
+        </p:txBody>
+      </p:sp>
+    </p:spTree>
+    <p:extLst>
+      <p:ext uri="{BB962C8B-B14F-4D97-AF65-F5344CB8AC3E}">
+        <p14:creationId xmlns:p14="http://schemas.microsoft.com/office/powerpoint/2010/main" val="661958319"/>
+      </p:ext>
+    </p:extLst>
+  </p:cSld>
+  <p:clrMapOvr>
+    <a:masterClrMapping/>
+  </p:clrMapOvr>
+</p:sld>
+</file>
+
+<file path=ppt/slides/slide20.xml><?xml version="1.0" encoding="utf-8"?>
+<p:sld xmlns:a="http://schemas.openxmlformats.org/drawingml/2006/main" xmlns:r="http://schemas.openxmlformats.org/officeDocument/2006/relationships" xmlns:p="http://schemas.openxmlformats.org/presentationml/2006/main">
+  <p:cSld>
+    <p:spTree>
+      <p:nvGrpSpPr>
+        <p:cNvPr id="1" name=""/>
+        <p:cNvGrpSpPr/>
+        <p:nvPr/>
+      </p:nvGrpSpPr>
+      <p:grpSpPr>
+        <a:xfrm>
+          <a:off x="0" y="0"/>
+          <a:ext cx="0" cy="0"/>
+          <a:chOff x="0" y="0"/>
+          <a:chExt cx="0" cy="0"/>
+        </a:xfrm>
+      </p:grpSpPr>
+      <p:sp>
+        <p:nvSpPr>
           <p:cNvPr id="2" name="Title 1">
             <a:extLst>
               <a:ext uri="{FF2B5EF4-FFF2-40B4-BE49-F238E27FC236}">
@@ -8125,7 +8966,11 @@
           <a:bodyPr/>
           <a:lstStyle/>
           <a:p>
-            <a:endParaRPr lang="en-AU"/>
+            <a:r>
+              <a:rPr lang="en-US" dirty="0"/>
+              <a:t>Analysing the realised demand and driving mechanisms for Decred transactions and block-space.</a:t>
+            </a:r>
+            <a:endParaRPr lang="en-AU" dirty="0"/>
           </a:p>
         </p:txBody>
       </p:sp>
@@ -8142,7 +8987,7 @@
 </p:sld>
 </file>
 
-<file path=ppt/slides/slide19.xml><?xml version="1.0" encoding="utf-8"?>
+<file path=ppt/slides/slide21.xml><?xml version="1.0" encoding="utf-8"?>
 <p:sld xmlns:a="http://schemas.openxmlformats.org/drawingml/2006/main" xmlns:r="http://schemas.openxmlformats.org/officeDocument/2006/relationships" xmlns:p="http://schemas.openxmlformats.org/presentationml/2006/main">
   <p:cSld>
     <p:spTree>
@@ -8545,185 +9390,7 @@
 </p:sld>
 </file>
 
-<file path=ppt/slides/slide2.xml><?xml version="1.0" encoding="utf-8"?>
-<p:sld xmlns:a="http://schemas.openxmlformats.org/drawingml/2006/main" xmlns:r="http://schemas.openxmlformats.org/officeDocument/2006/relationships" xmlns:p="http://schemas.openxmlformats.org/presentationml/2006/main">
-  <p:cSld>
-    <p:spTree>
-      <p:nvGrpSpPr>
-        <p:cNvPr id="1" name=""/>
-        <p:cNvGrpSpPr/>
-        <p:nvPr/>
-      </p:nvGrpSpPr>
-      <p:grpSpPr>
-        <a:xfrm>
-          <a:off x="0" y="0"/>
-          <a:ext cx="0" cy="0"/>
-          <a:chOff x="0" y="0"/>
-          <a:chExt cx="0" cy="0"/>
-        </a:xfrm>
-      </p:grpSpPr>
-      <p:sp>
-        <p:nvSpPr>
-          <p:cNvPr id="5" name="Rectangle 4">
-            <a:extLst>
-              <a:ext uri="{FF2B5EF4-FFF2-40B4-BE49-F238E27FC236}">
-                <a16:creationId xmlns:a16="http://schemas.microsoft.com/office/drawing/2014/main" id="{2B23BDE7-682E-4354-ABA9-9C7FEA05B1AA}"/>
-              </a:ext>
-            </a:extLst>
-          </p:cNvPr>
-          <p:cNvSpPr/>
-          <p:nvPr/>
-        </p:nvSpPr>
-        <p:spPr>
-          <a:xfrm>
-            <a:off x="0" y="0"/>
-            <a:ext cx="11285316" cy="6858000"/>
-          </a:xfrm>
-          <a:prstGeom prst="rect">
-            <a:avLst/>
-          </a:prstGeom>
-          <a:solidFill>
-            <a:srgbClr val="F5F5F5"/>
-          </a:solidFill>
-          <a:ln>
-            <a:solidFill>
-              <a:srgbClr val="F5F5F5"/>
-            </a:solidFill>
-          </a:ln>
-        </p:spPr>
-        <p:style>
-          <a:lnRef idx="2">
-            <a:schemeClr val="accent1">
-              <a:shade val="50000"/>
-            </a:schemeClr>
-          </a:lnRef>
-          <a:fillRef idx="1">
-            <a:schemeClr val="accent1"/>
-          </a:fillRef>
-          <a:effectRef idx="0">
-            <a:schemeClr val="accent1"/>
-          </a:effectRef>
-          <a:fontRef idx="minor">
-            <a:schemeClr val="lt1"/>
-          </a:fontRef>
-        </p:style>
-        <p:txBody>
-          <a:bodyPr rtlCol="0" anchor="ctr"/>
-          <a:lstStyle/>
-          <a:p>
-            <a:pPr algn="ctr"/>
-            <a:endParaRPr lang="en-AU"/>
-          </a:p>
-        </p:txBody>
-      </p:sp>
-      <p:sp>
-        <p:nvSpPr>
-          <p:cNvPr id="2" name="Title 1">
-            <a:extLst>
-              <a:ext uri="{FF2B5EF4-FFF2-40B4-BE49-F238E27FC236}">
-                <a16:creationId xmlns:a16="http://schemas.microsoft.com/office/drawing/2014/main" id="{5BF52258-78F6-4A45-A5E7-448B002BD3C8}"/>
-              </a:ext>
-            </a:extLst>
-          </p:cNvPr>
-          <p:cNvSpPr>
-            <a:spLocks noGrp="1"/>
-          </p:cNvSpPr>
-          <p:nvPr>
-            <p:ph type="title"/>
-          </p:nvPr>
-        </p:nvSpPr>
-        <p:spPr/>
-        <p:txBody>
-          <a:bodyPr/>
-          <a:lstStyle/>
-          <a:p>
-            <a:r>
-              <a:rPr lang="en-US" dirty="0"/>
-              <a:t>Decred On-chain</a:t>
-            </a:r>
-            <a:endParaRPr lang="en-AU" dirty="0"/>
-          </a:p>
-        </p:txBody>
-      </p:sp>
-      <p:sp>
-        <p:nvSpPr>
-          <p:cNvPr id="3" name="Content Placeholder 2">
-            <a:extLst>
-              <a:ext uri="{FF2B5EF4-FFF2-40B4-BE49-F238E27FC236}">
-                <a16:creationId xmlns:a16="http://schemas.microsoft.com/office/drawing/2014/main" id="{9CE31CC3-EC65-44FA-AB5B-B03A27759B8A}"/>
-              </a:ext>
-            </a:extLst>
-          </p:cNvPr>
-          <p:cNvSpPr>
-            <a:spLocks noGrp="1"/>
-          </p:cNvSpPr>
-          <p:nvPr>
-            <p:ph idx="1"/>
-          </p:nvPr>
-        </p:nvSpPr>
-        <p:spPr/>
-        <p:txBody>
-          <a:bodyPr>
-            <a:normAutofit/>
-          </a:bodyPr>
-          <a:lstStyle/>
-          <a:p>
-            <a:r>
-              <a:rPr lang="en-US" dirty="0"/>
-              <a:t>The Decred chain has a distinct set of on-chain signatures for network participants to that of Bitcoin.</a:t>
-            </a:r>
-          </a:p>
-          <a:p>
-            <a:endParaRPr lang="en-US" dirty="0"/>
-          </a:p>
-          <a:p>
-            <a:r>
-              <a:rPr lang="en-US" dirty="0"/>
-              <a:t>For Bitcoin, high conviction HODLing shows up as a </a:t>
-            </a:r>
-            <a:r>
-              <a:rPr lang="en-US" b="1" dirty="0"/>
-              <a:t>single withdrawal transaction</a:t>
-            </a:r>
-            <a:r>
-              <a:rPr lang="en-US" dirty="0"/>
-              <a:t> followed a period of dormancy.</a:t>
-            </a:r>
-          </a:p>
-          <a:p>
-            <a:endParaRPr lang="en-US" dirty="0"/>
-          </a:p>
-          <a:p>
-            <a:r>
-              <a:rPr lang="en-US" dirty="0"/>
-              <a:t>For Decred, the hybrid PoW/PoS consensus ticket system mean </a:t>
-            </a:r>
-            <a:r>
-              <a:rPr lang="en-US" b="1" dirty="0"/>
-              <a:t>high conviction HODLing </a:t>
-            </a:r>
-            <a:r>
-              <a:rPr lang="en-US" dirty="0"/>
-              <a:t>has coins moving often.</a:t>
-            </a:r>
-            <a:endParaRPr lang="en-AU" dirty="0"/>
-          </a:p>
-        </p:txBody>
-      </p:sp>
-    </p:spTree>
-    <p:extLst>
-      <p:ext uri="{BB962C8B-B14F-4D97-AF65-F5344CB8AC3E}">
-        <p14:creationId xmlns:p14="http://schemas.microsoft.com/office/powerpoint/2010/main" val="661958319"/>
-      </p:ext>
-    </p:extLst>
-  </p:cSld>
-  <p:clrMapOvr>
-    <a:masterClrMapping/>
-  </p:clrMapOvr>
-</p:sld>
-</file>
-
-<file path=ppt/slides/slide20.xml><?xml version="1.0" encoding="utf-8"?>
+<file path=ppt/slides/slide22.xml><?xml version="1.0" encoding="utf-8"?>
 <p:sld xmlns:a="http://schemas.openxmlformats.org/drawingml/2006/main" xmlns:r="http://schemas.openxmlformats.org/officeDocument/2006/relationships" xmlns:p="http://schemas.openxmlformats.org/presentationml/2006/main">
   <p:cSld>
     <p:spTree>
@@ -9138,7 +9805,7 @@
         </p:nvSpPr>
         <p:spPr>
           <a:xfrm>
-            <a:off x="3194901" y="3203988"/>
+            <a:off x="3181988" y="3181973"/>
             <a:ext cx="381000" cy="1666092"/>
           </a:xfrm>
           <a:prstGeom prst="rect">
@@ -9252,8 +9919,122 @@
         </p:nvSpPr>
         <p:spPr>
           <a:xfrm>
-            <a:off x="5490753" y="2271860"/>
-            <a:ext cx="381000" cy="2544339"/>
+            <a:off x="5490265" y="2272683"/>
+            <a:ext cx="381000" cy="2597397"/>
+          </a:xfrm>
+          <a:prstGeom prst="rect">
+            <a:avLst/>
+          </a:prstGeom>
+          <a:solidFill>
+            <a:srgbClr val="F91727">
+              <a:alpha val="15000"/>
+            </a:srgbClr>
+          </a:solidFill>
+          <a:ln w="22225">
+            <a:solidFill>
+              <a:srgbClr val="F91727"/>
+            </a:solidFill>
+            <a:prstDash val="dash"/>
+          </a:ln>
+        </p:spPr>
+        <p:style>
+          <a:lnRef idx="2">
+            <a:schemeClr val="accent1">
+              <a:shade val="50000"/>
+            </a:schemeClr>
+          </a:lnRef>
+          <a:fillRef idx="1">
+            <a:schemeClr val="accent1"/>
+          </a:fillRef>
+          <a:effectRef idx="0">
+            <a:schemeClr val="accent1"/>
+          </a:effectRef>
+          <a:fontRef idx="minor">
+            <a:schemeClr val="lt1"/>
+          </a:fontRef>
+        </p:style>
+        <p:txBody>
+          <a:bodyPr rtlCol="0" anchor="ctr"/>
+          <a:lstStyle/>
+          <a:p>
+            <a:pPr algn="ctr"/>
+            <a:endParaRPr lang="en-AU"/>
+          </a:p>
+        </p:txBody>
+      </p:sp>
+      <p:sp>
+        <p:nvSpPr>
+          <p:cNvPr id="12" name="Rectangle 11">
+            <a:extLst>
+              <a:ext uri="{FF2B5EF4-FFF2-40B4-BE49-F238E27FC236}">
+                <a16:creationId xmlns:a16="http://schemas.microsoft.com/office/drawing/2014/main" id="{FF3FCAA4-51E7-4C4B-888D-7C625D9CAC85}"/>
+              </a:ext>
+            </a:extLst>
+          </p:cNvPr>
+          <p:cNvSpPr/>
+          <p:nvPr/>
+        </p:nvSpPr>
+        <p:spPr>
+          <a:xfrm>
+            <a:off x="7799518" y="2654423"/>
+            <a:ext cx="381000" cy="2193642"/>
+          </a:xfrm>
+          <a:prstGeom prst="rect">
+            <a:avLst/>
+          </a:prstGeom>
+          <a:solidFill>
+            <a:srgbClr val="F91727">
+              <a:alpha val="15000"/>
+            </a:srgbClr>
+          </a:solidFill>
+          <a:ln w="22225">
+            <a:solidFill>
+              <a:srgbClr val="F91727"/>
+            </a:solidFill>
+            <a:prstDash val="dash"/>
+          </a:ln>
+        </p:spPr>
+        <p:style>
+          <a:lnRef idx="2">
+            <a:schemeClr val="accent1">
+              <a:shade val="50000"/>
+            </a:schemeClr>
+          </a:lnRef>
+          <a:fillRef idx="1">
+            <a:schemeClr val="accent1"/>
+          </a:fillRef>
+          <a:effectRef idx="0">
+            <a:schemeClr val="accent1"/>
+          </a:effectRef>
+          <a:fontRef idx="minor">
+            <a:schemeClr val="lt1"/>
+          </a:fontRef>
+        </p:style>
+        <p:txBody>
+          <a:bodyPr rtlCol="0" anchor="ctr"/>
+          <a:lstStyle/>
+          <a:p>
+            <a:pPr algn="ctr"/>
+            <a:endParaRPr lang="en-AU"/>
+          </a:p>
+        </p:txBody>
+      </p:sp>
+      <p:sp>
+        <p:nvSpPr>
+          <p:cNvPr id="13" name="Rectangle 12">
+            <a:extLst>
+              <a:ext uri="{FF2B5EF4-FFF2-40B4-BE49-F238E27FC236}">
+                <a16:creationId xmlns:a16="http://schemas.microsoft.com/office/drawing/2014/main" id="{A62EEC49-5DD2-4013-8E56-18F264B5CAE1}"/>
+              </a:ext>
+            </a:extLst>
+          </p:cNvPr>
+          <p:cNvSpPr/>
+          <p:nvPr/>
+        </p:nvSpPr>
+        <p:spPr>
+          <a:xfrm>
+            <a:off x="8340774" y="2654423"/>
+            <a:ext cx="381000" cy="2193642"/>
           </a:xfrm>
           <a:prstGeom prst="rect">
             <a:avLst/>
@@ -9308,7 +10089,7 @@
 </p:sld>
 </file>
 
-<file path=ppt/slides/slide21.xml><?xml version="1.0" encoding="utf-8"?>
+<file path=ppt/slides/slide23.xml><?xml version="1.0" encoding="utf-8"?>
 <p:sld xmlns:a="http://schemas.openxmlformats.org/drawingml/2006/main" xmlns:r="http://schemas.openxmlformats.org/officeDocument/2006/relationships" xmlns:p="http://schemas.openxmlformats.org/presentationml/2006/main">
   <p:cSld>
     <p:spTree>
@@ -9733,8 +10514,8 @@
         </p:nvSpPr>
         <p:spPr>
           <a:xfrm>
-            <a:off x="6779326" y="2667786"/>
-            <a:ext cx="735581" cy="3204641"/>
+            <a:off x="6779327" y="2667786"/>
+            <a:ext cx="269544" cy="3204641"/>
           </a:xfrm>
           <a:prstGeom prst="rect">
             <a:avLst/>
@@ -9994,6 +10775,63 @@
           </p:sp>
         </mc:Fallback>
       </mc:AlternateContent>
+      <p:sp>
+        <p:nvSpPr>
+          <p:cNvPr id="18" name="Rectangle 17">
+            <a:extLst>
+              <a:ext uri="{FF2B5EF4-FFF2-40B4-BE49-F238E27FC236}">
+                <a16:creationId xmlns:a16="http://schemas.microsoft.com/office/drawing/2014/main" id="{857DFAE0-6E44-402C-AAAF-3871D531100C}"/>
+              </a:ext>
+            </a:extLst>
+          </p:cNvPr>
+          <p:cNvSpPr/>
+          <p:nvPr/>
+        </p:nvSpPr>
+        <p:spPr>
+          <a:xfrm>
+            <a:off x="7209127" y="2674745"/>
+            <a:ext cx="269544" cy="3204641"/>
+          </a:xfrm>
+          <a:prstGeom prst="rect">
+            <a:avLst/>
+          </a:prstGeom>
+          <a:solidFill>
+            <a:srgbClr val="00A84C">
+              <a:alpha val="15000"/>
+            </a:srgbClr>
+          </a:solidFill>
+          <a:ln w="22225">
+            <a:solidFill>
+              <a:srgbClr val="00A84C"/>
+            </a:solidFill>
+            <a:prstDash val="dash"/>
+          </a:ln>
+        </p:spPr>
+        <p:style>
+          <a:lnRef idx="2">
+            <a:schemeClr val="accent1">
+              <a:shade val="50000"/>
+            </a:schemeClr>
+          </a:lnRef>
+          <a:fillRef idx="1">
+            <a:schemeClr val="accent1"/>
+          </a:fillRef>
+          <a:effectRef idx="0">
+            <a:schemeClr val="accent1"/>
+          </a:effectRef>
+          <a:fontRef idx="minor">
+            <a:schemeClr val="lt1"/>
+          </a:fontRef>
+        </p:style>
+        <p:txBody>
+          <a:bodyPr rtlCol="0" anchor="ctr"/>
+          <a:lstStyle/>
+          <a:p>
+            <a:pPr algn="ctr"/>
+            <a:endParaRPr lang="en-AU"/>
+          </a:p>
+        </p:txBody>
+      </p:sp>
     </p:spTree>
     <p:extLst>
       <p:ext uri="{BB962C8B-B14F-4D97-AF65-F5344CB8AC3E}">
@@ -10007,7 +10845,7 @@
 </p:sld>
 </file>
 
-<file path=ppt/slides/slide22.xml><?xml version="1.0" encoding="utf-8"?>
+<file path=ppt/slides/slide24.xml><?xml version="1.0" encoding="utf-8"?>
 <p:sld xmlns:a="http://schemas.openxmlformats.org/drawingml/2006/main" xmlns:r="http://schemas.openxmlformats.org/officeDocument/2006/relationships" xmlns:p="http://schemas.openxmlformats.org/presentationml/2006/main">
   <p:cSld>
     <p:spTree>
@@ -10377,63 +11215,6 @@
           <a:xfrm>
             <a:off x="3590113" y="2734861"/>
             <a:ext cx="611273" cy="3137567"/>
-          </a:xfrm>
-          <a:prstGeom prst="rect">
-            <a:avLst/>
-          </a:prstGeom>
-          <a:solidFill>
-            <a:srgbClr val="00A84C">
-              <a:alpha val="15000"/>
-            </a:srgbClr>
-          </a:solidFill>
-          <a:ln w="22225">
-            <a:solidFill>
-              <a:srgbClr val="00A84C"/>
-            </a:solidFill>
-            <a:prstDash val="dash"/>
-          </a:ln>
-        </p:spPr>
-        <p:style>
-          <a:lnRef idx="2">
-            <a:schemeClr val="accent1">
-              <a:shade val="50000"/>
-            </a:schemeClr>
-          </a:lnRef>
-          <a:fillRef idx="1">
-            <a:schemeClr val="accent1"/>
-          </a:fillRef>
-          <a:effectRef idx="0">
-            <a:schemeClr val="accent1"/>
-          </a:effectRef>
-          <a:fontRef idx="minor">
-            <a:schemeClr val="lt1"/>
-          </a:fontRef>
-        </p:style>
-        <p:txBody>
-          <a:bodyPr rtlCol="0" anchor="ctr"/>
-          <a:lstStyle/>
-          <a:p>
-            <a:pPr algn="ctr"/>
-            <a:endParaRPr lang="en-AU"/>
-          </a:p>
-        </p:txBody>
-      </p:sp>
-      <p:sp>
-        <p:nvSpPr>
-          <p:cNvPr id="16" name="Rectangle 15">
-            <a:extLst>
-              <a:ext uri="{FF2B5EF4-FFF2-40B4-BE49-F238E27FC236}">
-                <a16:creationId xmlns:a16="http://schemas.microsoft.com/office/drawing/2014/main" id="{05440102-9CF4-468B-BB82-316BCDD15D47}"/>
-              </a:ext>
-            </a:extLst>
-          </p:cNvPr>
-          <p:cNvSpPr/>
-          <p:nvPr/>
-        </p:nvSpPr>
-        <p:spPr>
-          <a:xfrm>
-            <a:off x="6779326" y="2667786"/>
-            <a:ext cx="735581" cy="3204641"/>
           </a:xfrm>
           <a:prstGeom prst="rect">
             <a:avLst/>
@@ -10785,42 +11566,12 @@
           </a:p>
         </p:txBody>
       </p:sp>
-    </p:spTree>
-    <p:extLst>
-      <p:ext uri="{BB962C8B-B14F-4D97-AF65-F5344CB8AC3E}">
-        <p14:creationId xmlns:p14="http://schemas.microsoft.com/office/powerpoint/2010/main" val="1109760807"/>
-      </p:ext>
-    </p:extLst>
-  </p:cSld>
-  <p:clrMapOvr>
-    <a:masterClrMapping/>
-  </p:clrMapOvr>
-</p:sld>
-</file>
-
-<file path=ppt/slides/slide23.xml><?xml version="1.0" encoding="utf-8"?>
-<p:sld xmlns:a="http://schemas.openxmlformats.org/drawingml/2006/main" xmlns:r="http://schemas.openxmlformats.org/officeDocument/2006/relationships" xmlns:p="http://schemas.openxmlformats.org/presentationml/2006/main">
-  <p:cSld>
-    <p:spTree>
-      <p:nvGrpSpPr>
-        <p:cNvPr id="1" name=""/>
-        <p:cNvGrpSpPr/>
-        <p:nvPr/>
-      </p:nvGrpSpPr>
-      <p:grpSpPr>
-        <a:xfrm>
-          <a:off x="0" y="0"/>
-          <a:ext cx="0" cy="0"/>
-          <a:chOff x="0" y="0"/>
-          <a:chExt cx="0" cy="0"/>
-        </a:xfrm>
-      </p:grpSpPr>
-      <p:sp>
-        <p:nvSpPr>
-          <p:cNvPr id="5" name="Rectangle 4">
-            <a:extLst>
-              <a:ext uri="{FF2B5EF4-FFF2-40B4-BE49-F238E27FC236}">
-                <a16:creationId xmlns:a16="http://schemas.microsoft.com/office/drawing/2014/main" id="{6563922A-6CBD-465E-8926-269E1F89E76D}"/>
+      <p:sp>
+        <p:nvSpPr>
+          <p:cNvPr id="19" name="Rectangle 18">
+            <a:extLst>
+              <a:ext uri="{FF2B5EF4-FFF2-40B4-BE49-F238E27FC236}">
+                <a16:creationId xmlns:a16="http://schemas.microsoft.com/office/drawing/2014/main" id="{3ECCD76C-4F60-4BCD-BAE0-0FC2AD2B8EE0}"/>
               </a:ext>
             </a:extLst>
           </p:cNvPr>
@@ -10829,19 +11580,22 @@
         </p:nvSpPr>
         <p:spPr>
           <a:xfrm>
-            <a:off x="0" y="0"/>
-            <a:ext cx="11285316" cy="6858000"/>
+            <a:off x="6779327" y="2667786"/>
+            <a:ext cx="269544" cy="3204641"/>
           </a:xfrm>
           <a:prstGeom prst="rect">
             <a:avLst/>
           </a:prstGeom>
           <a:solidFill>
-            <a:srgbClr val="F5F5F5"/>
+            <a:srgbClr val="00A84C">
+              <a:alpha val="15000"/>
+            </a:srgbClr>
           </a:solidFill>
-          <a:ln>
+          <a:ln w="22225">
             <a:solidFill>
-              <a:srgbClr val="F5F5F5"/>
+              <a:srgbClr val="00A84C"/>
             </a:solidFill>
+            <a:prstDash val="dash"/>
           </a:ln>
         </p:spPr>
         <p:style>
@@ -10869,340 +11623,36 @@
           </a:p>
         </p:txBody>
       </p:sp>
-      <p:pic>
-        <p:nvPicPr>
-          <p:cNvPr id="4" name="Picture 3">
-            <a:extLst>
-              <a:ext uri="{FF2B5EF4-FFF2-40B4-BE49-F238E27FC236}">
-                <a16:creationId xmlns:a16="http://schemas.microsoft.com/office/drawing/2014/main" id="{6B17FC3B-A495-4568-BF75-34D420459BF4}"/>
-              </a:ext>
-            </a:extLst>
-          </p:cNvPr>
-          <p:cNvPicPr>
-            <a:picLocks noChangeAspect="1"/>
-          </p:cNvPicPr>
-          <p:nvPr/>
-        </p:nvPicPr>
-        <p:blipFill rotWithShape="1">
-          <a:blip r:embed="rId2"/>
-          <a:srcRect t="10363"/>
-          <a:stretch/>
-        </p:blipFill>
-        <p:spPr>
-          <a:xfrm>
-            <a:off x="274093" y="1328261"/>
-            <a:ext cx="10737130" cy="4824613"/>
+      <p:sp>
+        <p:nvSpPr>
+          <p:cNvPr id="20" name="Rectangle 19">
+            <a:extLst>
+              <a:ext uri="{FF2B5EF4-FFF2-40B4-BE49-F238E27FC236}">
+                <a16:creationId xmlns:a16="http://schemas.microsoft.com/office/drawing/2014/main" id="{336A3934-7EA9-4758-BEAA-CF4E8A1CBABC}"/>
+              </a:ext>
+            </a:extLst>
+          </p:cNvPr>
+          <p:cNvSpPr/>
+          <p:nvPr/>
+        </p:nvSpPr>
+        <p:spPr>
+          <a:xfrm>
+            <a:off x="7209127" y="2674745"/>
+            <a:ext cx="269544" cy="3204641"/>
           </a:xfrm>
           <a:prstGeom prst="rect">
             <a:avLst/>
           </a:prstGeom>
-        </p:spPr>
-      </p:pic>
-      <p:pic>
-        <p:nvPicPr>
-          <p:cNvPr id="7" name="Picture 6">
-            <a:extLst>
-              <a:ext uri="{FF2B5EF4-FFF2-40B4-BE49-F238E27FC236}">
-                <a16:creationId xmlns:a16="http://schemas.microsoft.com/office/drawing/2014/main" id="{C047569D-2EA3-4FB1-9175-03A41D62970D}"/>
-              </a:ext>
-            </a:extLst>
-          </p:cNvPr>
-          <p:cNvPicPr>
-            <a:picLocks noChangeAspect="1"/>
-          </p:cNvPicPr>
-          <p:nvPr/>
-        </p:nvPicPr>
-        <p:blipFill>
-          <a:blip r:embed="rId3"/>
-          <a:stretch>
-            <a:fillRect/>
-          </a:stretch>
-        </p:blipFill>
-        <p:spPr>
-          <a:xfrm>
-            <a:off x="1011503" y="832362"/>
-            <a:ext cx="2810368" cy="1475443"/>
-          </a:xfrm>
-          <a:prstGeom prst="rect">
-            <a:avLst/>
-          </a:prstGeom>
-        </p:spPr>
-      </p:pic>
-      <p:pic>
-        <p:nvPicPr>
-          <p:cNvPr id="6" name="Picture 5">
-            <a:extLst>
-              <a:ext uri="{FF2B5EF4-FFF2-40B4-BE49-F238E27FC236}">
-                <a16:creationId xmlns:a16="http://schemas.microsoft.com/office/drawing/2014/main" id="{19BD58EC-86B5-40B9-B99B-84BA3A97C41C}"/>
-              </a:ext>
-            </a:extLst>
-          </p:cNvPr>
-          <p:cNvPicPr>
-            <a:picLocks noChangeAspect="1"/>
-          </p:cNvPicPr>
-          <p:nvPr/>
-        </p:nvPicPr>
-        <p:blipFill rotWithShape="1">
-          <a:blip r:embed="rId2"/>
-          <a:srcRect l="35193" r="30654" b="92277"/>
-          <a:stretch/>
-        </p:blipFill>
-        <p:spPr>
-          <a:xfrm>
-            <a:off x="2756768" y="242826"/>
-            <a:ext cx="5903755" cy="669254"/>
-          </a:xfrm>
-          <a:prstGeom prst="rect">
-            <a:avLst/>
-          </a:prstGeom>
-        </p:spPr>
-      </p:pic>
-      <p:cxnSp>
-        <p:nvCxnSpPr>
-          <p:cNvPr id="9" name="Straight Connector 8">
-            <a:extLst>
-              <a:ext uri="{FF2B5EF4-FFF2-40B4-BE49-F238E27FC236}">
-                <a16:creationId xmlns:a16="http://schemas.microsoft.com/office/drawing/2014/main" id="{1144F2BD-FD1D-46A3-9013-F45DFEAB3331}"/>
-              </a:ext>
-            </a:extLst>
-          </p:cNvPr>
-          <p:cNvCxnSpPr/>
-          <p:nvPr/>
-        </p:nvCxnSpPr>
-        <p:spPr>
-          <a:xfrm flipV="1">
-            <a:off x="8823489" y="2865748"/>
-            <a:ext cx="0" cy="2771481"/>
-          </a:xfrm>
-          <a:prstGeom prst="line">
-            <a:avLst/>
-          </a:prstGeom>
-          <a:ln w="38100">
+          <a:solidFill>
+            <a:srgbClr val="00A84C">
+              <a:alpha val="15000"/>
+            </a:srgbClr>
+          </a:solidFill>
+          <a:ln w="22225">
             <a:solidFill>
-              <a:srgbClr val="070F30"/>
+              <a:srgbClr val="00A84C"/>
             </a:solidFill>
             <a:prstDash val="dash"/>
-          </a:ln>
-        </p:spPr>
-        <p:style>
-          <a:lnRef idx="1">
-            <a:schemeClr val="accent1"/>
-          </a:lnRef>
-          <a:fillRef idx="0">
-            <a:schemeClr val="accent1"/>
-          </a:fillRef>
-          <a:effectRef idx="0">
-            <a:schemeClr val="accent1"/>
-          </a:effectRef>
-          <a:fontRef idx="minor">
-            <a:schemeClr val="tx1"/>
-          </a:fontRef>
-        </p:style>
-      </p:cxnSp>
-      <p:sp>
-        <p:nvSpPr>
-          <p:cNvPr id="10" name="TextBox 9">
-            <a:extLst>
-              <a:ext uri="{FF2B5EF4-FFF2-40B4-BE49-F238E27FC236}">
-                <a16:creationId xmlns:a16="http://schemas.microsoft.com/office/drawing/2014/main" id="{34EA1446-8141-4A77-B5A2-BA87B8689E68}"/>
-              </a:ext>
-            </a:extLst>
-          </p:cNvPr>
-          <p:cNvSpPr txBox="1"/>
-          <p:nvPr/>
-        </p:nvSpPr>
-        <p:spPr>
-          <a:xfrm>
-            <a:off x="6065010" y="1987902"/>
-            <a:ext cx="3177667" cy="923330"/>
-          </a:xfrm>
-          <a:prstGeom prst="rect">
-            <a:avLst/>
-          </a:prstGeom>
-          <a:noFill/>
-        </p:spPr>
-        <p:txBody>
-          <a:bodyPr wrap="square" rtlCol="0">
-            <a:spAutoFit/>
-          </a:bodyPr>
-          <a:lstStyle/>
-          <a:p>
-            <a:pPr algn="ctr"/>
-            <a:r>
-              <a:rPr lang="en-US" b="1" dirty="0">
-                <a:solidFill>
-                  <a:srgbClr val="070F30"/>
-                </a:solidFill>
-              </a:rPr>
-              <a:t>Demand for Privacy Mixing Increases </a:t>
-            </a:r>
-          </a:p>
-          <a:p>
-            <a:pPr algn="ctr"/>
-            <a:r>
-              <a:rPr lang="en-US" b="1" dirty="0">
-                <a:solidFill>
-                  <a:srgbClr val="070F30"/>
-                </a:solidFill>
-              </a:rPr>
-              <a:t>Tx Throughput</a:t>
-            </a:r>
-            <a:endParaRPr lang="en-AU" b="1" dirty="0">
-              <a:solidFill>
-                <a:srgbClr val="070F30"/>
-              </a:solidFill>
-            </a:endParaRPr>
-          </a:p>
-        </p:txBody>
-      </p:sp>
-      <p:cxnSp>
-        <p:nvCxnSpPr>
-          <p:cNvPr id="12" name="Straight Arrow Connector 11">
-            <a:extLst>
-              <a:ext uri="{FF2B5EF4-FFF2-40B4-BE49-F238E27FC236}">
-                <a16:creationId xmlns:a16="http://schemas.microsoft.com/office/drawing/2014/main" id="{37A16847-73E4-4388-8779-43C62DA05A70}"/>
-              </a:ext>
-            </a:extLst>
-          </p:cNvPr>
-          <p:cNvCxnSpPr>
-            <a:cxnSpLocks/>
-          </p:cNvCxnSpPr>
-          <p:nvPr/>
-        </p:nvCxnSpPr>
-        <p:spPr>
-          <a:xfrm flipV="1">
-            <a:off x="8823489" y="1536569"/>
-            <a:ext cx="1517715" cy="1253765"/>
-          </a:xfrm>
-          <a:prstGeom prst="straightConnector1">
-            <a:avLst/>
-          </a:prstGeom>
-          <a:ln w="28575">
-            <a:solidFill>
-              <a:srgbClr val="070F30"/>
-            </a:solidFill>
-            <a:tailEnd type="triangle"/>
-          </a:ln>
-        </p:spPr>
-        <p:style>
-          <a:lnRef idx="1">
-            <a:schemeClr val="accent1"/>
-          </a:lnRef>
-          <a:fillRef idx="0">
-            <a:schemeClr val="accent1"/>
-          </a:fillRef>
-          <a:effectRef idx="0">
-            <a:schemeClr val="accent1"/>
-          </a:effectRef>
-          <a:fontRef idx="minor">
-            <a:schemeClr val="tx1"/>
-          </a:fontRef>
-        </p:style>
-      </p:cxnSp>
-      <p:cxnSp>
-        <p:nvCxnSpPr>
-          <p:cNvPr id="14" name="Straight Arrow Connector 13">
-            <a:extLst>
-              <a:ext uri="{FF2B5EF4-FFF2-40B4-BE49-F238E27FC236}">
-                <a16:creationId xmlns:a16="http://schemas.microsoft.com/office/drawing/2014/main" id="{33EC51EF-3B57-4DE8-A0EC-4C96D8EA7953}"/>
-              </a:ext>
-            </a:extLst>
-          </p:cNvPr>
-          <p:cNvCxnSpPr>
-            <a:cxnSpLocks/>
-          </p:cNvCxnSpPr>
-          <p:nvPr/>
-        </p:nvCxnSpPr>
-        <p:spPr>
-          <a:xfrm flipV="1">
-            <a:off x="4279769" y="2865748"/>
-            <a:ext cx="4458878" cy="1715679"/>
-          </a:xfrm>
-          <a:prstGeom prst="straightConnector1">
-            <a:avLst/>
-          </a:prstGeom>
-          <a:ln w="28575">
-            <a:solidFill>
-              <a:srgbClr val="070F30">
-                <a:alpha val="40000"/>
-              </a:srgbClr>
-            </a:solidFill>
-            <a:prstDash val="dash"/>
-            <a:tailEnd type="triangle"/>
-          </a:ln>
-        </p:spPr>
-        <p:style>
-          <a:lnRef idx="1">
-            <a:schemeClr val="accent1"/>
-          </a:lnRef>
-          <a:fillRef idx="0">
-            <a:schemeClr val="accent1"/>
-          </a:fillRef>
-          <a:effectRef idx="0">
-            <a:schemeClr val="accent1"/>
-          </a:effectRef>
-          <a:fontRef idx="minor">
-            <a:schemeClr val="tx1"/>
-          </a:fontRef>
-        </p:style>
-      </p:cxnSp>
-    </p:spTree>
-    <p:extLst>
-      <p:ext uri="{BB962C8B-B14F-4D97-AF65-F5344CB8AC3E}">
-        <p14:creationId xmlns:p14="http://schemas.microsoft.com/office/powerpoint/2010/main" val="3694134550"/>
-      </p:ext>
-    </p:extLst>
-  </p:cSld>
-  <p:clrMapOvr>
-    <a:masterClrMapping/>
-  </p:clrMapOvr>
-</p:sld>
-</file>
-
-<file path=ppt/slides/slide24.xml><?xml version="1.0" encoding="utf-8"?>
-<p:sld xmlns:a="http://schemas.openxmlformats.org/drawingml/2006/main" xmlns:r="http://schemas.openxmlformats.org/officeDocument/2006/relationships" xmlns:p="http://schemas.openxmlformats.org/presentationml/2006/main">
-  <p:cSld>
-    <p:spTree>
-      <p:nvGrpSpPr>
-        <p:cNvPr id="1" name=""/>
-        <p:cNvGrpSpPr/>
-        <p:nvPr/>
-      </p:nvGrpSpPr>
-      <p:grpSpPr>
-        <a:xfrm>
-          <a:off x="0" y="0"/>
-          <a:ext cx="0" cy="0"/>
-          <a:chOff x="0" y="0"/>
-          <a:chExt cx="0" cy="0"/>
-        </a:xfrm>
-      </p:grpSpPr>
-      <p:sp>
-        <p:nvSpPr>
-          <p:cNvPr id="5" name="Rectangle 4">
-            <a:extLst>
-              <a:ext uri="{FF2B5EF4-FFF2-40B4-BE49-F238E27FC236}">
-                <a16:creationId xmlns:a16="http://schemas.microsoft.com/office/drawing/2014/main" id="{6563922A-6CBD-465E-8926-269E1F89E76D}"/>
-              </a:ext>
-            </a:extLst>
-          </p:cNvPr>
-          <p:cNvSpPr/>
-          <p:nvPr/>
-        </p:nvSpPr>
-        <p:spPr>
-          <a:xfrm>
-            <a:off x="0" y="0"/>
-            <a:ext cx="11285316" cy="6858000"/>
-          </a:xfrm>
-          <a:prstGeom prst="rect">
-            <a:avLst/>
-          </a:prstGeom>
-          <a:solidFill>
-            <a:srgbClr val="F5F5F5"/>
-          </a:solidFill>
-          <a:ln>
-            <a:solidFill>
-              <a:srgbClr val="F5F5F5"/>
-            </a:solidFill>
           </a:ln>
         </p:spPr>
         <p:style>
@@ -11230,272 +11680,10 @@
           </a:p>
         </p:txBody>
       </p:sp>
-      <p:pic>
-        <p:nvPicPr>
-          <p:cNvPr id="4" name="Picture 3">
-            <a:extLst>
-              <a:ext uri="{FF2B5EF4-FFF2-40B4-BE49-F238E27FC236}">
-                <a16:creationId xmlns:a16="http://schemas.microsoft.com/office/drawing/2014/main" id="{6B17FC3B-A495-4568-BF75-34D420459BF4}"/>
-              </a:ext>
-            </a:extLst>
-          </p:cNvPr>
-          <p:cNvPicPr>
-            <a:picLocks noChangeAspect="1"/>
-          </p:cNvPicPr>
-          <p:nvPr/>
-        </p:nvPicPr>
-        <p:blipFill rotWithShape="1">
-          <a:blip r:embed="rId2"/>
-          <a:srcRect t="10363"/>
-          <a:stretch/>
-        </p:blipFill>
-        <p:spPr>
-          <a:xfrm>
-            <a:off x="274093" y="1328261"/>
-            <a:ext cx="10737130" cy="4824613"/>
-          </a:xfrm>
-          <a:prstGeom prst="rect">
-            <a:avLst/>
-          </a:prstGeom>
-        </p:spPr>
-      </p:pic>
-      <p:pic>
-        <p:nvPicPr>
-          <p:cNvPr id="7" name="Picture 6">
-            <a:extLst>
-              <a:ext uri="{FF2B5EF4-FFF2-40B4-BE49-F238E27FC236}">
-                <a16:creationId xmlns:a16="http://schemas.microsoft.com/office/drawing/2014/main" id="{C047569D-2EA3-4FB1-9175-03A41D62970D}"/>
-              </a:ext>
-            </a:extLst>
-          </p:cNvPr>
-          <p:cNvPicPr>
-            <a:picLocks noChangeAspect="1"/>
-          </p:cNvPicPr>
-          <p:nvPr/>
-        </p:nvPicPr>
-        <p:blipFill>
-          <a:blip r:embed="rId3"/>
-          <a:stretch>
-            <a:fillRect/>
-          </a:stretch>
-        </p:blipFill>
-        <p:spPr>
-          <a:xfrm>
-            <a:off x="1011503" y="832362"/>
-            <a:ext cx="2810368" cy="1475443"/>
-          </a:xfrm>
-          <a:prstGeom prst="rect">
-            <a:avLst/>
-          </a:prstGeom>
-        </p:spPr>
-      </p:pic>
-      <p:pic>
-        <p:nvPicPr>
-          <p:cNvPr id="6" name="Picture 5">
-            <a:extLst>
-              <a:ext uri="{FF2B5EF4-FFF2-40B4-BE49-F238E27FC236}">
-                <a16:creationId xmlns:a16="http://schemas.microsoft.com/office/drawing/2014/main" id="{19BD58EC-86B5-40B9-B99B-84BA3A97C41C}"/>
-              </a:ext>
-            </a:extLst>
-          </p:cNvPr>
-          <p:cNvPicPr>
-            <a:picLocks noChangeAspect="1"/>
-          </p:cNvPicPr>
-          <p:nvPr/>
-        </p:nvPicPr>
-        <p:blipFill rotWithShape="1">
-          <a:blip r:embed="rId2"/>
-          <a:srcRect l="35193" r="30654" b="92277"/>
-          <a:stretch/>
-        </p:blipFill>
-        <p:spPr>
-          <a:xfrm>
-            <a:off x="2756768" y="242826"/>
-            <a:ext cx="5903755" cy="669254"/>
-          </a:xfrm>
-          <a:prstGeom prst="rect">
-            <a:avLst/>
-          </a:prstGeom>
-        </p:spPr>
-      </p:pic>
-      <p:sp>
-        <p:nvSpPr>
-          <p:cNvPr id="12" name="TextBox 11">
-            <a:extLst>
-              <a:ext uri="{FF2B5EF4-FFF2-40B4-BE49-F238E27FC236}">
-                <a16:creationId xmlns:a16="http://schemas.microsoft.com/office/drawing/2014/main" id="{475CAEA0-3130-4A2D-8646-B4F27D677983}"/>
-              </a:ext>
-            </a:extLst>
-          </p:cNvPr>
-          <p:cNvSpPr txBox="1"/>
-          <p:nvPr/>
-        </p:nvSpPr>
-        <p:spPr>
-          <a:xfrm>
-            <a:off x="4956092" y="2782669"/>
-            <a:ext cx="2557071" cy="646331"/>
-          </a:xfrm>
-          <a:prstGeom prst="rect">
-            <a:avLst/>
-          </a:prstGeom>
-          <a:noFill/>
-        </p:spPr>
-        <p:txBody>
-          <a:bodyPr wrap="square" rtlCol="0">
-            <a:spAutoFit/>
-          </a:bodyPr>
-          <a:lstStyle/>
-          <a:p>
-            <a:pPr algn="ctr"/>
-            <a:r>
-              <a:rPr lang="en-US" b="1" dirty="0">
-                <a:solidFill>
-                  <a:srgbClr val="F91727"/>
-                </a:solidFill>
-              </a:rPr>
-              <a:t>23% of Supply Mixed and Unspent</a:t>
-            </a:r>
-            <a:endParaRPr lang="en-AU" b="1" dirty="0">
-              <a:solidFill>
-                <a:srgbClr val="F91727"/>
-              </a:solidFill>
-            </a:endParaRPr>
-          </a:p>
-        </p:txBody>
-      </p:sp>
-      <p:cxnSp>
-        <p:nvCxnSpPr>
-          <p:cNvPr id="3" name="Straight Arrow Connector 2">
-            <a:extLst>
-              <a:ext uri="{FF2B5EF4-FFF2-40B4-BE49-F238E27FC236}">
-                <a16:creationId xmlns:a16="http://schemas.microsoft.com/office/drawing/2014/main" id="{7A437F6D-F254-4B77-90DE-2AC30E7E4B6E}"/>
-              </a:ext>
-            </a:extLst>
-          </p:cNvPr>
-          <p:cNvCxnSpPr>
-            <a:cxnSpLocks/>
-            <a:stCxn id="12" idx="3"/>
-          </p:cNvCxnSpPr>
-          <p:nvPr/>
-        </p:nvCxnSpPr>
-        <p:spPr>
-          <a:xfrm>
-            <a:off x="7513163" y="3105835"/>
-            <a:ext cx="2730134" cy="739346"/>
-          </a:xfrm>
-          <a:prstGeom prst="straightConnector1">
-            <a:avLst/>
-          </a:prstGeom>
-          <a:ln w="19050">
-            <a:tailEnd type="triangle"/>
-          </a:ln>
-        </p:spPr>
-        <p:style>
-          <a:lnRef idx="1">
-            <a:schemeClr val="accent1"/>
-          </a:lnRef>
-          <a:fillRef idx="0">
-            <a:schemeClr val="accent1"/>
-          </a:fillRef>
-          <a:effectRef idx="0">
-            <a:schemeClr val="accent1"/>
-          </a:effectRef>
-          <a:fontRef idx="minor">
-            <a:schemeClr val="tx1"/>
-          </a:fontRef>
-        </p:style>
-      </p:cxnSp>
-      <p:sp>
-        <p:nvSpPr>
-          <p:cNvPr id="14" name="TextBox 13">
-            <a:extLst>
-              <a:ext uri="{FF2B5EF4-FFF2-40B4-BE49-F238E27FC236}">
-                <a16:creationId xmlns:a16="http://schemas.microsoft.com/office/drawing/2014/main" id="{3B7F65A5-151C-4CBF-A5F3-BA543FD5B84C}"/>
-              </a:ext>
-            </a:extLst>
-          </p:cNvPr>
-          <p:cNvSpPr txBox="1"/>
-          <p:nvPr/>
-        </p:nvSpPr>
-        <p:spPr>
-          <a:xfrm>
-            <a:off x="4962661" y="2136338"/>
-            <a:ext cx="2557071" cy="646331"/>
-          </a:xfrm>
-          <a:prstGeom prst="rect">
-            <a:avLst/>
-          </a:prstGeom>
-          <a:noFill/>
-        </p:spPr>
-        <p:txBody>
-          <a:bodyPr wrap="square" rtlCol="0">
-            <a:spAutoFit/>
-          </a:bodyPr>
-          <a:lstStyle/>
-          <a:p>
-            <a:pPr algn="ctr"/>
-            <a:r>
-              <a:rPr lang="en-US" b="1" dirty="0">
-                <a:solidFill>
-                  <a:srgbClr val="070F30"/>
-                </a:solidFill>
-              </a:rPr>
-              <a:t>50% of Supply Staked in Tickets</a:t>
-            </a:r>
-            <a:endParaRPr lang="en-AU" b="1" dirty="0">
-              <a:solidFill>
-                <a:srgbClr val="070F30"/>
-              </a:solidFill>
-            </a:endParaRPr>
-          </a:p>
-        </p:txBody>
-      </p:sp>
-      <p:cxnSp>
-        <p:nvCxnSpPr>
-          <p:cNvPr id="15" name="Straight Arrow Connector 14">
-            <a:extLst>
-              <a:ext uri="{FF2B5EF4-FFF2-40B4-BE49-F238E27FC236}">
-                <a16:creationId xmlns:a16="http://schemas.microsoft.com/office/drawing/2014/main" id="{8853A9F6-3DEC-4AC0-B171-BC5BE9C3A463}"/>
-              </a:ext>
-            </a:extLst>
-          </p:cNvPr>
-          <p:cNvCxnSpPr>
-            <a:cxnSpLocks/>
-            <a:stCxn id="14" idx="3"/>
-          </p:cNvCxnSpPr>
-          <p:nvPr/>
-        </p:nvCxnSpPr>
-        <p:spPr>
-          <a:xfrm flipV="1">
-            <a:off x="7519732" y="1813172"/>
-            <a:ext cx="2723565" cy="646332"/>
-          </a:xfrm>
-          <a:prstGeom prst="straightConnector1">
-            <a:avLst/>
-          </a:prstGeom>
-          <a:ln w="19050">
-            <a:tailEnd type="triangle"/>
-          </a:ln>
-        </p:spPr>
-        <p:style>
-          <a:lnRef idx="1">
-            <a:schemeClr val="accent1"/>
-          </a:lnRef>
-          <a:fillRef idx="0">
-            <a:schemeClr val="accent1"/>
-          </a:fillRef>
-          <a:effectRef idx="0">
-            <a:schemeClr val="accent1"/>
-          </a:effectRef>
-          <a:fontRef idx="minor">
-            <a:schemeClr val="tx1"/>
-          </a:fontRef>
-        </p:style>
-      </p:cxnSp>
     </p:spTree>
     <p:extLst>
       <p:ext uri="{BB962C8B-B14F-4D97-AF65-F5344CB8AC3E}">
-        <p14:creationId xmlns:p14="http://schemas.microsoft.com/office/powerpoint/2010/main" val="1235936446"/>
+        <p14:creationId xmlns:p14="http://schemas.microsoft.com/office/powerpoint/2010/main" val="1109760807"/>
       </p:ext>
     </p:extLst>
   </p:cSld>
@@ -11524,10 +11712,10 @@
       </p:grpSpPr>
       <p:sp>
         <p:nvSpPr>
-          <p:cNvPr id="5" name="Rectangle 4">
-            <a:extLst>
-              <a:ext uri="{FF2B5EF4-FFF2-40B4-BE49-F238E27FC236}">
-                <a16:creationId xmlns:a16="http://schemas.microsoft.com/office/drawing/2014/main" id="{6563922A-6CBD-465E-8926-269E1F89E76D}"/>
+          <p:cNvPr id="6" name="Rectangle 5">
+            <a:extLst>
+              <a:ext uri="{FF2B5EF4-FFF2-40B4-BE49-F238E27FC236}">
+                <a16:creationId xmlns:a16="http://schemas.microsoft.com/office/drawing/2014/main" id="{CA54D8FD-666F-44A9-9BA2-7DC9153E80FF}"/>
               </a:ext>
             </a:extLst>
           </p:cNvPr>
@@ -11581,7 +11769,7 @@
           <p:cNvPr id="4" name="Picture 3">
             <a:extLst>
               <a:ext uri="{FF2B5EF4-FFF2-40B4-BE49-F238E27FC236}">
-                <a16:creationId xmlns:a16="http://schemas.microsoft.com/office/drawing/2014/main" id="{6B17FC3B-A495-4568-BF75-34D420459BF4}"/>
+                <a16:creationId xmlns:a16="http://schemas.microsoft.com/office/drawing/2014/main" id="{93B00FA9-3648-4193-B729-791AEABF81BB}"/>
               </a:ext>
             </a:extLst>
           </p:cNvPr>
@@ -11590,74 +11778,16 @@
           </p:cNvPicPr>
           <p:nvPr/>
         </p:nvPicPr>
-        <p:blipFill rotWithShape="1">
+        <p:blipFill>
           <a:blip r:embed="rId2"/>
-          <a:srcRect t="10363"/>
-          <a:stretch/>
-        </p:blipFill>
-        <p:spPr>
-          <a:xfrm>
-            <a:off x="274093" y="1328261"/>
-            <a:ext cx="10737130" cy="4824613"/>
-          </a:xfrm>
-          <a:prstGeom prst="rect">
-            <a:avLst/>
-          </a:prstGeom>
-        </p:spPr>
-      </p:pic>
-      <p:pic>
-        <p:nvPicPr>
-          <p:cNvPr id="6" name="Picture 5">
-            <a:extLst>
-              <a:ext uri="{FF2B5EF4-FFF2-40B4-BE49-F238E27FC236}">
-                <a16:creationId xmlns:a16="http://schemas.microsoft.com/office/drawing/2014/main" id="{19BD58EC-86B5-40B9-B99B-84BA3A97C41C}"/>
-              </a:ext>
-            </a:extLst>
-          </p:cNvPr>
-          <p:cNvPicPr>
-            <a:picLocks noChangeAspect="1"/>
-          </p:cNvPicPr>
-          <p:nvPr/>
-        </p:nvPicPr>
-        <p:blipFill rotWithShape="1">
-          <a:blip r:embed="rId2"/>
-          <a:srcRect l="35193" r="30654" b="92277"/>
-          <a:stretch/>
-        </p:blipFill>
-        <p:spPr>
-          <a:xfrm>
-            <a:off x="2756768" y="242826"/>
-            <a:ext cx="5903755" cy="669254"/>
-          </a:xfrm>
-          <a:prstGeom prst="rect">
-            <a:avLst/>
-          </a:prstGeom>
-        </p:spPr>
-      </p:pic>
-      <p:pic>
-        <p:nvPicPr>
-          <p:cNvPr id="2" name="Picture 1">
-            <a:extLst>
-              <a:ext uri="{FF2B5EF4-FFF2-40B4-BE49-F238E27FC236}">
-                <a16:creationId xmlns:a16="http://schemas.microsoft.com/office/drawing/2014/main" id="{A65BE2BF-AF0D-4CAF-B064-7631D76885EB}"/>
-              </a:ext>
-            </a:extLst>
-          </p:cNvPr>
-          <p:cNvPicPr>
-            <a:picLocks noChangeAspect="1"/>
-          </p:cNvPicPr>
-          <p:nvPr/>
-        </p:nvPicPr>
-        <p:blipFill>
-          <a:blip r:embed="rId3"/>
           <a:stretch>
             <a:fillRect/>
           </a:stretch>
         </p:blipFill>
         <p:spPr>
           <a:xfrm>
-            <a:off x="853026" y="1140325"/>
-            <a:ext cx="10158198" cy="4770425"/>
+            <a:off x="160256" y="677863"/>
+            <a:ext cx="10954512" cy="5466824"/>
           </a:xfrm>
           <a:prstGeom prst="rect">
             <a:avLst/>
@@ -11666,10 +11796,10 @@
       </p:pic>
       <p:sp>
         <p:nvSpPr>
-          <p:cNvPr id="8" name="TextBox 7">
-            <a:extLst>
-              <a:ext uri="{FF2B5EF4-FFF2-40B4-BE49-F238E27FC236}">
-                <a16:creationId xmlns:a16="http://schemas.microsoft.com/office/drawing/2014/main" id="{CFB616AC-495B-476B-A3C8-BECCD77C6CB0}"/>
+          <p:cNvPr id="5" name="TextBox 4">
+            <a:extLst>
+              <a:ext uri="{FF2B5EF4-FFF2-40B4-BE49-F238E27FC236}">
+                <a16:creationId xmlns:a16="http://schemas.microsoft.com/office/drawing/2014/main" id="{9C592FE5-33C8-4857-A5B7-42B188148646}"/>
               </a:ext>
             </a:extLst>
           </p:cNvPr>
@@ -11678,8 +11808,603 @@
         </p:nvSpPr>
         <p:spPr>
           <a:xfrm>
-            <a:off x="4985760" y="1988415"/>
-            <a:ext cx="3730304" cy="369332"/>
+            <a:off x="590914" y="6353423"/>
+            <a:ext cx="10103487" cy="369332"/>
+          </a:xfrm>
+          <a:prstGeom prst="rect">
+            <a:avLst/>
+          </a:prstGeom>
+          <a:noFill/>
+        </p:spPr>
+        <p:txBody>
+          <a:bodyPr wrap="square" rtlCol="0">
+            <a:spAutoFit/>
+          </a:bodyPr>
+          <a:lstStyle/>
+          <a:p>
+            <a:pPr algn="ctr"/>
+            <a:r>
+              <a:rPr lang="en-US" b="1" dirty="0">
+                <a:solidFill>
+                  <a:srgbClr val="002060"/>
+                </a:solidFill>
+              </a:rPr>
+              <a:t>Psychology: </a:t>
+            </a:r>
+            <a:r>
+              <a:rPr lang="en-US" dirty="0">
+                <a:solidFill>
+                  <a:srgbClr val="002060"/>
+                </a:solidFill>
+              </a:rPr>
+              <a:t>Compare transactional demand for Block-space to network valuation</a:t>
+            </a:r>
+            <a:endParaRPr lang="en-AU" dirty="0">
+              <a:solidFill>
+                <a:srgbClr val="002060"/>
+              </a:solidFill>
+            </a:endParaRPr>
+          </a:p>
+        </p:txBody>
+      </p:sp>
+      <p:pic>
+        <p:nvPicPr>
+          <p:cNvPr id="7" name="Picture 6">
+            <a:extLst>
+              <a:ext uri="{FF2B5EF4-FFF2-40B4-BE49-F238E27FC236}">
+                <a16:creationId xmlns:a16="http://schemas.microsoft.com/office/drawing/2014/main" id="{F343329A-417A-44A3-BD6B-2645D0CDFBC2}"/>
+              </a:ext>
+            </a:extLst>
+          </p:cNvPr>
+          <p:cNvPicPr>
+            <a:picLocks noChangeAspect="1"/>
+          </p:cNvPicPr>
+          <p:nvPr/>
+        </p:nvPicPr>
+        <p:blipFill rotWithShape="1">
+          <a:blip r:embed="rId2"/>
+          <a:srcRect l="37592" t="1712" r="31257" b="92598"/>
+          <a:stretch/>
+        </p:blipFill>
+        <p:spPr>
+          <a:xfrm>
+            <a:off x="2648933" y="419520"/>
+            <a:ext cx="6445640" cy="587585"/>
+          </a:xfrm>
+          <a:prstGeom prst="rect">
+            <a:avLst/>
+          </a:prstGeom>
+        </p:spPr>
+      </p:pic>
+      <p:sp>
+        <p:nvSpPr>
+          <p:cNvPr id="12" name="Rectangle 11">
+            <a:extLst>
+              <a:ext uri="{FF2B5EF4-FFF2-40B4-BE49-F238E27FC236}">
+                <a16:creationId xmlns:a16="http://schemas.microsoft.com/office/drawing/2014/main" id="{1A36F0A4-47F3-4F63-9BE8-E443235AE2B7}"/>
+              </a:ext>
+            </a:extLst>
+          </p:cNvPr>
+          <p:cNvSpPr/>
+          <p:nvPr/>
+        </p:nvSpPr>
+        <p:spPr>
+          <a:xfrm>
+            <a:off x="8713572" y="2784468"/>
+            <a:ext cx="475707" cy="3087960"/>
+          </a:xfrm>
+          <a:prstGeom prst="rect">
+            <a:avLst/>
+          </a:prstGeom>
+          <a:solidFill>
+            <a:srgbClr val="00A84C">
+              <a:alpha val="10000"/>
+            </a:srgbClr>
+          </a:solidFill>
+          <a:ln w="22225">
+            <a:solidFill>
+              <a:srgbClr val="00A84C">
+                <a:alpha val="20000"/>
+              </a:srgbClr>
+            </a:solidFill>
+            <a:prstDash val="dash"/>
+          </a:ln>
+        </p:spPr>
+        <p:style>
+          <a:lnRef idx="2">
+            <a:schemeClr val="accent1">
+              <a:shade val="50000"/>
+            </a:schemeClr>
+          </a:lnRef>
+          <a:fillRef idx="1">
+            <a:schemeClr val="accent1"/>
+          </a:fillRef>
+          <a:effectRef idx="0">
+            <a:schemeClr val="accent1"/>
+          </a:effectRef>
+          <a:fontRef idx="minor">
+            <a:schemeClr val="lt1"/>
+          </a:fontRef>
+        </p:style>
+        <p:txBody>
+          <a:bodyPr rtlCol="0" anchor="ctr"/>
+          <a:lstStyle/>
+          <a:p>
+            <a:pPr algn="ctr"/>
+            <a:endParaRPr lang="en-AU"/>
+          </a:p>
+        </p:txBody>
+      </p:sp>
+      <p:sp>
+        <p:nvSpPr>
+          <p:cNvPr id="13" name="Rectangle 12">
+            <a:extLst>
+              <a:ext uri="{FF2B5EF4-FFF2-40B4-BE49-F238E27FC236}">
+                <a16:creationId xmlns:a16="http://schemas.microsoft.com/office/drawing/2014/main" id="{5039068B-ECF9-4C93-A2CB-F39E779AEE69}"/>
+              </a:ext>
+            </a:extLst>
+          </p:cNvPr>
+          <p:cNvSpPr/>
+          <p:nvPr/>
+        </p:nvSpPr>
+        <p:spPr>
+          <a:xfrm>
+            <a:off x="9349535" y="2784468"/>
+            <a:ext cx="653404" cy="3087960"/>
+          </a:xfrm>
+          <a:prstGeom prst="rect">
+            <a:avLst/>
+          </a:prstGeom>
+          <a:solidFill>
+            <a:srgbClr val="00A84C">
+              <a:alpha val="10000"/>
+            </a:srgbClr>
+          </a:solidFill>
+          <a:ln w="22225">
+            <a:solidFill>
+              <a:srgbClr val="00A84C">
+                <a:alpha val="20000"/>
+              </a:srgbClr>
+            </a:solidFill>
+            <a:prstDash val="dash"/>
+          </a:ln>
+        </p:spPr>
+        <p:style>
+          <a:lnRef idx="2">
+            <a:schemeClr val="accent1">
+              <a:shade val="50000"/>
+            </a:schemeClr>
+          </a:lnRef>
+          <a:fillRef idx="1">
+            <a:schemeClr val="accent1"/>
+          </a:fillRef>
+          <a:effectRef idx="0">
+            <a:schemeClr val="accent1"/>
+          </a:effectRef>
+          <a:fontRef idx="minor">
+            <a:schemeClr val="lt1"/>
+          </a:fontRef>
+        </p:style>
+        <p:txBody>
+          <a:bodyPr rtlCol="0" anchor="ctr"/>
+          <a:lstStyle/>
+          <a:p>
+            <a:pPr algn="ctr"/>
+            <a:endParaRPr lang="en-AU"/>
+          </a:p>
+        </p:txBody>
+      </p:sp>
+      <p:sp>
+        <p:nvSpPr>
+          <p:cNvPr id="14" name="Rectangle 13">
+            <a:extLst>
+              <a:ext uri="{FF2B5EF4-FFF2-40B4-BE49-F238E27FC236}">
+                <a16:creationId xmlns:a16="http://schemas.microsoft.com/office/drawing/2014/main" id="{6DFE9484-E49D-4F57-97F5-F871AA0AD9FC}"/>
+              </a:ext>
+            </a:extLst>
+          </p:cNvPr>
+          <p:cNvSpPr/>
+          <p:nvPr/>
+        </p:nvSpPr>
+        <p:spPr>
+          <a:xfrm>
+            <a:off x="2265010" y="4331876"/>
+            <a:ext cx="737711" cy="1547510"/>
+          </a:xfrm>
+          <a:prstGeom prst="rect">
+            <a:avLst/>
+          </a:prstGeom>
+          <a:solidFill>
+            <a:srgbClr val="00A84C">
+              <a:alpha val="10000"/>
+            </a:srgbClr>
+          </a:solidFill>
+          <a:ln w="22225">
+            <a:solidFill>
+              <a:srgbClr val="00A84C">
+                <a:alpha val="20000"/>
+              </a:srgbClr>
+            </a:solidFill>
+            <a:prstDash val="dash"/>
+          </a:ln>
+        </p:spPr>
+        <p:style>
+          <a:lnRef idx="2">
+            <a:schemeClr val="accent1">
+              <a:shade val="50000"/>
+            </a:schemeClr>
+          </a:lnRef>
+          <a:fillRef idx="1">
+            <a:schemeClr val="accent1"/>
+          </a:fillRef>
+          <a:effectRef idx="0">
+            <a:schemeClr val="accent1"/>
+          </a:effectRef>
+          <a:fontRef idx="minor">
+            <a:schemeClr val="lt1"/>
+          </a:fontRef>
+        </p:style>
+        <p:txBody>
+          <a:bodyPr rtlCol="0" anchor="ctr"/>
+          <a:lstStyle/>
+          <a:p>
+            <a:pPr algn="ctr"/>
+            <a:endParaRPr lang="en-AU"/>
+          </a:p>
+        </p:txBody>
+      </p:sp>
+      <p:sp>
+        <p:nvSpPr>
+          <p:cNvPr id="15" name="Rectangle 14">
+            <a:extLst>
+              <a:ext uri="{FF2B5EF4-FFF2-40B4-BE49-F238E27FC236}">
+                <a16:creationId xmlns:a16="http://schemas.microsoft.com/office/drawing/2014/main" id="{C399231B-6DC0-4C83-9C0B-FFA8A0692C09}"/>
+              </a:ext>
+            </a:extLst>
+          </p:cNvPr>
+          <p:cNvSpPr/>
+          <p:nvPr/>
+        </p:nvSpPr>
+        <p:spPr>
+          <a:xfrm>
+            <a:off x="3590113" y="2734861"/>
+            <a:ext cx="611273" cy="3137567"/>
+          </a:xfrm>
+          <a:prstGeom prst="rect">
+            <a:avLst/>
+          </a:prstGeom>
+          <a:solidFill>
+            <a:srgbClr val="00A84C">
+              <a:alpha val="10000"/>
+            </a:srgbClr>
+          </a:solidFill>
+          <a:ln w="22225">
+            <a:solidFill>
+              <a:srgbClr val="00A84C">
+                <a:alpha val="20000"/>
+              </a:srgbClr>
+            </a:solidFill>
+            <a:prstDash val="dash"/>
+          </a:ln>
+        </p:spPr>
+        <p:style>
+          <a:lnRef idx="2">
+            <a:schemeClr val="accent1">
+              <a:shade val="50000"/>
+            </a:schemeClr>
+          </a:lnRef>
+          <a:fillRef idx="1">
+            <a:schemeClr val="accent1"/>
+          </a:fillRef>
+          <a:effectRef idx="0">
+            <a:schemeClr val="accent1"/>
+          </a:effectRef>
+          <a:fontRef idx="minor">
+            <a:schemeClr val="lt1"/>
+          </a:fontRef>
+        </p:style>
+        <p:txBody>
+          <a:bodyPr rtlCol="0" anchor="ctr"/>
+          <a:lstStyle/>
+          <a:p>
+            <a:pPr algn="ctr"/>
+            <a:endParaRPr lang="en-AU"/>
+          </a:p>
+        </p:txBody>
+      </p:sp>
+      <mc:AlternateContent xmlns:mc="http://schemas.openxmlformats.org/markup-compatibility/2006" xmlns:a14="http://schemas.microsoft.com/office/drawing/2010/main">
+        <mc:Choice Requires="a14">
+          <p:sp>
+            <p:nvSpPr>
+              <p:cNvPr id="17" name="TextBox 16">
+                <a:extLst>
+                  <a:ext uri="{FF2B5EF4-FFF2-40B4-BE49-F238E27FC236}">
+                    <a16:creationId xmlns:a16="http://schemas.microsoft.com/office/drawing/2014/main" id="{BF651F2A-2DDD-4826-BD70-B8E4B4FE18B1}"/>
+                  </a:ext>
+                </a:extLst>
+              </p:cNvPr>
+              <p:cNvSpPr txBox="1"/>
+              <p:nvPr/>
+            </p:nvSpPr>
+            <p:spPr>
+              <a:xfrm>
+                <a:off x="906684" y="1429168"/>
+                <a:ext cx="3276538" cy="1092479"/>
+              </a:xfrm>
+              <a:prstGeom prst="rect">
+                <a:avLst/>
+              </a:prstGeom>
+              <a:noFill/>
+            </p:spPr>
+            <p:txBody>
+              <a:bodyPr wrap="none" lIns="0" tIns="0" rIns="0" bIns="0" rtlCol="0">
+                <a:spAutoFit/>
+              </a:bodyPr>
+              <a:lstStyle/>
+              <a:p>
+                <a:pPr algn="ctr"/>
+                <a14:m>
+                  <m:oMathPara xmlns:m="http://schemas.openxmlformats.org/officeDocument/2006/math">
+                    <m:oMathParaPr>
+                      <m:jc m:val="centerGroup"/>
+                    </m:oMathParaPr>
+                    <m:oMath xmlns:m="http://schemas.openxmlformats.org/officeDocument/2006/math">
+                      <m:r>
+                        <a:rPr lang="en-US" sz="1400" b="0" i="1" smtClean="0">
+                          <a:solidFill>
+                            <a:srgbClr val="070F30"/>
+                          </a:solidFill>
+                          <a:latin typeface="Cambria Math" panose="02040503050406030204" pitchFamily="18" charset="0"/>
+                        </a:rPr>
+                        <m:t>𝑁𝑉𝑇</m:t>
+                      </m:r>
+                      <m:r>
+                        <a:rPr lang="en-US" sz="1400" b="0" i="1" smtClean="0">
+                          <a:solidFill>
+                            <a:srgbClr val="070F30"/>
+                          </a:solidFill>
+                          <a:latin typeface="Cambria Math" panose="02040503050406030204" pitchFamily="18" charset="0"/>
+                        </a:rPr>
+                        <m:t>= </m:t>
+                      </m:r>
+                      <m:f>
+                        <m:fPr>
+                          <m:ctrlPr>
+                            <a:rPr lang="en-US" sz="1400" i="1" smtClean="0">
+                              <a:solidFill>
+                                <a:srgbClr val="070F30"/>
+                              </a:solidFill>
+                              <a:latin typeface="Cambria Math" panose="02040503050406030204" pitchFamily="18" charset="0"/>
+                            </a:rPr>
+                          </m:ctrlPr>
+                        </m:fPr>
+                        <m:num>
+                          <m:r>
+                            <a:rPr lang="en-US" sz="1400" b="0" i="1" smtClean="0">
+                              <a:solidFill>
+                                <a:srgbClr val="070F30"/>
+                              </a:solidFill>
+                              <a:latin typeface="Cambria Math" panose="02040503050406030204" pitchFamily="18" charset="0"/>
+                            </a:rPr>
+                            <m:t>𝑀𝑎𝑟𝑘𝑒𝑡</m:t>
+                          </m:r>
+                          <m:r>
+                            <a:rPr lang="en-US" sz="1400" b="0" i="1" smtClean="0">
+                              <a:solidFill>
+                                <a:srgbClr val="070F30"/>
+                              </a:solidFill>
+                              <a:latin typeface="Cambria Math" panose="02040503050406030204" pitchFamily="18" charset="0"/>
+                            </a:rPr>
+                            <m:t> </m:t>
+                          </m:r>
+                          <m:r>
+                            <a:rPr lang="en-US" sz="1400" b="0" i="1" smtClean="0">
+                              <a:solidFill>
+                                <a:srgbClr val="070F30"/>
+                              </a:solidFill>
+                              <a:latin typeface="Cambria Math" panose="02040503050406030204" pitchFamily="18" charset="0"/>
+                            </a:rPr>
+                            <m:t>𝐶𝑎𝑝</m:t>
+                          </m:r>
+                        </m:num>
+                        <m:den>
+                          <m:r>
+                            <a:rPr lang="en-US" sz="1400" b="0" i="1" smtClean="0">
+                              <a:solidFill>
+                                <a:srgbClr val="070F30"/>
+                              </a:solidFill>
+                              <a:latin typeface="Cambria Math" panose="02040503050406030204" pitchFamily="18" charset="0"/>
+                            </a:rPr>
+                            <m:t>𝐷𝑎𝑖𝑙𝑦</m:t>
+                          </m:r>
+                          <m:r>
+                            <a:rPr lang="en-US" sz="1400" b="0" i="1" smtClean="0">
+                              <a:solidFill>
+                                <a:srgbClr val="070F30"/>
+                              </a:solidFill>
+                              <a:latin typeface="Cambria Math" panose="02040503050406030204" pitchFamily="18" charset="0"/>
+                            </a:rPr>
+                            <m:t> </m:t>
+                          </m:r>
+                          <m:r>
+                            <a:rPr lang="en-US" sz="1400" b="0" i="1" smtClean="0">
+                              <a:solidFill>
+                                <a:srgbClr val="070F30"/>
+                              </a:solidFill>
+                              <a:latin typeface="Cambria Math" panose="02040503050406030204" pitchFamily="18" charset="0"/>
+                            </a:rPr>
+                            <m:t>𝑇𝑟𝑎𝑛𝑠𝑎𝑐𝑡𝑖𝑜𝑛</m:t>
+                          </m:r>
+                          <m:r>
+                            <a:rPr lang="en-US" sz="1400" b="0" i="1" smtClean="0">
+                              <a:solidFill>
+                                <a:srgbClr val="070F30"/>
+                              </a:solidFill>
+                              <a:latin typeface="Cambria Math" panose="02040503050406030204" pitchFamily="18" charset="0"/>
+                            </a:rPr>
+                            <m:t> </m:t>
+                          </m:r>
+                          <m:r>
+                            <a:rPr lang="en-US" sz="1400" b="0" i="1" smtClean="0">
+                              <a:solidFill>
+                                <a:srgbClr val="070F30"/>
+                              </a:solidFill>
+                              <a:latin typeface="Cambria Math" panose="02040503050406030204" pitchFamily="18" charset="0"/>
+                            </a:rPr>
+                            <m:t>𝑉𝑜𝑙𝑢𝑚𝑒</m:t>
+                          </m:r>
+                        </m:den>
+                      </m:f>
+                    </m:oMath>
+                  </m:oMathPara>
+                </a14:m>
+                <a:endParaRPr lang="en-AU" sz="1400" dirty="0">
+                  <a:solidFill>
+                    <a:srgbClr val="070F30"/>
+                  </a:solidFill>
+                </a:endParaRPr>
+              </a:p>
+              <a:p>
+                <a:pPr algn="ctr"/>
+                <a:endParaRPr lang="en-AU" sz="1400" b="1" dirty="0">
+                  <a:solidFill>
+                    <a:srgbClr val="F91727"/>
+                  </a:solidFill>
+                </a:endParaRPr>
+              </a:p>
+              <a:p>
+                <a:pPr algn="ctr"/>
+                <a:r>
+                  <a:rPr lang="en-AU" sz="1400" b="1" dirty="0">
+                    <a:solidFill>
+                      <a:srgbClr val="F91727"/>
+                    </a:solidFill>
+                  </a:rPr>
+                  <a:t>High Ratio = Low Relative Demand</a:t>
+                </a:r>
+              </a:p>
+              <a:p>
+                <a:pPr algn="ctr"/>
+                <a:r>
+                  <a:rPr lang="en-AU" sz="1400" b="1" dirty="0">
+                    <a:solidFill>
+                      <a:srgbClr val="00A84C"/>
+                    </a:solidFill>
+                  </a:rPr>
+                  <a:t>Low Ratio = High Relative Demand</a:t>
+                </a:r>
+              </a:p>
+            </p:txBody>
+          </p:sp>
+        </mc:Choice>
+        <mc:Fallback xmlns="">
+          <p:sp>
+            <p:nvSpPr>
+              <p:cNvPr id="17" name="TextBox 16">
+                <a:extLst>
+                  <a:ext uri="{FF2B5EF4-FFF2-40B4-BE49-F238E27FC236}">
+                    <a16:creationId xmlns:a16="http://schemas.microsoft.com/office/drawing/2014/main" id="{BF651F2A-2DDD-4826-BD70-B8E4B4FE18B1}"/>
+                  </a:ext>
+                </a:extLst>
+              </p:cNvPr>
+              <p:cNvSpPr txBox="1">
+                <a:spLocks noRot="1" noChangeAspect="1" noMove="1" noResize="1" noEditPoints="1" noAdjustHandles="1" noChangeArrowheads="1" noChangeShapeType="1" noTextEdit="1"/>
+              </p:cNvSpPr>
+              <p:nvPr/>
+            </p:nvSpPr>
+            <p:spPr>
+              <a:xfrm>
+                <a:off x="906684" y="1429168"/>
+                <a:ext cx="3276538" cy="1092479"/>
+              </a:xfrm>
+              <a:prstGeom prst="rect">
+                <a:avLst/>
+              </a:prstGeom>
+              <a:blipFill>
+                <a:blip r:embed="rId3"/>
+                <a:stretch>
+                  <a:fillRect l="-2980" r="-2793" b="-8333"/>
+                </a:stretch>
+              </a:blipFill>
+            </p:spPr>
+            <p:txBody>
+              <a:bodyPr/>
+              <a:lstStyle/>
+              <a:p>
+                <a:r>
+                  <a:rPr lang="en-AU">
+                    <a:noFill/>
+                  </a:rPr>
+                  <a:t> </a:t>
+                </a:r>
+              </a:p>
+            </p:txBody>
+          </p:sp>
+        </mc:Fallback>
+      </mc:AlternateContent>
+      <p:cxnSp>
+        <p:nvCxnSpPr>
+          <p:cNvPr id="3" name="Connector: Elbow 2">
+            <a:extLst>
+              <a:ext uri="{FF2B5EF4-FFF2-40B4-BE49-F238E27FC236}">
+                <a16:creationId xmlns:a16="http://schemas.microsoft.com/office/drawing/2014/main" id="{883CE0B4-2FEF-4ED7-A2C9-3C7C88952F43}"/>
+              </a:ext>
+            </a:extLst>
+          </p:cNvPr>
+          <p:cNvCxnSpPr>
+            <a:cxnSpLocks/>
+          </p:cNvCxnSpPr>
+          <p:nvPr/>
+        </p:nvCxnSpPr>
+        <p:spPr>
+          <a:xfrm rot="5400000" flipH="1" flipV="1">
+            <a:off x="7577672" y="3648109"/>
+            <a:ext cx="3360218" cy="1088418"/>
+          </a:xfrm>
+          <a:prstGeom prst="bentConnector3">
+            <a:avLst>
+              <a:gd name="adj1" fmla="val 99936"/>
+            </a:avLst>
+          </a:prstGeom>
+          <a:ln w="38100">
+            <a:solidFill>
+              <a:srgbClr val="070F30"/>
+            </a:solidFill>
+            <a:prstDash val="lgDash"/>
+            <a:tailEnd type="triangle"/>
+          </a:ln>
+        </p:spPr>
+        <p:style>
+          <a:lnRef idx="1">
+            <a:schemeClr val="accent1"/>
+          </a:lnRef>
+          <a:fillRef idx="0">
+            <a:schemeClr val="accent1"/>
+          </a:fillRef>
+          <a:effectRef idx="0">
+            <a:schemeClr val="accent1"/>
+          </a:effectRef>
+          <a:fontRef idx="minor">
+            <a:schemeClr val="tx1"/>
+          </a:fontRef>
+        </p:style>
+      </p:cxnSp>
+      <p:sp>
+        <p:nvSpPr>
+          <p:cNvPr id="18" name="TextBox 17">
+            <a:extLst>
+              <a:ext uri="{FF2B5EF4-FFF2-40B4-BE49-F238E27FC236}">
+                <a16:creationId xmlns:a16="http://schemas.microsoft.com/office/drawing/2014/main" id="{38FD60F4-4EC8-4B94-AC07-CE6475870100}"/>
+              </a:ext>
+            </a:extLst>
+          </p:cNvPr>
+          <p:cNvSpPr txBox="1"/>
+          <p:nvPr/>
+        </p:nvSpPr>
+        <p:spPr>
+          <a:xfrm>
+            <a:off x="7505739" y="2055283"/>
+            <a:ext cx="3177667" cy="369332"/>
           </a:xfrm>
           <a:prstGeom prst="rect">
             <a:avLst/>
@@ -11699,7 +12424,7 @@
                   <a:srgbClr val="070F30"/>
                 </a:solidFill>
               </a:rPr>
-              <a:t>192k DCR in Tickets per day</a:t>
+              <a:t>Privacy Mixing Live</a:t>
             </a:r>
             <a:endParaRPr lang="en-AU" b="1" dirty="0">
               <a:solidFill>
@@ -11709,139 +12434,423 @@
           </a:p>
         </p:txBody>
       </p:sp>
-      <p:cxnSp>
-        <p:nvCxnSpPr>
-          <p:cNvPr id="9" name="Straight Arrow Connector 8">
-            <a:extLst>
-              <a:ext uri="{FF2B5EF4-FFF2-40B4-BE49-F238E27FC236}">
-                <a16:creationId xmlns:a16="http://schemas.microsoft.com/office/drawing/2014/main" id="{89691101-6C07-413A-8BEF-CF5F70C77FA8}"/>
-              </a:ext>
-            </a:extLst>
-          </p:cNvPr>
-          <p:cNvCxnSpPr>
-            <a:cxnSpLocks/>
-            <a:stCxn id="8" idx="3"/>
-          </p:cNvCxnSpPr>
-          <p:nvPr/>
-        </p:nvCxnSpPr>
-        <p:spPr>
-          <a:xfrm>
-            <a:off x="8716064" y="2173081"/>
-            <a:ext cx="1591059" cy="1976814"/>
-          </a:xfrm>
-          <a:prstGeom prst="straightConnector1">
-            <a:avLst/>
-          </a:prstGeom>
-          <a:ln w="19050">
-            <a:tailEnd type="triangle"/>
+      <p:sp>
+        <p:nvSpPr>
+          <p:cNvPr id="19" name="Rectangle 18">
+            <a:extLst>
+              <a:ext uri="{FF2B5EF4-FFF2-40B4-BE49-F238E27FC236}">
+                <a16:creationId xmlns:a16="http://schemas.microsoft.com/office/drawing/2014/main" id="{3ECCD76C-4F60-4BCD-BAE0-0FC2AD2B8EE0}"/>
+              </a:ext>
+            </a:extLst>
+          </p:cNvPr>
+          <p:cNvSpPr/>
+          <p:nvPr/>
+        </p:nvSpPr>
+        <p:spPr>
+          <a:xfrm>
+            <a:off x="6779327" y="2667786"/>
+            <a:ext cx="269544" cy="3204641"/>
+          </a:xfrm>
+          <a:prstGeom prst="rect">
+            <a:avLst/>
+          </a:prstGeom>
+          <a:solidFill>
+            <a:srgbClr val="00A84C">
+              <a:alpha val="10000"/>
+            </a:srgbClr>
+          </a:solidFill>
+          <a:ln w="22225">
+            <a:solidFill>
+              <a:srgbClr val="00A84C">
+                <a:alpha val="20000"/>
+              </a:srgbClr>
+            </a:solidFill>
+            <a:prstDash val="dash"/>
           </a:ln>
         </p:spPr>
         <p:style>
-          <a:lnRef idx="1">
-            <a:schemeClr val="accent1"/>
+          <a:lnRef idx="2">
+            <a:schemeClr val="accent1">
+              <a:shade val="50000"/>
+            </a:schemeClr>
           </a:lnRef>
-          <a:fillRef idx="0">
+          <a:fillRef idx="1">
             <a:schemeClr val="accent1"/>
           </a:fillRef>
           <a:effectRef idx="0">
             <a:schemeClr val="accent1"/>
           </a:effectRef>
           <a:fontRef idx="minor">
-            <a:schemeClr val="tx1"/>
+            <a:schemeClr val="lt1"/>
           </a:fontRef>
         </p:style>
-      </p:cxnSp>
-      <p:sp>
-        <p:nvSpPr>
-          <p:cNvPr id="11" name="TextBox 10">
-            <a:extLst>
-              <a:ext uri="{FF2B5EF4-FFF2-40B4-BE49-F238E27FC236}">
-                <a16:creationId xmlns:a16="http://schemas.microsoft.com/office/drawing/2014/main" id="{784B222E-D3B3-428D-BF61-18EC2899160B}"/>
-              </a:ext>
-            </a:extLst>
-          </p:cNvPr>
-          <p:cNvSpPr txBox="1"/>
-          <p:nvPr/>
-        </p:nvSpPr>
-        <p:spPr>
-          <a:xfrm>
-            <a:off x="5192751" y="2404596"/>
-            <a:ext cx="3193680" cy="369332"/>
+        <p:txBody>
+          <a:bodyPr rtlCol="0" anchor="ctr"/>
+          <a:lstStyle/>
+          <a:p>
+            <a:pPr algn="ctr"/>
+            <a:endParaRPr lang="en-AU"/>
+          </a:p>
+        </p:txBody>
+      </p:sp>
+      <p:sp>
+        <p:nvSpPr>
+          <p:cNvPr id="20" name="Rectangle 19">
+            <a:extLst>
+              <a:ext uri="{FF2B5EF4-FFF2-40B4-BE49-F238E27FC236}">
+                <a16:creationId xmlns:a16="http://schemas.microsoft.com/office/drawing/2014/main" id="{336A3934-7EA9-4758-BEAA-CF4E8A1CBABC}"/>
+              </a:ext>
+            </a:extLst>
+          </p:cNvPr>
+          <p:cNvSpPr/>
+          <p:nvPr/>
+        </p:nvSpPr>
+        <p:spPr>
+          <a:xfrm>
+            <a:off x="7209127" y="2674745"/>
+            <a:ext cx="269544" cy="3204641"/>
           </a:xfrm>
           <a:prstGeom prst="rect">
             <a:avLst/>
           </a:prstGeom>
-          <a:noFill/>
-        </p:spPr>
-        <p:txBody>
-          <a:bodyPr wrap="square" rtlCol="0">
-            <a:spAutoFit/>
-          </a:bodyPr>
-          <a:lstStyle/>
-          <a:p>
-            <a:pPr algn="ctr"/>
-            <a:r>
-              <a:rPr lang="en-US" b="1" dirty="0">
-                <a:solidFill>
-                  <a:srgbClr val="F91727"/>
-                </a:solidFill>
-              </a:rPr>
-              <a:t>110k DCR Mixed per day</a:t>
-            </a:r>
-            <a:endParaRPr lang="en-AU" b="1" dirty="0">
-              <a:solidFill>
-                <a:srgbClr val="F91727"/>
-              </a:solidFill>
-            </a:endParaRPr>
-          </a:p>
-        </p:txBody>
-      </p:sp>
-      <p:cxnSp>
-        <p:nvCxnSpPr>
-          <p:cNvPr id="13" name="Straight Arrow Connector 12">
-            <a:extLst>
-              <a:ext uri="{FF2B5EF4-FFF2-40B4-BE49-F238E27FC236}">
-                <a16:creationId xmlns:a16="http://schemas.microsoft.com/office/drawing/2014/main" id="{656FF8E8-F48F-4FD5-9810-7617B3C2A492}"/>
-              </a:ext>
-            </a:extLst>
-          </p:cNvPr>
-          <p:cNvCxnSpPr>
-            <a:cxnSpLocks/>
-            <a:stCxn id="11" idx="3"/>
-          </p:cNvCxnSpPr>
-          <p:nvPr/>
-        </p:nvCxnSpPr>
-        <p:spPr>
-          <a:xfrm>
-            <a:off x="8386431" y="2589262"/>
-            <a:ext cx="1884998" cy="2185428"/>
-          </a:xfrm>
-          <a:prstGeom prst="straightConnector1">
-            <a:avLst/>
-          </a:prstGeom>
-          <a:ln w="19050">
-            <a:tailEnd type="triangle"/>
+          <a:solidFill>
+            <a:srgbClr val="00A84C">
+              <a:alpha val="10000"/>
+            </a:srgbClr>
+          </a:solidFill>
+          <a:ln w="22225">
+            <a:solidFill>
+              <a:srgbClr val="00A84C">
+                <a:alpha val="20000"/>
+              </a:srgbClr>
+            </a:solidFill>
+            <a:prstDash val="dash"/>
           </a:ln>
         </p:spPr>
         <p:style>
-          <a:lnRef idx="1">
-            <a:schemeClr val="accent1"/>
+          <a:lnRef idx="2">
+            <a:schemeClr val="accent1">
+              <a:shade val="50000"/>
+            </a:schemeClr>
           </a:lnRef>
-          <a:fillRef idx="0">
+          <a:fillRef idx="1">
             <a:schemeClr val="accent1"/>
           </a:fillRef>
           <a:effectRef idx="0">
             <a:schemeClr val="accent1"/>
           </a:effectRef>
           <a:fontRef idx="minor">
-            <a:schemeClr val="tx1"/>
+            <a:schemeClr val="lt1"/>
           </a:fontRef>
         </p:style>
-      </p:cxnSp>
+        <p:txBody>
+          <a:bodyPr rtlCol="0" anchor="ctr"/>
+          <a:lstStyle/>
+          <a:p>
+            <a:pPr algn="ctr"/>
+            <a:endParaRPr lang="en-AU"/>
+          </a:p>
+        </p:txBody>
+      </p:sp>
+      <p:sp>
+        <p:nvSpPr>
+          <p:cNvPr id="16" name="Rectangle 15">
+            <a:extLst>
+              <a:ext uri="{FF2B5EF4-FFF2-40B4-BE49-F238E27FC236}">
+                <a16:creationId xmlns:a16="http://schemas.microsoft.com/office/drawing/2014/main" id="{D8C3B852-D3BB-402E-8A63-F81800A9736F}"/>
+              </a:ext>
+            </a:extLst>
+          </p:cNvPr>
+          <p:cNvSpPr/>
+          <p:nvPr/>
+        </p:nvSpPr>
+        <p:spPr>
+          <a:xfrm>
+            <a:off x="3181988" y="3181973"/>
+            <a:ext cx="381000" cy="1666092"/>
+          </a:xfrm>
+          <a:prstGeom prst="rect">
+            <a:avLst/>
+          </a:prstGeom>
+          <a:solidFill>
+            <a:srgbClr val="F91727">
+              <a:alpha val="10000"/>
+            </a:srgbClr>
+          </a:solidFill>
+          <a:ln w="22225">
+            <a:solidFill>
+              <a:srgbClr val="F91727">
+                <a:alpha val="20000"/>
+              </a:srgbClr>
+            </a:solidFill>
+            <a:prstDash val="dash"/>
+          </a:ln>
+        </p:spPr>
+        <p:style>
+          <a:lnRef idx="2">
+            <a:schemeClr val="accent1">
+              <a:shade val="50000"/>
+            </a:schemeClr>
+          </a:lnRef>
+          <a:fillRef idx="1">
+            <a:schemeClr val="accent1"/>
+          </a:fillRef>
+          <a:effectRef idx="0">
+            <a:schemeClr val="accent1"/>
+          </a:effectRef>
+          <a:fontRef idx="minor">
+            <a:schemeClr val="lt1"/>
+          </a:fontRef>
+        </p:style>
+        <p:txBody>
+          <a:bodyPr rtlCol="0" anchor="ctr"/>
+          <a:lstStyle/>
+          <a:p>
+            <a:pPr algn="ctr"/>
+            <a:endParaRPr lang="en-AU"/>
+          </a:p>
+        </p:txBody>
+      </p:sp>
+      <p:sp>
+        <p:nvSpPr>
+          <p:cNvPr id="21" name="Rectangle 20">
+            <a:extLst>
+              <a:ext uri="{FF2B5EF4-FFF2-40B4-BE49-F238E27FC236}">
+                <a16:creationId xmlns:a16="http://schemas.microsoft.com/office/drawing/2014/main" id="{C70B20B6-C60B-4742-89CE-17254D0AF630}"/>
+              </a:ext>
+            </a:extLst>
+          </p:cNvPr>
+          <p:cNvSpPr/>
+          <p:nvPr/>
+        </p:nvSpPr>
+        <p:spPr>
+          <a:xfrm>
+            <a:off x="4484268" y="2784468"/>
+            <a:ext cx="381000" cy="2085612"/>
+          </a:xfrm>
+          <a:prstGeom prst="rect">
+            <a:avLst/>
+          </a:prstGeom>
+          <a:solidFill>
+            <a:srgbClr val="F91727">
+              <a:alpha val="10000"/>
+            </a:srgbClr>
+          </a:solidFill>
+          <a:ln w="22225">
+            <a:solidFill>
+              <a:srgbClr val="F91727">
+                <a:alpha val="20000"/>
+              </a:srgbClr>
+            </a:solidFill>
+            <a:prstDash val="dash"/>
+          </a:ln>
+        </p:spPr>
+        <p:style>
+          <a:lnRef idx="2">
+            <a:schemeClr val="accent1">
+              <a:shade val="50000"/>
+            </a:schemeClr>
+          </a:lnRef>
+          <a:fillRef idx="1">
+            <a:schemeClr val="accent1"/>
+          </a:fillRef>
+          <a:effectRef idx="0">
+            <a:schemeClr val="accent1"/>
+          </a:effectRef>
+          <a:fontRef idx="minor">
+            <a:schemeClr val="lt1"/>
+          </a:fontRef>
+        </p:style>
+        <p:txBody>
+          <a:bodyPr rtlCol="0" anchor="ctr"/>
+          <a:lstStyle/>
+          <a:p>
+            <a:pPr algn="ctr"/>
+            <a:endParaRPr lang="en-AU"/>
+          </a:p>
+        </p:txBody>
+      </p:sp>
+      <p:sp>
+        <p:nvSpPr>
+          <p:cNvPr id="22" name="Rectangle 21">
+            <a:extLst>
+              <a:ext uri="{FF2B5EF4-FFF2-40B4-BE49-F238E27FC236}">
+                <a16:creationId xmlns:a16="http://schemas.microsoft.com/office/drawing/2014/main" id="{610F6EB3-0B31-4454-88AB-18485BCA8DC1}"/>
+              </a:ext>
+            </a:extLst>
+          </p:cNvPr>
+          <p:cNvSpPr/>
+          <p:nvPr/>
+        </p:nvSpPr>
+        <p:spPr>
+          <a:xfrm>
+            <a:off x="5490265" y="2272683"/>
+            <a:ext cx="381000" cy="2597397"/>
+          </a:xfrm>
+          <a:prstGeom prst="rect">
+            <a:avLst/>
+          </a:prstGeom>
+          <a:solidFill>
+            <a:srgbClr val="F91727">
+              <a:alpha val="10000"/>
+            </a:srgbClr>
+          </a:solidFill>
+          <a:ln w="22225">
+            <a:solidFill>
+              <a:srgbClr val="F91727">
+                <a:alpha val="20000"/>
+              </a:srgbClr>
+            </a:solidFill>
+            <a:prstDash val="dash"/>
+          </a:ln>
+        </p:spPr>
+        <p:style>
+          <a:lnRef idx="2">
+            <a:schemeClr val="accent1">
+              <a:shade val="50000"/>
+            </a:schemeClr>
+          </a:lnRef>
+          <a:fillRef idx="1">
+            <a:schemeClr val="accent1"/>
+          </a:fillRef>
+          <a:effectRef idx="0">
+            <a:schemeClr val="accent1"/>
+          </a:effectRef>
+          <a:fontRef idx="minor">
+            <a:schemeClr val="lt1"/>
+          </a:fontRef>
+        </p:style>
+        <p:txBody>
+          <a:bodyPr rtlCol="0" anchor="ctr"/>
+          <a:lstStyle/>
+          <a:p>
+            <a:pPr algn="ctr"/>
+            <a:endParaRPr lang="en-AU"/>
+          </a:p>
+        </p:txBody>
+      </p:sp>
+      <p:sp>
+        <p:nvSpPr>
+          <p:cNvPr id="23" name="Rectangle 22">
+            <a:extLst>
+              <a:ext uri="{FF2B5EF4-FFF2-40B4-BE49-F238E27FC236}">
+                <a16:creationId xmlns:a16="http://schemas.microsoft.com/office/drawing/2014/main" id="{A613ED3A-A6DF-4470-B8E9-B027D9DC1000}"/>
+              </a:ext>
+            </a:extLst>
+          </p:cNvPr>
+          <p:cNvSpPr/>
+          <p:nvPr/>
+        </p:nvSpPr>
+        <p:spPr>
+          <a:xfrm>
+            <a:off x="7799518" y="2654423"/>
+            <a:ext cx="381000" cy="2193642"/>
+          </a:xfrm>
+          <a:prstGeom prst="rect">
+            <a:avLst/>
+          </a:prstGeom>
+          <a:solidFill>
+            <a:srgbClr val="F91727">
+              <a:alpha val="10000"/>
+            </a:srgbClr>
+          </a:solidFill>
+          <a:ln w="22225">
+            <a:solidFill>
+              <a:srgbClr val="F91727">
+                <a:alpha val="20000"/>
+              </a:srgbClr>
+            </a:solidFill>
+            <a:prstDash val="dash"/>
+          </a:ln>
+        </p:spPr>
+        <p:style>
+          <a:lnRef idx="2">
+            <a:schemeClr val="accent1">
+              <a:shade val="50000"/>
+            </a:schemeClr>
+          </a:lnRef>
+          <a:fillRef idx="1">
+            <a:schemeClr val="accent1"/>
+          </a:fillRef>
+          <a:effectRef idx="0">
+            <a:schemeClr val="accent1"/>
+          </a:effectRef>
+          <a:fontRef idx="minor">
+            <a:schemeClr val="lt1"/>
+          </a:fontRef>
+        </p:style>
+        <p:txBody>
+          <a:bodyPr rtlCol="0" anchor="ctr"/>
+          <a:lstStyle/>
+          <a:p>
+            <a:pPr algn="ctr"/>
+            <a:endParaRPr lang="en-AU"/>
+          </a:p>
+        </p:txBody>
+      </p:sp>
+      <p:sp>
+        <p:nvSpPr>
+          <p:cNvPr id="24" name="Rectangle 23">
+            <a:extLst>
+              <a:ext uri="{FF2B5EF4-FFF2-40B4-BE49-F238E27FC236}">
+                <a16:creationId xmlns:a16="http://schemas.microsoft.com/office/drawing/2014/main" id="{00498053-69EF-4A1D-9F1C-0DE87280BED1}"/>
+              </a:ext>
+            </a:extLst>
+          </p:cNvPr>
+          <p:cNvSpPr/>
+          <p:nvPr/>
+        </p:nvSpPr>
+        <p:spPr>
+          <a:xfrm>
+            <a:off x="8340774" y="2654423"/>
+            <a:ext cx="381000" cy="2193642"/>
+          </a:xfrm>
+          <a:prstGeom prst="rect">
+            <a:avLst/>
+          </a:prstGeom>
+          <a:solidFill>
+            <a:srgbClr val="F91727">
+              <a:alpha val="10000"/>
+            </a:srgbClr>
+          </a:solidFill>
+          <a:ln w="22225">
+            <a:solidFill>
+              <a:srgbClr val="F91727">
+                <a:alpha val="20000"/>
+              </a:srgbClr>
+            </a:solidFill>
+            <a:prstDash val="dash"/>
+          </a:ln>
+        </p:spPr>
+        <p:style>
+          <a:lnRef idx="2">
+            <a:schemeClr val="accent1">
+              <a:shade val="50000"/>
+            </a:schemeClr>
+          </a:lnRef>
+          <a:fillRef idx="1">
+            <a:schemeClr val="accent1"/>
+          </a:fillRef>
+          <a:effectRef idx="0">
+            <a:schemeClr val="accent1"/>
+          </a:effectRef>
+          <a:fontRef idx="minor">
+            <a:schemeClr val="lt1"/>
+          </a:fontRef>
+        </p:style>
+        <p:txBody>
+          <a:bodyPr rtlCol="0" anchor="ctr"/>
+          <a:lstStyle/>
+          <a:p>
+            <a:pPr algn="ctr"/>
+            <a:endParaRPr lang="en-AU"/>
+          </a:p>
+        </p:txBody>
+      </p:sp>
     </p:spTree>
     <p:extLst>
       <p:ext uri="{BB962C8B-B14F-4D97-AF65-F5344CB8AC3E}">
-        <p14:creationId xmlns:p14="http://schemas.microsoft.com/office/powerpoint/2010/main" val="1585972954"/>
+        <p14:creationId xmlns:p14="http://schemas.microsoft.com/office/powerpoint/2010/main" val="749423845"/>
       </p:ext>
     </p:extLst>
   </p:cSld>
@@ -11870,62 +12879,339 @@
       </p:grpSpPr>
       <p:sp>
         <p:nvSpPr>
-          <p:cNvPr id="2" name="Title 1">
-            <a:extLst>
-              <a:ext uri="{FF2B5EF4-FFF2-40B4-BE49-F238E27FC236}">
-                <a16:creationId xmlns:a16="http://schemas.microsoft.com/office/drawing/2014/main" id="{C711E6D6-E67B-4C74-A2F0-B8B7F9E5EF88}"/>
-              </a:ext>
-            </a:extLst>
-          </p:cNvPr>
-          <p:cNvSpPr>
-            <a:spLocks noGrp="1"/>
-          </p:cNvSpPr>
-          <p:nvPr>
-            <p:ph type="ctrTitle"/>
-          </p:nvPr>
-        </p:nvSpPr>
-        <p:spPr/>
+          <p:cNvPr id="5" name="Rectangle 4">
+            <a:extLst>
+              <a:ext uri="{FF2B5EF4-FFF2-40B4-BE49-F238E27FC236}">
+                <a16:creationId xmlns:a16="http://schemas.microsoft.com/office/drawing/2014/main" id="{6563922A-6CBD-465E-8926-269E1F89E76D}"/>
+              </a:ext>
+            </a:extLst>
+          </p:cNvPr>
+          <p:cNvSpPr/>
+          <p:nvPr/>
+        </p:nvSpPr>
+        <p:spPr>
+          <a:xfrm>
+            <a:off x="0" y="0"/>
+            <a:ext cx="11285316" cy="6858000"/>
+          </a:xfrm>
+          <a:prstGeom prst="rect">
+            <a:avLst/>
+          </a:prstGeom>
+          <a:solidFill>
+            <a:srgbClr val="F5F5F5"/>
+          </a:solidFill>
+          <a:ln>
+            <a:solidFill>
+              <a:srgbClr val="F5F5F5"/>
+            </a:solidFill>
+          </a:ln>
+        </p:spPr>
+        <p:style>
+          <a:lnRef idx="2">
+            <a:schemeClr val="accent1">
+              <a:shade val="50000"/>
+            </a:schemeClr>
+          </a:lnRef>
+          <a:fillRef idx="1">
+            <a:schemeClr val="accent1"/>
+          </a:fillRef>
+          <a:effectRef idx="0">
+            <a:schemeClr val="accent1"/>
+          </a:effectRef>
+          <a:fontRef idx="minor">
+            <a:schemeClr val="lt1"/>
+          </a:fontRef>
+        </p:style>
         <p:txBody>
-          <a:bodyPr/>
+          <a:bodyPr rtlCol="0" anchor="ctr"/>
           <a:lstStyle/>
           <a:p>
+            <a:pPr algn="ctr"/>
+            <a:endParaRPr lang="en-AU"/>
+          </a:p>
+        </p:txBody>
+      </p:sp>
+      <p:pic>
+        <p:nvPicPr>
+          <p:cNvPr id="4" name="Picture 3">
+            <a:extLst>
+              <a:ext uri="{FF2B5EF4-FFF2-40B4-BE49-F238E27FC236}">
+                <a16:creationId xmlns:a16="http://schemas.microsoft.com/office/drawing/2014/main" id="{6B17FC3B-A495-4568-BF75-34D420459BF4}"/>
+              </a:ext>
+            </a:extLst>
+          </p:cNvPr>
+          <p:cNvPicPr>
+            <a:picLocks noChangeAspect="1"/>
+          </p:cNvPicPr>
+          <p:nvPr/>
+        </p:nvPicPr>
+        <p:blipFill rotWithShape="1">
+          <a:blip r:embed="rId2"/>
+          <a:srcRect t="10363"/>
+          <a:stretch/>
+        </p:blipFill>
+        <p:spPr>
+          <a:xfrm>
+            <a:off x="274093" y="1328261"/>
+            <a:ext cx="10737130" cy="4824613"/>
+          </a:xfrm>
+          <a:prstGeom prst="rect">
+            <a:avLst/>
+          </a:prstGeom>
+        </p:spPr>
+      </p:pic>
+      <p:pic>
+        <p:nvPicPr>
+          <p:cNvPr id="7" name="Picture 6">
+            <a:extLst>
+              <a:ext uri="{FF2B5EF4-FFF2-40B4-BE49-F238E27FC236}">
+                <a16:creationId xmlns:a16="http://schemas.microsoft.com/office/drawing/2014/main" id="{C047569D-2EA3-4FB1-9175-03A41D62970D}"/>
+              </a:ext>
+            </a:extLst>
+          </p:cNvPr>
+          <p:cNvPicPr>
+            <a:picLocks noChangeAspect="1"/>
+          </p:cNvPicPr>
+          <p:nvPr/>
+        </p:nvPicPr>
+        <p:blipFill>
+          <a:blip r:embed="rId3"/>
+          <a:stretch>
+            <a:fillRect/>
+          </a:stretch>
+        </p:blipFill>
+        <p:spPr>
+          <a:xfrm>
+            <a:off x="1011503" y="832362"/>
+            <a:ext cx="2810368" cy="1475443"/>
+          </a:xfrm>
+          <a:prstGeom prst="rect">
+            <a:avLst/>
+          </a:prstGeom>
+        </p:spPr>
+      </p:pic>
+      <p:pic>
+        <p:nvPicPr>
+          <p:cNvPr id="6" name="Picture 5">
+            <a:extLst>
+              <a:ext uri="{FF2B5EF4-FFF2-40B4-BE49-F238E27FC236}">
+                <a16:creationId xmlns:a16="http://schemas.microsoft.com/office/drawing/2014/main" id="{19BD58EC-86B5-40B9-B99B-84BA3A97C41C}"/>
+              </a:ext>
+            </a:extLst>
+          </p:cNvPr>
+          <p:cNvPicPr>
+            <a:picLocks noChangeAspect="1"/>
+          </p:cNvPicPr>
+          <p:nvPr/>
+        </p:nvPicPr>
+        <p:blipFill rotWithShape="1">
+          <a:blip r:embed="rId2"/>
+          <a:srcRect l="35193" r="30654" b="92277"/>
+          <a:stretch/>
+        </p:blipFill>
+        <p:spPr>
+          <a:xfrm>
+            <a:off x="2756768" y="242826"/>
+            <a:ext cx="5903755" cy="669254"/>
+          </a:xfrm>
+          <a:prstGeom prst="rect">
+            <a:avLst/>
+          </a:prstGeom>
+        </p:spPr>
+      </p:pic>
+      <p:cxnSp>
+        <p:nvCxnSpPr>
+          <p:cNvPr id="9" name="Straight Connector 8">
+            <a:extLst>
+              <a:ext uri="{FF2B5EF4-FFF2-40B4-BE49-F238E27FC236}">
+                <a16:creationId xmlns:a16="http://schemas.microsoft.com/office/drawing/2014/main" id="{1144F2BD-FD1D-46A3-9013-F45DFEAB3331}"/>
+              </a:ext>
+            </a:extLst>
+          </p:cNvPr>
+          <p:cNvCxnSpPr/>
+          <p:nvPr/>
+        </p:nvCxnSpPr>
+        <p:spPr>
+          <a:xfrm flipV="1">
+            <a:off x="8823489" y="2865748"/>
+            <a:ext cx="0" cy="2771481"/>
+          </a:xfrm>
+          <a:prstGeom prst="line">
+            <a:avLst/>
+          </a:prstGeom>
+          <a:ln w="38100">
+            <a:solidFill>
+              <a:srgbClr val="070F30"/>
+            </a:solidFill>
+            <a:prstDash val="dash"/>
+          </a:ln>
+        </p:spPr>
+        <p:style>
+          <a:lnRef idx="1">
+            <a:schemeClr val="accent1"/>
+          </a:lnRef>
+          <a:fillRef idx="0">
+            <a:schemeClr val="accent1"/>
+          </a:fillRef>
+          <a:effectRef idx="0">
+            <a:schemeClr val="accent1"/>
+          </a:effectRef>
+          <a:fontRef idx="minor">
+            <a:schemeClr val="tx1"/>
+          </a:fontRef>
+        </p:style>
+      </p:cxnSp>
+      <p:sp>
+        <p:nvSpPr>
+          <p:cNvPr id="10" name="TextBox 9">
+            <a:extLst>
+              <a:ext uri="{FF2B5EF4-FFF2-40B4-BE49-F238E27FC236}">
+                <a16:creationId xmlns:a16="http://schemas.microsoft.com/office/drawing/2014/main" id="{34EA1446-8141-4A77-B5A2-BA87B8689E68}"/>
+              </a:ext>
+            </a:extLst>
+          </p:cNvPr>
+          <p:cNvSpPr txBox="1"/>
+          <p:nvPr/>
+        </p:nvSpPr>
+        <p:spPr>
+          <a:xfrm>
+            <a:off x="6065010" y="1987902"/>
+            <a:ext cx="3177667" cy="923330"/>
+          </a:xfrm>
+          <a:prstGeom prst="rect">
+            <a:avLst/>
+          </a:prstGeom>
+          <a:noFill/>
+        </p:spPr>
+        <p:txBody>
+          <a:bodyPr wrap="square" rtlCol="0">
+            <a:spAutoFit/>
+          </a:bodyPr>
+          <a:lstStyle/>
+          <a:p>
+            <a:pPr algn="ctr"/>
             <a:r>
-              <a:rPr lang="en-US" dirty="0"/>
-              <a:t>Treasury Performance</a:t>
+              <a:rPr lang="en-US" b="1" dirty="0">
+                <a:solidFill>
+                  <a:srgbClr val="070F30"/>
+                </a:solidFill>
+              </a:rPr>
+              <a:t>Demand for Privacy Mixing Increases </a:t>
             </a:r>
-            <a:endParaRPr lang="en-AU" dirty="0"/>
+          </a:p>
+          <a:p>
+            <a:pPr algn="ctr"/>
+            <a:r>
+              <a:rPr lang="en-US" b="1" dirty="0">
+                <a:solidFill>
+                  <a:srgbClr val="070F30"/>
+                </a:solidFill>
+              </a:rPr>
+              <a:t>Tx Throughput</a:t>
+            </a:r>
+            <a:endParaRPr lang="en-AU" b="1" dirty="0">
+              <a:solidFill>
+                <a:srgbClr val="070F30"/>
+              </a:solidFill>
+            </a:endParaRPr>
           </a:p>
         </p:txBody>
       </p:sp>
-      <p:sp>
-        <p:nvSpPr>
-          <p:cNvPr id="3" name="Subtitle 2">
-            <a:extLst>
-              <a:ext uri="{FF2B5EF4-FFF2-40B4-BE49-F238E27FC236}">
-                <a16:creationId xmlns:a16="http://schemas.microsoft.com/office/drawing/2014/main" id="{936F6549-BB15-4380-8980-51AE91A4E982}"/>
-              </a:ext>
-            </a:extLst>
-          </p:cNvPr>
-          <p:cNvSpPr>
-            <a:spLocks noGrp="1"/>
-          </p:cNvSpPr>
-          <p:nvPr>
-            <p:ph type="subTitle" idx="1"/>
-          </p:nvPr>
-        </p:nvSpPr>
-        <p:spPr/>
-        <p:txBody>
-          <a:bodyPr/>
-          <a:lstStyle/>
-          <a:p>
-            <a:endParaRPr lang="en-AU"/>
-          </a:p>
-        </p:txBody>
-      </p:sp>
+      <p:cxnSp>
+        <p:nvCxnSpPr>
+          <p:cNvPr id="12" name="Straight Arrow Connector 11">
+            <a:extLst>
+              <a:ext uri="{FF2B5EF4-FFF2-40B4-BE49-F238E27FC236}">
+                <a16:creationId xmlns:a16="http://schemas.microsoft.com/office/drawing/2014/main" id="{37A16847-73E4-4388-8779-43C62DA05A70}"/>
+              </a:ext>
+            </a:extLst>
+          </p:cNvPr>
+          <p:cNvCxnSpPr>
+            <a:cxnSpLocks/>
+          </p:cNvCxnSpPr>
+          <p:nvPr/>
+        </p:nvCxnSpPr>
+        <p:spPr>
+          <a:xfrm flipV="1">
+            <a:off x="8823489" y="1536569"/>
+            <a:ext cx="1517715" cy="1253765"/>
+          </a:xfrm>
+          <a:prstGeom prst="straightConnector1">
+            <a:avLst/>
+          </a:prstGeom>
+          <a:ln w="28575">
+            <a:solidFill>
+              <a:srgbClr val="070F30"/>
+            </a:solidFill>
+            <a:tailEnd type="triangle"/>
+          </a:ln>
+        </p:spPr>
+        <p:style>
+          <a:lnRef idx="1">
+            <a:schemeClr val="accent1"/>
+          </a:lnRef>
+          <a:fillRef idx="0">
+            <a:schemeClr val="accent1"/>
+          </a:fillRef>
+          <a:effectRef idx="0">
+            <a:schemeClr val="accent1"/>
+          </a:effectRef>
+          <a:fontRef idx="minor">
+            <a:schemeClr val="tx1"/>
+          </a:fontRef>
+        </p:style>
+      </p:cxnSp>
+      <p:cxnSp>
+        <p:nvCxnSpPr>
+          <p:cNvPr id="14" name="Straight Arrow Connector 13">
+            <a:extLst>
+              <a:ext uri="{FF2B5EF4-FFF2-40B4-BE49-F238E27FC236}">
+                <a16:creationId xmlns:a16="http://schemas.microsoft.com/office/drawing/2014/main" id="{33EC51EF-3B57-4DE8-A0EC-4C96D8EA7953}"/>
+              </a:ext>
+            </a:extLst>
+          </p:cNvPr>
+          <p:cNvCxnSpPr>
+            <a:cxnSpLocks/>
+          </p:cNvCxnSpPr>
+          <p:nvPr/>
+        </p:nvCxnSpPr>
+        <p:spPr>
+          <a:xfrm flipV="1">
+            <a:off x="4279769" y="2865748"/>
+            <a:ext cx="4458878" cy="1715679"/>
+          </a:xfrm>
+          <a:prstGeom prst="straightConnector1">
+            <a:avLst/>
+          </a:prstGeom>
+          <a:ln w="28575">
+            <a:solidFill>
+              <a:srgbClr val="070F30">
+                <a:alpha val="40000"/>
+              </a:srgbClr>
+            </a:solidFill>
+            <a:prstDash val="dash"/>
+            <a:tailEnd type="triangle"/>
+          </a:ln>
+        </p:spPr>
+        <p:style>
+          <a:lnRef idx="1">
+            <a:schemeClr val="accent1"/>
+          </a:lnRef>
+          <a:fillRef idx="0">
+            <a:schemeClr val="accent1"/>
+          </a:fillRef>
+          <a:effectRef idx="0">
+            <a:schemeClr val="accent1"/>
+          </a:effectRef>
+          <a:fontRef idx="minor">
+            <a:schemeClr val="tx1"/>
+          </a:fontRef>
+        </p:style>
+      </p:cxnSp>
     </p:spTree>
     <p:extLst>
       <p:ext uri="{BB962C8B-B14F-4D97-AF65-F5344CB8AC3E}">
-        <p14:creationId xmlns:p14="http://schemas.microsoft.com/office/powerpoint/2010/main" val="670085239"/>
+        <p14:creationId xmlns:p14="http://schemas.microsoft.com/office/powerpoint/2010/main" val="3694134550"/>
       </p:ext>
     </p:extLst>
   </p:cSld>
@@ -11957,7 +13243,7 @@
           <p:cNvPr id="5" name="Rectangle 4">
             <a:extLst>
               <a:ext uri="{FF2B5EF4-FFF2-40B4-BE49-F238E27FC236}">
-                <a16:creationId xmlns:a16="http://schemas.microsoft.com/office/drawing/2014/main" id="{B1A59732-93A8-48A0-94E1-CDFE53FD961F}"/>
+                <a16:creationId xmlns:a16="http://schemas.microsoft.com/office/drawing/2014/main" id="{6563922A-6CBD-465E-8926-269E1F89E76D}"/>
               </a:ext>
             </a:extLst>
           </p:cNvPr>
@@ -12008,10 +13294,10 @@
       </p:sp>
       <p:pic>
         <p:nvPicPr>
-          <p:cNvPr id="13" name="Picture 12">
-            <a:extLst>
-              <a:ext uri="{FF2B5EF4-FFF2-40B4-BE49-F238E27FC236}">
-                <a16:creationId xmlns:a16="http://schemas.microsoft.com/office/drawing/2014/main" id="{D33779B1-40A4-4F5C-A385-4ED5AB9FC9E1}"/>
+          <p:cNvPr id="4" name="Picture 3">
+            <a:extLst>
+              <a:ext uri="{FF2B5EF4-FFF2-40B4-BE49-F238E27FC236}">
+                <a16:creationId xmlns:a16="http://schemas.microsoft.com/office/drawing/2014/main" id="{6B17FC3B-A495-4568-BF75-34D420459BF4}"/>
               </a:ext>
             </a:extLst>
           </p:cNvPr>
@@ -12020,16 +13306,15 @@
           </p:cNvPicPr>
           <p:nvPr/>
         </p:nvPicPr>
-        <p:blipFill>
+        <p:blipFill rotWithShape="1">
           <a:blip r:embed="rId2"/>
-          <a:stretch>
-            <a:fillRect/>
-          </a:stretch>
+          <a:srcRect t="10363"/>
+          <a:stretch/>
         </p:blipFill>
         <p:spPr>
           <a:xfrm>
-            <a:off x="135732" y="1147884"/>
-            <a:ext cx="11055470" cy="5229230"/>
+            <a:off x="274093" y="1328261"/>
+            <a:ext cx="10737130" cy="4824613"/>
           </a:xfrm>
           <a:prstGeom prst="rect">
             <a:avLst/>
@@ -12038,10 +13323,10 @@
       </p:pic>
       <p:pic>
         <p:nvPicPr>
-          <p:cNvPr id="6" name="Picture 5">
-            <a:extLst>
-              <a:ext uri="{FF2B5EF4-FFF2-40B4-BE49-F238E27FC236}">
-                <a16:creationId xmlns:a16="http://schemas.microsoft.com/office/drawing/2014/main" id="{643518C2-CDE9-4203-B8D5-FD9FBAFF9A23}"/>
+          <p:cNvPr id="7" name="Picture 6">
+            <a:extLst>
+              <a:ext uri="{FF2B5EF4-FFF2-40B4-BE49-F238E27FC236}">
+                <a16:creationId xmlns:a16="http://schemas.microsoft.com/office/drawing/2014/main" id="{C047569D-2EA3-4FB1-9175-03A41D62970D}"/>
               </a:ext>
             </a:extLst>
           </p:cNvPr>
@@ -12058,20 +13343,49 @@
         </p:blipFill>
         <p:spPr>
           <a:xfrm>
-            <a:off x="1090856" y="1132295"/>
-            <a:ext cx="3286125" cy="1304925"/>
+            <a:off x="1011503" y="832362"/>
+            <a:ext cx="2810368" cy="1475443"/>
           </a:xfrm>
           <a:prstGeom prst="rect">
             <a:avLst/>
           </a:prstGeom>
         </p:spPr>
       </p:pic>
-      <p:sp>
-        <p:nvSpPr>
-          <p:cNvPr id="7" name="TextBox 6">
-            <a:extLst>
-              <a:ext uri="{FF2B5EF4-FFF2-40B4-BE49-F238E27FC236}">
-                <a16:creationId xmlns:a16="http://schemas.microsoft.com/office/drawing/2014/main" id="{EC52148A-6BD7-4A18-B1A0-53C3F83330E4}"/>
+      <p:pic>
+        <p:nvPicPr>
+          <p:cNvPr id="6" name="Picture 5">
+            <a:extLst>
+              <a:ext uri="{FF2B5EF4-FFF2-40B4-BE49-F238E27FC236}">
+                <a16:creationId xmlns:a16="http://schemas.microsoft.com/office/drawing/2014/main" id="{19BD58EC-86B5-40B9-B99B-84BA3A97C41C}"/>
+              </a:ext>
+            </a:extLst>
+          </p:cNvPr>
+          <p:cNvPicPr>
+            <a:picLocks noChangeAspect="1"/>
+          </p:cNvPicPr>
+          <p:nvPr/>
+        </p:nvPicPr>
+        <p:blipFill rotWithShape="1">
+          <a:blip r:embed="rId2"/>
+          <a:srcRect l="35193" r="30654" b="92277"/>
+          <a:stretch/>
+        </p:blipFill>
+        <p:spPr>
+          <a:xfrm>
+            <a:off x="2756768" y="242826"/>
+            <a:ext cx="5903755" cy="669254"/>
+          </a:xfrm>
+          <a:prstGeom prst="rect">
+            <a:avLst/>
+          </a:prstGeom>
+        </p:spPr>
+      </p:pic>
+      <p:sp>
+        <p:nvSpPr>
+          <p:cNvPr id="12" name="TextBox 11">
+            <a:extLst>
+              <a:ext uri="{FF2B5EF4-FFF2-40B4-BE49-F238E27FC236}">
+                <a16:creationId xmlns:a16="http://schemas.microsoft.com/office/drawing/2014/main" id="{475CAEA0-3130-4A2D-8646-B4F27D677983}"/>
               </a:ext>
             </a:extLst>
           </p:cNvPr>
@@ -12080,8 +13394,8 @@
         </p:nvSpPr>
         <p:spPr>
           <a:xfrm>
-            <a:off x="7815021" y="875641"/>
-            <a:ext cx="2516698" cy="369332"/>
+            <a:off x="4956092" y="2782669"/>
+            <a:ext cx="2557071" cy="646331"/>
           </a:xfrm>
           <a:prstGeom prst="rect">
             <a:avLst/>
@@ -12098,20 +13412,70 @@
             <a:r>
               <a:rPr lang="en-US" b="1" dirty="0">
                 <a:solidFill>
-                  <a:srgbClr val="D1275D"/>
+                  <a:srgbClr val="F91727"/>
                 </a:solidFill>
               </a:rPr>
-              <a:t>Inflow 982.5k DCR</a:t>
+              <a:t>23% of Supply Mixed and Unspent</a:t>
             </a:r>
+            <a:endParaRPr lang="en-AU" b="1" dirty="0">
+              <a:solidFill>
+                <a:srgbClr val="F91727"/>
+              </a:solidFill>
+            </a:endParaRPr>
           </a:p>
         </p:txBody>
       </p:sp>
-      <p:sp>
-        <p:nvSpPr>
-          <p:cNvPr id="8" name="TextBox 7">
-            <a:extLst>
-              <a:ext uri="{FF2B5EF4-FFF2-40B4-BE49-F238E27FC236}">
-                <a16:creationId xmlns:a16="http://schemas.microsoft.com/office/drawing/2014/main" id="{0D83EF7F-7508-4BB9-9EA9-3D94B379C427}"/>
+      <p:cxnSp>
+        <p:nvCxnSpPr>
+          <p:cNvPr id="3" name="Straight Arrow Connector 2">
+            <a:extLst>
+              <a:ext uri="{FF2B5EF4-FFF2-40B4-BE49-F238E27FC236}">
+                <a16:creationId xmlns:a16="http://schemas.microsoft.com/office/drawing/2014/main" id="{7A437F6D-F254-4B77-90DE-2AC30E7E4B6E}"/>
+              </a:ext>
+            </a:extLst>
+          </p:cNvPr>
+          <p:cNvCxnSpPr>
+            <a:cxnSpLocks/>
+            <a:stCxn id="12" idx="3"/>
+          </p:cNvCxnSpPr>
+          <p:nvPr/>
+        </p:nvCxnSpPr>
+        <p:spPr>
+          <a:xfrm>
+            <a:off x="7513163" y="3105835"/>
+            <a:ext cx="2730134" cy="739346"/>
+          </a:xfrm>
+          <a:prstGeom prst="straightConnector1">
+            <a:avLst/>
+          </a:prstGeom>
+          <a:ln w="19050">
+            <a:solidFill>
+              <a:srgbClr val="070F30"/>
+            </a:solidFill>
+            <a:tailEnd type="triangle"/>
+          </a:ln>
+        </p:spPr>
+        <p:style>
+          <a:lnRef idx="1">
+            <a:schemeClr val="accent1"/>
+          </a:lnRef>
+          <a:fillRef idx="0">
+            <a:schemeClr val="accent1"/>
+          </a:fillRef>
+          <a:effectRef idx="0">
+            <a:schemeClr val="accent1"/>
+          </a:effectRef>
+          <a:fontRef idx="minor">
+            <a:schemeClr val="tx1"/>
+          </a:fontRef>
+        </p:style>
+      </p:cxnSp>
+      <p:sp>
+        <p:nvSpPr>
+          <p:cNvPr id="14" name="TextBox 13">
+            <a:extLst>
+              <a:ext uri="{FF2B5EF4-FFF2-40B4-BE49-F238E27FC236}">
+                <a16:creationId xmlns:a16="http://schemas.microsoft.com/office/drawing/2014/main" id="{3B7F65A5-151C-4CBF-A5F3-BA543FD5B84C}"/>
               </a:ext>
             </a:extLst>
           </p:cNvPr>
@@ -12120,8 +13484,8 @@
         </p:nvSpPr>
         <p:spPr>
           <a:xfrm>
-            <a:off x="7692176" y="2212902"/>
-            <a:ext cx="2639543" cy="646331"/>
+            <a:off x="4962661" y="2136338"/>
+            <a:ext cx="2557071" cy="646331"/>
           </a:xfrm>
           <a:prstGeom prst="rect">
             <a:avLst/>
@@ -12138,131 +13502,68 @@
             <a:r>
               <a:rPr lang="en-US" b="1" dirty="0">
                 <a:solidFill>
-                  <a:srgbClr val="C14DB1"/>
+                  <a:srgbClr val="070F30"/>
                 </a:solidFill>
               </a:rPr>
-              <a:t>Balance 636.3k DCR</a:t>
-            </a:r>
-          </a:p>
-          <a:p>
-            <a:pPr algn="ctr"/>
-            <a:r>
-              <a:rPr lang="en-US" b="1" dirty="0">
-                <a:solidFill>
-                  <a:srgbClr val="C14DB1"/>
-                </a:solidFill>
-              </a:rPr>
-              <a:t>$8.908M @ $14/DCR</a:t>
+              <a:t>50% of Supply Staked in Tickets</a:t>
             </a:r>
             <a:endParaRPr lang="en-AU" b="1" dirty="0">
               <a:solidFill>
-                <a:srgbClr val="C14DB1"/>
+                <a:srgbClr val="070F30"/>
               </a:solidFill>
             </a:endParaRPr>
           </a:p>
         </p:txBody>
       </p:sp>
-      <p:sp>
-        <p:nvSpPr>
-          <p:cNvPr id="9" name="TextBox 8">
-            <a:extLst>
-              <a:ext uri="{FF2B5EF4-FFF2-40B4-BE49-F238E27FC236}">
-                <a16:creationId xmlns:a16="http://schemas.microsoft.com/office/drawing/2014/main" id="{A3EFD7FB-9463-43EB-9055-E892E803D1F9}"/>
-              </a:ext>
-            </a:extLst>
-          </p:cNvPr>
-          <p:cNvSpPr txBox="1"/>
-          <p:nvPr/>
-        </p:nvSpPr>
-        <p:spPr>
-          <a:xfrm>
-            <a:off x="7815021" y="4837036"/>
-            <a:ext cx="2639543" cy="830997"/>
-          </a:xfrm>
-          <a:prstGeom prst="rect">
-            <a:avLst/>
-          </a:prstGeom>
-          <a:noFill/>
-        </p:spPr>
-        <p:txBody>
-          <a:bodyPr wrap="square" rtlCol="0">
-            <a:spAutoFit/>
-          </a:bodyPr>
-          <a:lstStyle/>
-          <a:p>
-            <a:pPr algn="ctr"/>
-            <a:r>
-              <a:rPr lang="en-US" b="1" dirty="0">
-                <a:solidFill>
-                  <a:srgbClr val="23DBCE"/>
-                </a:solidFill>
-              </a:rPr>
-              <a:t>Spent 346.5k DCR</a:t>
-            </a:r>
-          </a:p>
-          <a:p>
-            <a:pPr algn="ctr"/>
-            <a:r>
-              <a:rPr lang="en-AU" b="1" dirty="0">
-                <a:solidFill>
-                  <a:srgbClr val="23DBCE"/>
-                </a:solidFill>
-              </a:rPr>
-              <a:t>$7.626M</a:t>
-            </a:r>
-          </a:p>
-          <a:p>
-            <a:pPr algn="ctr"/>
-            <a:r>
-              <a:rPr lang="en-AU" sz="1200" b="1" i="1" dirty="0">
-                <a:solidFill>
-                  <a:srgbClr val="23DBCE"/>
-                </a:solidFill>
-              </a:rPr>
-              <a:t>Priced on Spend Date</a:t>
-            </a:r>
-            <a:endParaRPr lang="en-AU" b="1" i="1" dirty="0">
-              <a:solidFill>
-                <a:srgbClr val="23DBCE"/>
-              </a:solidFill>
-            </a:endParaRPr>
-          </a:p>
-        </p:txBody>
-      </p:sp>
-      <p:pic>
-        <p:nvPicPr>
-          <p:cNvPr id="12" name="Picture 11">
-            <a:extLst>
-              <a:ext uri="{FF2B5EF4-FFF2-40B4-BE49-F238E27FC236}">
-                <a16:creationId xmlns:a16="http://schemas.microsoft.com/office/drawing/2014/main" id="{497F74C2-6A64-4D13-BB8F-3A920EC05C00}"/>
-              </a:ext>
-            </a:extLst>
-          </p:cNvPr>
-          <p:cNvPicPr>
-            <a:picLocks noChangeAspect="1"/>
-          </p:cNvPicPr>
-          <p:nvPr/>
-        </p:nvPicPr>
-        <p:blipFill>
-          <a:blip r:embed="rId4"/>
-          <a:stretch>
-            <a:fillRect/>
-          </a:stretch>
-        </p:blipFill>
-        <p:spPr>
-          <a:xfrm>
-            <a:off x="2404157" y="212803"/>
-            <a:ext cx="6477000" cy="581025"/>
-          </a:xfrm>
-          <a:prstGeom prst="rect">
-            <a:avLst/>
-          </a:prstGeom>
-        </p:spPr>
-      </p:pic>
+      <p:cxnSp>
+        <p:nvCxnSpPr>
+          <p:cNvPr id="15" name="Straight Arrow Connector 14">
+            <a:extLst>
+              <a:ext uri="{FF2B5EF4-FFF2-40B4-BE49-F238E27FC236}">
+                <a16:creationId xmlns:a16="http://schemas.microsoft.com/office/drawing/2014/main" id="{8853A9F6-3DEC-4AC0-B171-BC5BE9C3A463}"/>
+              </a:ext>
+            </a:extLst>
+          </p:cNvPr>
+          <p:cNvCxnSpPr>
+            <a:cxnSpLocks/>
+            <a:stCxn id="14" idx="3"/>
+          </p:cNvCxnSpPr>
+          <p:nvPr/>
+        </p:nvCxnSpPr>
+        <p:spPr>
+          <a:xfrm flipV="1">
+            <a:off x="7519732" y="1748901"/>
+            <a:ext cx="2583056" cy="710603"/>
+          </a:xfrm>
+          <a:prstGeom prst="straightConnector1">
+            <a:avLst/>
+          </a:prstGeom>
+          <a:ln w="19050">
+            <a:solidFill>
+              <a:srgbClr val="070F30"/>
+            </a:solidFill>
+            <a:tailEnd type="triangle"/>
+          </a:ln>
+        </p:spPr>
+        <p:style>
+          <a:lnRef idx="1">
+            <a:schemeClr val="accent1"/>
+          </a:lnRef>
+          <a:fillRef idx="0">
+            <a:schemeClr val="accent1"/>
+          </a:fillRef>
+          <a:effectRef idx="0">
+            <a:schemeClr val="accent1"/>
+          </a:effectRef>
+          <a:fontRef idx="minor">
+            <a:schemeClr val="tx1"/>
+          </a:fontRef>
+        </p:style>
+      </p:cxnSp>
     </p:spTree>
     <p:extLst>
       <p:ext uri="{BB962C8B-B14F-4D97-AF65-F5344CB8AC3E}">
-        <p14:creationId xmlns:p14="http://schemas.microsoft.com/office/powerpoint/2010/main" val="3938361511"/>
+        <p14:creationId xmlns:p14="http://schemas.microsoft.com/office/powerpoint/2010/main" val="1235936446"/>
       </p:ext>
     </p:extLst>
   </p:cSld>
@@ -12294,7 +13595,7 @@
           <p:cNvPr id="5" name="Rectangle 4">
             <a:extLst>
               <a:ext uri="{FF2B5EF4-FFF2-40B4-BE49-F238E27FC236}">
-                <a16:creationId xmlns:a16="http://schemas.microsoft.com/office/drawing/2014/main" id="{D096F3FC-1E5B-42B2-9D30-7EA972629428}"/>
+                <a16:creationId xmlns:a16="http://schemas.microsoft.com/office/drawing/2014/main" id="{6563922A-6CBD-465E-8926-269E1F89E76D}"/>
               </a:ext>
             </a:extLst>
           </p:cNvPr>
@@ -12345,10 +13646,10 @@
       </p:sp>
       <p:pic>
         <p:nvPicPr>
-          <p:cNvPr id="17" name="Picture 16">
-            <a:extLst>
-              <a:ext uri="{FF2B5EF4-FFF2-40B4-BE49-F238E27FC236}">
-                <a16:creationId xmlns:a16="http://schemas.microsoft.com/office/drawing/2014/main" id="{D31F1E30-53EB-4053-9271-D62D631B0267}"/>
+          <p:cNvPr id="4" name="Picture 3">
+            <a:extLst>
+              <a:ext uri="{FF2B5EF4-FFF2-40B4-BE49-F238E27FC236}">
+                <a16:creationId xmlns:a16="http://schemas.microsoft.com/office/drawing/2014/main" id="{6B17FC3B-A495-4568-BF75-34D420459BF4}"/>
               </a:ext>
             </a:extLst>
           </p:cNvPr>
@@ -12359,46 +13660,241 @@
         </p:nvPicPr>
         <p:blipFill rotWithShape="1">
           <a:blip r:embed="rId2"/>
-          <a:srcRect b="5893"/>
+          <a:srcRect t="10363"/>
           <a:stretch/>
         </p:blipFill>
         <p:spPr>
           <a:xfrm>
-            <a:off x="76200" y="1171094"/>
-            <a:ext cx="11209116" cy="5135460"/>
+            <a:off x="274093" y="1328261"/>
+            <a:ext cx="10737130" cy="4824613"/>
           </a:xfrm>
           <a:prstGeom prst="rect">
             <a:avLst/>
           </a:prstGeom>
         </p:spPr>
       </p:pic>
+      <p:pic>
+        <p:nvPicPr>
+          <p:cNvPr id="6" name="Picture 5">
+            <a:extLst>
+              <a:ext uri="{FF2B5EF4-FFF2-40B4-BE49-F238E27FC236}">
+                <a16:creationId xmlns:a16="http://schemas.microsoft.com/office/drawing/2014/main" id="{19BD58EC-86B5-40B9-B99B-84BA3A97C41C}"/>
+              </a:ext>
+            </a:extLst>
+          </p:cNvPr>
+          <p:cNvPicPr>
+            <a:picLocks noChangeAspect="1"/>
+          </p:cNvPicPr>
+          <p:nvPr/>
+        </p:nvPicPr>
+        <p:blipFill rotWithShape="1">
+          <a:blip r:embed="rId2"/>
+          <a:srcRect l="35193" r="30654" b="92277"/>
+          <a:stretch/>
+        </p:blipFill>
+        <p:spPr>
+          <a:xfrm>
+            <a:off x="2756768" y="242826"/>
+            <a:ext cx="5903755" cy="669254"/>
+          </a:xfrm>
+          <a:prstGeom prst="rect">
+            <a:avLst/>
+          </a:prstGeom>
+        </p:spPr>
+      </p:pic>
+      <p:pic>
+        <p:nvPicPr>
+          <p:cNvPr id="2" name="Picture 1">
+            <a:extLst>
+              <a:ext uri="{FF2B5EF4-FFF2-40B4-BE49-F238E27FC236}">
+                <a16:creationId xmlns:a16="http://schemas.microsoft.com/office/drawing/2014/main" id="{A65BE2BF-AF0D-4CAF-B064-7631D76885EB}"/>
+              </a:ext>
+            </a:extLst>
+          </p:cNvPr>
+          <p:cNvPicPr>
+            <a:picLocks noChangeAspect="1"/>
+          </p:cNvPicPr>
+          <p:nvPr/>
+        </p:nvPicPr>
+        <p:blipFill>
+          <a:blip r:embed="rId3"/>
+          <a:stretch>
+            <a:fillRect/>
+          </a:stretch>
+        </p:blipFill>
+        <p:spPr>
+          <a:xfrm>
+            <a:off x="853026" y="1140325"/>
+            <a:ext cx="10158198" cy="4770425"/>
+          </a:xfrm>
+          <a:prstGeom prst="rect">
+            <a:avLst/>
+          </a:prstGeom>
+        </p:spPr>
+      </p:pic>
+      <p:sp>
+        <p:nvSpPr>
+          <p:cNvPr id="8" name="TextBox 7">
+            <a:extLst>
+              <a:ext uri="{FF2B5EF4-FFF2-40B4-BE49-F238E27FC236}">
+                <a16:creationId xmlns:a16="http://schemas.microsoft.com/office/drawing/2014/main" id="{CFB616AC-495B-476B-A3C8-BECCD77C6CB0}"/>
+              </a:ext>
+            </a:extLst>
+          </p:cNvPr>
+          <p:cNvSpPr txBox="1"/>
+          <p:nvPr/>
+        </p:nvSpPr>
+        <p:spPr>
+          <a:xfrm>
+            <a:off x="4072778" y="2541223"/>
+            <a:ext cx="3730304" cy="369332"/>
+          </a:xfrm>
+          <a:prstGeom prst="rect">
+            <a:avLst/>
+          </a:prstGeom>
+          <a:noFill/>
+        </p:spPr>
+        <p:txBody>
+          <a:bodyPr wrap="square" rtlCol="0">
+            <a:spAutoFit/>
+          </a:bodyPr>
+          <a:lstStyle/>
+          <a:p>
+            <a:pPr algn="ctr"/>
+            <a:r>
+              <a:rPr lang="en-US" b="1" dirty="0">
+                <a:solidFill>
+                  <a:srgbClr val="070F30"/>
+                </a:solidFill>
+              </a:rPr>
+              <a:t>192k DCR in Tickets per day</a:t>
+            </a:r>
+            <a:endParaRPr lang="en-AU" b="1" dirty="0">
+              <a:solidFill>
+                <a:srgbClr val="070F30"/>
+              </a:solidFill>
+            </a:endParaRPr>
+          </a:p>
+        </p:txBody>
+      </p:sp>
       <p:cxnSp>
         <p:nvCxnSpPr>
-          <p:cNvPr id="7" name="Straight Connector 6">
-            <a:extLst>
-              <a:ext uri="{FF2B5EF4-FFF2-40B4-BE49-F238E27FC236}">
-                <a16:creationId xmlns:a16="http://schemas.microsoft.com/office/drawing/2014/main" id="{BBD6C9FA-282C-49CB-8518-DDF1D5DA811F}"/>
+          <p:cNvPr id="9" name="Straight Arrow Connector 8">
+            <a:extLst>
+              <a:ext uri="{FF2B5EF4-FFF2-40B4-BE49-F238E27FC236}">
+                <a16:creationId xmlns:a16="http://schemas.microsoft.com/office/drawing/2014/main" id="{89691101-6C07-413A-8BEF-CF5F70C77FA8}"/>
               </a:ext>
             </a:extLst>
           </p:cNvPr>
           <p:cNvCxnSpPr>
             <a:cxnSpLocks/>
+            <a:stCxn id="8" idx="3"/>
           </p:cNvCxnSpPr>
           <p:nvPr/>
         </p:nvCxnSpPr>
         <p:spPr>
-          <a:xfrm flipH="1">
-            <a:off x="780177" y="2558642"/>
-            <a:ext cx="8355434" cy="0"/>
-          </a:xfrm>
-          <a:prstGeom prst="line">
-            <a:avLst/>
-          </a:prstGeom>
-          <a:ln w="28575">
+          <a:xfrm>
+            <a:off x="7803082" y="2725889"/>
+            <a:ext cx="2455033" cy="1512927"/>
+          </a:xfrm>
+          <a:prstGeom prst="straightConnector1">
+            <a:avLst/>
+          </a:prstGeom>
+          <a:ln w="19050">
+            <a:solidFill>
+              <a:srgbClr val="070F30"/>
+            </a:solidFill>
+            <a:tailEnd type="triangle"/>
+          </a:ln>
+        </p:spPr>
+        <p:style>
+          <a:lnRef idx="1">
+            <a:schemeClr val="accent1"/>
+          </a:lnRef>
+          <a:fillRef idx="0">
+            <a:schemeClr val="accent1"/>
+          </a:fillRef>
+          <a:effectRef idx="0">
+            <a:schemeClr val="accent1"/>
+          </a:effectRef>
+          <a:fontRef idx="minor">
+            <a:schemeClr val="tx1"/>
+          </a:fontRef>
+        </p:style>
+      </p:cxnSp>
+      <p:sp>
+        <p:nvSpPr>
+          <p:cNvPr id="11" name="TextBox 10">
+            <a:extLst>
+              <a:ext uri="{FF2B5EF4-FFF2-40B4-BE49-F238E27FC236}">
+                <a16:creationId xmlns:a16="http://schemas.microsoft.com/office/drawing/2014/main" id="{784B222E-D3B3-428D-BF61-18EC2899160B}"/>
+              </a:ext>
+            </a:extLst>
+          </p:cNvPr>
+          <p:cNvSpPr txBox="1"/>
+          <p:nvPr/>
+        </p:nvSpPr>
+        <p:spPr>
+          <a:xfrm>
+            <a:off x="4279769" y="2957404"/>
+            <a:ext cx="3193680" cy="369332"/>
+          </a:xfrm>
+          <a:prstGeom prst="rect">
+            <a:avLst/>
+          </a:prstGeom>
+          <a:noFill/>
+        </p:spPr>
+        <p:txBody>
+          <a:bodyPr wrap="square" rtlCol="0">
+            <a:spAutoFit/>
+          </a:bodyPr>
+          <a:lstStyle/>
+          <a:p>
+            <a:pPr algn="ctr"/>
+            <a:r>
+              <a:rPr lang="en-US" b="1" dirty="0">
+                <a:solidFill>
+                  <a:srgbClr val="D1275D"/>
+                </a:solidFill>
+              </a:rPr>
+              <a:t>110k DCR Mixed per day</a:t>
+            </a:r>
+            <a:endParaRPr lang="en-AU" b="1" dirty="0">
+              <a:solidFill>
+                <a:srgbClr val="D1275D"/>
+              </a:solidFill>
+            </a:endParaRPr>
+          </a:p>
+        </p:txBody>
+      </p:sp>
+      <p:cxnSp>
+        <p:nvCxnSpPr>
+          <p:cNvPr id="13" name="Straight Arrow Connector 12">
+            <a:extLst>
+              <a:ext uri="{FF2B5EF4-FFF2-40B4-BE49-F238E27FC236}">
+                <a16:creationId xmlns:a16="http://schemas.microsoft.com/office/drawing/2014/main" id="{656FF8E8-F48F-4FD5-9810-7617B3C2A492}"/>
+              </a:ext>
+            </a:extLst>
+          </p:cNvPr>
+          <p:cNvCxnSpPr>
+            <a:cxnSpLocks/>
+            <a:stCxn id="11" idx="3"/>
+          </p:cNvCxnSpPr>
+          <p:nvPr/>
+        </p:nvCxnSpPr>
+        <p:spPr>
+          <a:xfrm>
+            <a:off x="7473449" y="3142070"/>
+            <a:ext cx="2784666" cy="1755008"/>
+          </a:xfrm>
+          <a:prstGeom prst="straightConnector1">
+            <a:avLst/>
+          </a:prstGeom>
+          <a:ln w="19050">
             <a:solidFill>
               <a:srgbClr val="D1275D"/>
             </a:solidFill>
-            <a:prstDash val="lgDash"/>
+            <a:tailEnd type="triangle"/>
           </a:ln>
         </p:spPr>
         <p:style>
@@ -12421,7 +13917,7 @@
           <p:cNvPr id="10" name="Picture 9">
             <a:extLst>
               <a:ext uri="{FF2B5EF4-FFF2-40B4-BE49-F238E27FC236}">
-                <a16:creationId xmlns:a16="http://schemas.microsoft.com/office/drawing/2014/main" id="{8C3D2EF4-BDD2-4DAD-B9CE-A30766D698F3}"/>
+                <a16:creationId xmlns:a16="http://schemas.microsoft.com/office/drawing/2014/main" id="{EE63EB5F-D0AA-4E63-A385-382171974C91}"/>
               </a:ext>
             </a:extLst>
           </p:cNvPr>
@@ -12430,15 +13926,16 @@
           </p:cNvPicPr>
           <p:nvPr/>
         </p:nvPicPr>
-        <p:blipFill rotWithShape="1">
-          <a:blip r:embed="rId3"/>
-          <a:srcRect l="85252" t="50000" b="40201"/>
-          <a:stretch/>
+        <p:blipFill>
+          <a:blip r:embed="rId4"/>
+          <a:stretch>
+            <a:fillRect/>
+          </a:stretch>
         </p:blipFill>
         <p:spPr>
           <a:xfrm>
-            <a:off x="1182847" y="1373698"/>
-            <a:ext cx="2550253" cy="728786"/>
+            <a:off x="906684" y="1384978"/>
+            <a:ext cx="2645620" cy="1388950"/>
           </a:xfrm>
           <a:prstGeom prst="rect">
             <a:avLst/>
@@ -12447,10 +13944,10 @@
       </p:pic>
       <p:sp>
         <p:nvSpPr>
-          <p:cNvPr id="13" name="TextBox 12">
-            <a:extLst>
-              <a:ext uri="{FF2B5EF4-FFF2-40B4-BE49-F238E27FC236}">
-                <a16:creationId xmlns:a16="http://schemas.microsoft.com/office/drawing/2014/main" id="{7C27C4B0-C470-4757-85CE-C962F8E8AF52}"/>
+          <p:cNvPr id="16" name="TextBox 15">
+            <a:extLst>
+              <a:ext uri="{FF2B5EF4-FFF2-40B4-BE49-F238E27FC236}">
+                <a16:creationId xmlns:a16="http://schemas.microsoft.com/office/drawing/2014/main" id="{F204AE29-535C-448D-B7B2-E9F610668A8D}"/>
               </a:ext>
             </a:extLst>
           </p:cNvPr>
@@ -12459,8 +13956,8 @@
         </p:nvSpPr>
         <p:spPr>
           <a:xfrm>
-            <a:off x="3932365" y="1879995"/>
-            <a:ext cx="4526537" cy="646331"/>
+            <a:off x="6789572" y="1568893"/>
+            <a:ext cx="3177667" cy="923330"/>
           </a:xfrm>
           <a:prstGeom prst="rect">
             <a:avLst/>
@@ -12480,7 +13977,7 @@
                   <a:srgbClr val="D1275D"/>
                 </a:solidFill>
               </a:rPr>
-              <a:t>Each Ticket Commands ~15.5DCR</a:t>
+              <a:t>Demand for Privacy Mixing Increases </a:t>
             </a:r>
           </a:p>
           <a:p>
@@ -12491,17 +13988,22 @@
                   <a:srgbClr val="D1275D"/>
                 </a:solidFill>
               </a:rPr>
-              <a:t>of Treasury Value</a:t>
+              <a:t>Tx Throughput</a:t>
             </a:r>
+            <a:endParaRPr lang="en-AU" b="1" dirty="0">
+              <a:solidFill>
+                <a:srgbClr val="D1275D"/>
+              </a:solidFill>
+            </a:endParaRPr>
           </a:p>
         </p:txBody>
       </p:sp>
       <p:cxnSp>
         <p:nvCxnSpPr>
-          <p:cNvPr id="14" name="Straight Connector 13">
-            <a:extLst>
-              <a:ext uri="{FF2B5EF4-FFF2-40B4-BE49-F238E27FC236}">
-                <a16:creationId xmlns:a16="http://schemas.microsoft.com/office/drawing/2014/main" id="{03A0DA0C-1CED-4478-B7DF-D5FAF2FF55AC}"/>
+          <p:cNvPr id="17" name="Straight Arrow Connector 16">
+            <a:extLst>
+              <a:ext uri="{FF2B5EF4-FFF2-40B4-BE49-F238E27FC236}">
+                <a16:creationId xmlns:a16="http://schemas.microsoft.com/office/drawing/2014/main" id="{4065E65C-7F4F-4171-B6DD-53F2A2D0D604}"/>
               </a:ext>
             </a:extLst>
           </p:cNvPr>
@@ -12511,18 +14013,18 @@
           <p:nvPr/>
         </p:nvCxnSpPr>
         <p:spPr>
-          <a:xfrm flipH="1">
-            <a:off x="9076888" y="3524774"/>
-            <a:ext cx="1377192" cy="0"/>
-          </a:xfrm>
-          <a:prstGeom prst="line">
+          <a:xfrm flipV="1">
+            <a:off x="8823489" y="1536569"/>
+            <a:ext cx="1517715" cy="1253765"/>
+          </a:xfrm>
+          <a:prstGeom prst="straightConnector1">
             <a:avLst/>
           </a:prstGeom>
           <a:ln w="28575">
             <a:solidFill>
-              <a:srgbClr val="23DBCE"/>
+              <a:srgbClr val="D1275D"/>
             </a:solidFill>
-            <a:prstDash val="lgDash"/>
+            <a:tailEnd type="triangle"/>
           </a:ln>
         </p:spPr>
         <p:style>
@@ -12540,91 +14042,10 @@
           </a:fontRef>
         </p:style>
       </p:cxnSp>
-      <p:sp>
-        <p:nvSpPr>
-          <p:cNvPr id="16" name="TextBox 15">
-            <a:extLst>
-              <a:ext uri="{FF2B5EF4-FFF2-40B4-BE49-F238E27FC236}">
-                <a16:creationId xmlns:a16="http://schemas.microsoft.com/office/drawing/2014/main" id="{296038F4-1AA5-490A-B8F5-61F405D1E914}"/>
-              </a:ext>
-            </a:extLst>
-          </p:cNvPr>
-          <p:cNvSpPr txBox="1"/>
-          <p:nvPr/>
-        </p:nvSpPr>
-        <p:spPr>
-          <a:xfrm>
-            <a:off x="7430547" y="3738824"/>
-            <a:ext cx="2923566" cy="646331"/>
-          </a:xfrm>
-          <a:prstGeom prst="rect">
-            <a:avLst/>
-          </a:prstGeom>
-          <a:noFill/>
-        </p:spPr>
-        <p:txBody>
-          <a:bodyPr wrap="square" rtlCol="0">
-            <a:spAutoFit/>
-          </a:bodyPr>
-          <a:lstStyle/>
-          <a:p>
-            <a:pPr algn="ctr"/>
-            <a:r>
-              <a:rPr lang="en-US" b="1" dirty="0">
-                <a:solidFill>
-                  <a:srgbClr val="23DBCE"/>
-                </a:solidFill>
-              </a:rPr>
-              <a:t>15.5DCR Equivalent to</a:t>
-            </a:r>
-          </a:p>
-          <a:p>
-            <a:pPr algn="ctr"/>
-            <a:r>
-              <a:rPr lang="en-US" b="1" dirty="0">
-                <a:solidFill>
-                  <a:srgbClr val="23DBCE"/>
-                </a:solidFill>
-              </a:rPr>
-              <a:t>~11% of Ticket Value</a:t>
-            </a:r>
-          </a:p>
-        </p:txBody>
-      </p:sp>
-      <p:pic>
-        <p:nvPicPr>
-          <p:cNvPr id="18" name="Picture 17">
-            <a:extLst>
-              <a:ext uri="{FF2B5EF4-FFF2-40B4-BE49-F238E27FC236}">
-                <a16:creationId xmlns:a16="http://schemas.microsoft.com/office/drawing/2014/main" id="{0EB0F4AF-7A41-4CFF-B658-C33AE0885AC7}"/>
-              </a:ext>
-            </a:extLst>
-          </p:cNvPr>
-          <p:cNvPicPr>
-            <a:picLocks noChangeAspect="1"/>
-          </p:cNvPicPr>
-          <p:nvPr/>
-        </p:nvPicPr>
-        <p:blipFill>
-          <a:blip r:embed="rId4"/>
-          <a:stretch>
-            <a:fillRect/>
-          </a:stretch>
-        </p:blipFill>
-        <p:spPr>
-          <a:xfrm>
-            <a:off x="2338387" y="247208"/>
-            <a:ext cx="6276975" cy="657225"/>
-          </a:xfrm>
-          <a:prstGeom prst="rect">
-            <a:avLst/>
-          </a:prstGeom>
-        </p:spPr>
-      </p:pic>
     </p:spTree>
     <p:extLst>
       <p:ext uri="{BB962C8B-B14F-4D97-AF65-F5344CB8AC3E}">
-        <p14:creationId xmlns:p14="http://schemas.microsoft.com/office/powerpoint/2010/main" val="2945493968"/>
+        <p14:creationId xmlns:p14="http://schemas.microsoft.com/office/powerpoint/2010/main" val="1585972954"/>
       </p:ext>
     </p:extLst>
   </p:cSld>
@@ -12656,7 +14077,7 @@
           <p:cNvPr id="2" name="Title 1">
             <a:extLst>
               <a:ext uri="{FF2B5EF4-FFF2-40B4-BE49-F238E27FC236}">
-                <a16:creationId xmlns:a16="http://schemas.microsoft.com/office/drawing/2014/main" id="{DB9E8E45-3BE1-4C78-8472-1714E89AB129}"/>
+                <a16:creationId xmlns:a16="http://schemas.microsoft.com/office/drawing/2014/main" id="{C711E6D6-E67B-4C74-A2F0-B8B7F9E5EF88}"/>
               </a:ext>
             </a:extLst>
           </p:cNvPr>
@@ -12664,7 +14085,7 @@
             <a:spLocks noGrp="1"/>
           </p:cNvSpPr>
           <p:nvPr>
-            <p:ph type="title"/>
+            <p:ph type="ctrTitle"/>
           </p:nvPr>
         </p:nvSpPr>
         <p:spPr/>
@@ -12674,7 +14095,7 @@
           <a:p>
             <a:r>
               <a:rPr lang="en-US" dirty="0"/>
-              <a:t>Summary</a:t>
+              <a:t>Treasury Performance</a:t>
             </a:r>
             <a:endParaRPr lang="en-AU" dirty="0"/>
           </a:p>
@@ -12682,10 +14103,10 @@
       </p:sp>
       <p:sp>
         <p:nvSpPr>
-          <p:cNvPr id="3" name="Content Placeholder 2">
-            <a:extLst>
-              <a:ext uri="{FF2B5EF4-FFF2-40B4-BE49-F238E27FC236}">
-                <a16:creationId xmlns:a16="http://schemas.microsoft.com/office/drawing/2014/main" id="{32132A16-D761-4B9A-9032-B5A4FC5198EE}"/>
+          <p:cNvPr id="3" name="Subtitle 2">
+            <a:extLst>
+              <a:ext uri="{FF2B5EF4-FFF2-40B4-BE49-F238E27FC236}">
+                <a16:creationId xmlns:a16="http://schemas.microsoft.com/office/drawing/2014/main" id="{936F6549-BB15-4380-8980-51AE91A4E982}"/>
               </a:ext>
             </a:extLst>
           </p:cNvPr>
@@ -12693,69 +14114,17 @@
             <a:spLocks noGrp="1"/>
           </p:cNvSpPr>
           <p:nvPr>
-            <p:ph idx="1"/>
+            <p:ph type="subTitle" idx="1"/>
           </p:nvPr>
         </p:nvSpPr>
         <p:spPr/>
         <p:txBody>
-          <a:bodyPr>
-            <a:normAutofit fontScale="92500" lnSpcReduction="10000"/>
-          </a:bodyPr>
+          <a:bodyPr/>
           <a:lstStyle/>
           <a:p>
             <a:r>
               <a:rPr lang="en-US" dirty="0"/>
-              <a:t>The Decred blockchain has a unique blend of:</a:t>
-            </a:r>
-          </a:p>
-          <a:p>
-            <a:pPr marL="457200" indent="-457200">
-              <a:buFont typeface="Arial" panose="020B0604020202020204" pitchFamily="34" charset="0"/>
-              <a:buChar char="•"/>
-            </a:pPr>
-            <a:r>
-              <a:rPr lang="en-US" b="1" dirty="0"/>
-              <a:t>Machine Consensus </a:t>
-            </a:r>
-            <a:r>
-              <a:rPr lang="en-US" dirty="0"/>
-              <a:t>in Proof-of-Work</a:t>
-            </a:r>
-          </a:p>
-          <a:p>
-            <a:pPr marL="457200" indent="-457200">
-              <a:buFont typeface="Arial" panose="020B0604020202020204" pitchFamily="34" charset="0"/>
-              <a:buChar char="•"/>
-            </a:pPr>
-            <a:r>
-              <a:rPr lang="en-US" b="1" dirty="0"/>
-              <a:t>Human Consensus </a:t>
-            </a:r>
-            <a:r>
-              <a:rPr lang="en-US" dirty="0"/>
-              <a:t>in Proof-of-Stake</a:t>
-            </a:r>
-          </a:p>
-          <a:p>
-            <a:pPr marL="457200" indent="-457200">
-              <a:buFont typeface="Arial" panose="020B0604020202020204" pitchFamily="34" charset="0"/>
-              <a:buChar char="•"/>
-            </a:pPr>
-            <a:endParaRPr lang="en-US" dirty="0"/>
-          </a:p>
-          <a:p>
-            <a:r>
-              <a:rPr lang="en-US" dirty="0"/>
-              <a:t>Holding DCR and participation in governance via tickets is a very high conviction signal of Network Sentiment.</a:t>
-            </a:r>
-          </a:p>
-          <a:p>
-            <a:endParaRPr lang="en-US" dirty="0"/>
-          </a:p>
-          <a:p>
-            <a:r>
-              <a:rPr lang="en-US" dirty="0"/>
-              <a:t>Cost Basis models provides insight into the economic stress or euphoria for various stakeholder and participants.</a:t>
+              <a:t>Analysing the transparent Decred Treasury as it bootstraps a global monetary network and community.</a:t>
             </a:r>
             <a:endParaRPr lang="en-AU" dirty="0"/>
           </a:p>
@@ -12764,7 +14133,7 @@
     </p:spTree>
     <p:extLst>
       <p:ext uri="{BB962C8B-B14F-4D97-AF65-F5344CB8AC3E}">
-        <p14:creationId xmlns:p14="http://schemas.microsoft.com/office/powerpoint/2010/main" val="2900114589"/>
+        <p14:creationId xmlns:p14="http://schemas.microsoft.com/office/powerpoint/2010/main" val="670085239"/>
       </p:ext>
     </p:extLst>
   </p:cSld>
@@ -13294,6 +14663,845 @@
       </p:grpSpPr>
       <p:sp>
         <p:nvSpPr>
+          <p:cNvPr id="5" name="Rectangle 4">
+            <a:extLst>
+              <a:ext uri="{FF2B5EF4-FFF2-40B4-BE49-F238E27FC236}">
+                <a16:creationId xmlns:a16="http://schemas.microsoft.com/office/drawing/2014/main" id="{B1A59732-93A8-48A0-94E1-CDFE53FD961F}"/>
+              </a:ext>
+            </a:extLst>
+          </p:cNvPr>
+          <p:cNvSpPr/>
+          <p:nvPr/>
+        </p:nvSpPr>
+        <p:spPr>
+          <a:xfrm>
+            <a:off x="0" y="0"/>
+            <a:ext cx="11285316" cy="6858000"/>
+          </a:xfrm>
+          <a:prstGeom prst="rect">
+            <a:avLst/>
+          </a:prstGeom>
+          <a:solidFill>
+            <a:srgbClr val="F5F5F5"/>
+          </a:solidFill>
+          <a:ln>
+            <a:solidFill>
+              <a:srgbClr val="F5F5F5"/>
+            </a:solidFill>
+          </a:ln>
+        </p:spPr>
+        <p:style>
+          <a:lnRef idx="2">
+            <a:schemeClr val="accent1">
+              <a:shade val="50000"/>
+            </a:schemeClr>
+          </a:lnRef>
+          <a:fillRef idx="1">
+            <a:schemeClr val="accent1"/>
+          </a:fillRef>
+          <a:effectRef idx="0">
+            <a:schemeClr val="accent1"/>
+          </a:effectRef>
+          <a:fontRef idx="minor">
+            <a:schemeClr val="lt1"/>
+          </a:fontRef>
+        </p:style>
+        <p:txBody>
+          <a:bodyPr rtlCol="0" anchor="ctr"/>
+          <a:lstStyle/>
+          <a:p>
+            <a:pPr algn="ctr"/>
+            <a:endParaRPr lang="en-AU"/>
+          </a:p>
+        </p:txBody>
+      </p:sp>
+      <p:pic>
+        <p:nvPicPr>
+          <p:cNvPr id="13" name="Picture 12">
+            <a:extLst>
+              <a:ext uri="{FF2B5EF4-FFF2-40B4-BE49-F238E27FC236}">
+                <a16:creationId xmlns:a16="http://schemas.microsoft.com/office/drawing/2014/main" id="{D33779B1-40A4-4F5C-A385-4ED5AB9FC9E1}"/>
+              </a:ext>
+            </a:extLst>
+          </p:cNvPr>
+          <p:cNvPicPr>
+            <a:picLocks noChangeAspect="1"/>
+          </p:cNvPicPr>
+          <p:nvPr/>
+        </p:nvPicPr>
+        <p:blipFill>
+          <a:blip r:embed="rId2"/>
+          <a:stretch>
+            <a:fillRect/>
+          </a:stretch>
+        </p:blipFill>
+        <p:spPr>
+          <a:xfrm>
+            <a:off x="135732" y="1147884"/>
+            <a:ext cx="11055470" cy="5229230"/>
+          </a:xfrm>
+          <a:prstGeom prst="rect">
+            <a:avLst/>
+          </a:prstGeom>
+        </p:spPr>
+      </p:pic>
+      <p:pic>
+        <p:nvPicPr>
+          <p:cNvPr id="6" name="Picture 5">
+            <a:extLst>
+              <a:ext uri="{FF2B5EF4-FFF2-40B4-BE49-F238E27FC236}">
+                <a16:creationId xmlns:a16="http://schemas.microsoft.com/office/drawing/2014/main" id="{643518C2-CDE9-4203-B8D5-FD9FBAFF9A23}"/>
+              </a:ext>
+            </a:extLst>
+          </p:cNvPr>
+          <p:cNvPicPr>
+            <a:picLocks noChangeAspect="1"/>
+          </p:cNvPicPr>
+          <p:nvPr/>
+        </p:nvPicPr>
+        <p:blipFill>
+          <a:blip r:embed="rId3"/>
+          <a:stretch>
+            <a:fillRect/>
+          </a:stretch>
+        </p:blipFill>
+        <p:spPr>
+          <a:xfrm>
+            <a:off x="1090856" y="1132295"/>
+            <a:ext cx="3286125" cy="1304925"/>
+          </a:xfrm>
+          <a:prstGeom prst="rect">
+            <a:avLst/>
+          </a:prstGeom>
+        </p:spPr>
+      </p:pic>
+      <p:sp>
+        <p:nvSpPr>
+          <p:cNvPr id="7" name="TextBox 6">
+            <a:extLst>
+              <a:ext uri="{FF2B5EF4-FFF2-40B4-BE49-F238E27FC236}">
+                <a16:creationId xmlns:a16="http://schemas.microsoft.com/office/drawing/2014/main" id="{EC52148A-6BD7-4A18-B1A0-53C3F83330E4}"/>
+              </a:ext>
+            </a:extLst>
+          </p:cNvPr>
+          <p:cNvSpPr txBox="1"/>
+          <p:nvPr/>
+        </p:nvSpPr>
+        <p:spPr>
+          <a:xfrm>
+            <a:off x="7815021" y="875641"/>
+            <a:ext cx="2516698" cy="369332"/>
+          </a:xfrm>
+          <a:prstGeom prst="rect">
+            <a:avLst/>
+          </a:prstGeom>
+          <a:noFill/>
+        </p:spPr>
+        <p:txBody>
+          <a:bodyPr wrap="square" rtlCol="0">
+            <a:spAutoFit/>
+          </a:bodyPr>
+          <a:lstStyle/>
+          <a:p>
+            <a:pPr algn="ctr"/>
+            <a:r>
+              <a:rPr lang="en-US" b="1" dirty="0">
+                <a:solidFill>
+                  <a:srgbClr val="D1275D"/>
+                </a:solidFill>
+              </a:rPr>
+              <a:t>Inflow 982.5k DCR</a:t>
+            </a:r>
+          </a:p>
+        </p:txBody>
+      </p:sp>
+      <p:sp>
+        <p:nvSpPr>
+          <p:cNvPr id="8" name="TextBox 7">
+            <a:extLst>
+              <a:ext uri="{FF2B5EF4-FFF2-40B4-BE49-F238E27FC236}">
+                <a16:creationId xmlns:a16="http://schemas.microsoft.com/office/drawing/2014/main" id="{0D83EF7F-7508-4BB9-9EA9-3D94B379C427}"/>
+              </a:ext>
+            </a:extLst>
+          </p:cNvPr>
+          <p:cNvSpPr txBox="1"/>
+          <p:nvPr/>
+        </p:nvSpPr>
+        <p:spPr>
+          <a:xfrm>
+            <a:off x="7692176" y="2212902"/>
+            <a:ext cx="2639543" cy="646331"/>
+          </a:xfrm>
+          <a:prstGeom prst="rect">
+            <a:avLst/>
+          </a:prstGeom>
+          <a:noFill/>
+        </p:spPr>
+        <p:txBody>
+          <a:bodyPr wrap="square" rtlCol="0">
+            <a:spAutoFit/>
+          </a:bodyPr>
+          <a:lstStyle/>
+          <a:p>
+            <a:pPr algn="ctr"/>
+            <a:r>
+              <a:rPr lang="en-US" b="1" dirty="0">
+                <a:solidFill>
+                  <a:srgbClr val="C14DB1"/>
+                </a:solidFill>
+              </a:rPr>
+              <a:t>Balance 636.3k DCR</a:t>
+            </a:r>
+          </a:p>
+          <a:p>
+            <a:pPr algn="ctr"/>
+            <a:r>
+              <a:rPr lang="en-US" b="1" dirty="0">
+                <a:solidFill>
+                  <a:srgbClr val="C14DB1"/>
+                </a:solidFill>
+              </a:rPr>
+              <a:t>$8.908M @ $14/DCR</a:t>
+            </a:r>
+            <a:endParaRPr lang="en-AU" b="1" dirty="0">
+              <a:solidFill>
+                <a:srgbClr val="C14DB1"/>
+              </a:solidFill>
+            </a:endParaRPr>
+          </a:p>
+        </p:txBody>
+      </p:sp>
+      <p:sp>
+        <p:nvSpPr>
+          <p:cNvPr id="9" name="TextBox 8">
+            <a:extLst>
+              <a:ext uri="{FF2B5EF4-FFF2-40B4-BE49-F238E27FC236}">
+                <a16:creationId xmlns:a16="http://schemas.microsoft.com/office/drawing/2014/main" id="{A3EFD7FB-9463-43EB-9055-E892E803D1F9}"/>
+              </a:ext>
+            </a:extLst>
+          </p:cNvPr>
+          <p:cNvSpPr txBox="1"/>
+          <p:nvPr/>
+        </p:nvSpPr>
+        <p:spPr>
+          <a:xfrm>
+            <a:off x="7815021" y="4837036"/>
+            <a:ext cx="2639543" cy="830997"/>
+          </a:xfrm>
+          <a:prstGeom prst="rect">
+            <a:avLst/>
+          </a:prstGeom>
+          <a:noFill/>
+        </p:spPr>
+        <p:txBody>
+          <a:bodyPr wrap="square" rtlCol="0">
+            <a:spAutoFit/>
+          </a:bodyPr>
+          <a:lstStyle/>
+          <a:p>
+            <a:pPr algn="ctr"/>
+            <a:r>
+              <a:rPr lang="en-US" b="1" dirty="0">
+                <a:solidFill>
+                  <a:srgbClr val="23DBCE"/>
+                </a:solidFill>
+              </a:rPr>
+              <a:t>Spent 346.5k DCR</a:t>
+            </a:r>
+          </a:p>
+          <a:p>
+            <a:pPr algn="ctr"/>
+            <a:r>
+              <a:rPr lang="en-AU" b="1" dirty="0">
+                <a:solidFill>
+                  <a:srgbClr val="23DBCE"/>
+                </a:solidFill>
+              </a:rPr>
+              <a:t>$7.626M</a:t>
+            </a:r>
+          </a:p>
+          <a:p>
+            <a:pPr algn="ctr"/>
+            <a:r>
+              <a:rPr lang="en-AU" sz="1200" b="1" i="1" dirty="0">
+                <a:solidFill>
+                  <a:srgbClr val="23DBCE"/>
+                </a:solidFill>
+              </a:rPr>
+              <a:t>Priced on Spend Date</a:t>
+            </a:r>
+            <a:endParaRPr lang="en-AU" b="1" i="1" dirty="0">
+              <a:solidFill>
+                <a:srgbClr val="23DBCE"/>
+              </a:solidFill>
+            </a:endParaRPr>
+          </a:p>
+        </p:txBody>
+      </p:sp>
+      <p:pic>
+        <p:nvPicPr>
+          <p:cNvPr id="12" name="Picture 11">
+            <a:extLst>
+              <a:ext uri="{FF2B5EF4-FFF2-40B4-BE49-F238E27FC236}">
+                <a16:creationId xmlns:a16="http://schemas.microsoft.com/office/drawing/2014/main" id="{497F74C2-6A64-4D13-BB8F-3A920EC05C00}"/>
+              </a:ext>
+            </a:extLst>
+          </p:cNvPr>
+          <p:cNvPicPr>
+            <a:picLocks noChangeAspect="1"/>
+          </p:cNvPicPr>
+          <p:nvPr/>
+        </p:nvPicPr>
+        <p:blipFill>
+          <a:blip r:embed="rId4"/>
+          <a:stretch>
+            <a:fillRect/>
+          </a:stretch>
+        </p:blipFill>
+        <p:spPr>
+          <a:xfrm>
+            <a:off x="2404157" y="212803"/>
+            <a:ext cx="6477000" cy="581025"/>
+          </a:xfrm>
+          <a:prstGeom prst="rect">
+            <a:avLst/>
+          </a:prstGeom>
+        </p:spPr>
+      </p:pic>
+    </p:spTree>
+    <p:extLst>
+      <p:ext uri="{BB962C8B-B14F-4D97-AF65-F5344CB8AC3E}">
+        <p14:creationId xmlns:p14="http://schemas.microsoft.com/office/powerpoint/2010/main" val="3938361511"/>
+      </p:ext>
+    </p:extLst>
+  </p:cSld>
+  <p:clrMapOvr>
+    <a:masterClrMapping/>
+  </p:clrMapOvr>
+</p:sld>
+</file>
+
+<file path=ppt/slides/slide31.xml><?xml version="1.0" encoding="utf-8"?>
+<p:sld xmlns:a="http://schemas.openxmlformats.org/drawingml/2006/main" xmlns:r="http://schemas.openxmlformats.org/officeDocument/2006/relationships" xmlns:p="http://schemas.openxmlformats.org/presentationml/2006/main">
+  <p:cSld>
+    <p:spTree>
+      <p:nvGrpSpPr>
+        <p:cNvPr id="1" name=""/>
+        <p:cNvGrpSpPr/>
+        <p:nvPr/>
+      </p:nvGrpSpPr>
+      <p:grpSpPr>
+        <a:xfrm>
+          <a:off x="0" y="0"/>
+          <a:ext cx="0" cy="0"/>
+          <a:chOff x="0" y="0"/>
+          <a:chExt cx="0" cy="0"/>
+        </a:xfrm>
+      </p:grpSpPr>
+      <p:sp>
+        <p:nvSpPr>
+          <p:cNvPr id="5" name="Rectangle 4">
+            <a:extLst>
+              <a:ext uri="{FF2B5EF4-FFF2-40B4-BE49-F238E27FC236}">
+                <a16:creationId xmlns:a16="http://schemas.microsoft.com/office/drawing/2014/main" id="{D096F3FC-1E5B-42B2-9D30-7EA972629428}"/>
+              </a:ext>
+            </a:extLst>
+          </p:cNvPr>
+          <p:cNvSpPr/>
+          <p:nvPr/>
+        </p:nvSpPr>
+        <p:spPr>
+          <a:xfrm>
+            <a:off x="0" y="0"/>
+            <a:ext cx="11285316" cy="6858000"/>
+          </a:xfrm>
+          <a:prstGeom prst="rect">
+            <a:avLst/>
+          </a:prstGeom>
+          <a:solidFill>
+            <a:srgbClr val="F5F5F5"/>
+          </a:solidFill>
+          <a:ln>
+            <a:solidFill>
+              <a:srgbClr val="F5F5F5"/>
+            </a:solidFill>
+          </a:ln>
+        </p:spPr>
+        <p:style>
+          <a:lnRef idx="2">
+            <a:schemeClr val="accent1">
+              <a:shade val="50000"/>
+            </a:schemeClr>
+          </a:lnRef>
+          <a:fillRef idx="1">
+            <a:schemeClr val="accent1"/>
+          </a:fillRef>
+          <a:effectRef idx="0">
+            <a:schemeClr val="accent1"/>
+          </a:effectRef>
+          <a:fontRef idx="minor">
+            <a:schemeClr val="lt1"/>
+          </a:fontRef>
+        </p:style>
+        <p:txBody>
+          <a:bodyPr rtlCol="0" anchor="ctr"/>
+          <a:lstStyle/>
+          <a:p>
+            <a:pPr algn="ctr"/>
+            <a:endParaRPr lang="en-AU"/>
+          </a:p>
+        </p:txBody>
+      </p:sp>
+      <p:pic>
+        <p:nvPicPr>
+          <p:cNvPr id="17" name="Picture 16">
+            <a:extLst>
+              <a:ext uri="{FF2B5EF4-FFF2-40B4-BE49-F238E27FC236}">
+                <a16:creationId xmlns:a16="http://schemas.microsoft.com/office/drawing/2014/main" id="{D31F1E30-53EB-4053-9271-D62D631B0267}"/>
+              </a:ext>
+            </a:extLst>
+          </p:cNvPr>
+          <p:cNvPicPr>
+            <a:picLocks noChangeAspect="1"/>
+          </p:cNvPicPr>
+          <p:nvPr/>
+        </p:nvPicPr>
+        <p:blipFill rotWithShape="1">
+          <a:blip r:embed="rId2"/>
+          <a:srcRect b="5893"/>
+          <a:stretch/>
+        </p:blipFill>
+        <p:spPr>
+          <a:xfrm>
+            <a:off x="76200" y="1171094"/>
+            <a:ext cx="11209116" cy="5135460"/>
+          </a:xfrm>
+          <a:prstGeom prst="rect">
+            <a:avLst/>
+          </a:prstGeom>
+        </p:spPr>
+      </p:pic>
+      <p:cxnSp>
+        <p:nvCxnSpPr>
+          <p:cNvPr id="7" name="Straight Connector 6">
+            <a:extLst>
+              <a:ext uri="{FF2B5EF4-FFF2-40B4-BE49-F238E27FC236}">
+                <a16:creationId xmlns:a16="http://schemas.microsoft.com/office/drawing/2014/main" id="{BBD6C9FA-282C-49CB-8518-DDF1D5DA811F}"/>
+              </a:ext>
+            </a:extLst>
+          </p:cNvPr>
+          <p:cNvCxnSpPr>
+            <a:cxnSpLocks/>
+          </p:cNvCxnSpPr>
+          <p:nvPr/>
+        </p:nvCxnSpPr>
+        <p:spPr>
+          <a:xfrm flipH="1">
+            <a:off x="780177" y="2558642"/>
+            <a:ext cx="8355434" cy="0"/>
+          </a:xfrm>
+          <a:prstGeom prst="line">
+            <a:avLst/>
+          </a:prstGeom>
+          <a:ln w="28575">
+            <a:solidFill>
+              <a:srgbClr val="D1275D"/>
+            </a:solidFill>
+            <a:prstDash val="lgDash"/>
+          </a:ln>
+        </p:spPr>
+        <p:style>
+          <a:lnRef idx="1">
+            <a:schemeClr val="accent1"/>
+          </a:lnRef>
+          <a:fillRef idx="0">
+            <a:schemeClr val="accent1"/>
+          </a:fillRef>
+          <a:effectRef idx="0">
+            <a:schemeClr val="accent1"/>
+          </a:effectRef>
+          <a:fontRef idx="minor">
+            <a:schemeClr val="tx1"/>
+          </a:fontRef>
+        </p:style>
+      </p:cxnSp>
+      <p:pic>
+        <p:nvPicPr>
+          <p:cNvPr id="10" name="Picture 9">
+            <a:extLst>
+              <a:ext uri="{FF2B5EF4-FFF2-40B4-BE49-F238E27FC236}">
+                <a16:creationId xmlns:a16="http://schemas.microsoft.com/office/drawing/2014/main" id="{8C3D2EF4-BDD2-4DAD-B9CE-A30766D698F3}"/>
+              </a:ext>
+            </a:extLst>
+          </p:cNvPr>
+          <p:cNvPicPr>
+            <a:picLocks noChangeAspect="1"/>
+          </p:cNvPicPr>
+          <p:nvPr/>
+        </p:nvPicPr>
+        <p:blipFill rotWithShape="1">
+          <a:blip r:embed="rId3"/>
+          <a:srcRect l="85252" t="50000" b="40201"/>
+          <a:stretch/>
+        </p:blipFill>
+        <p:spPr>
+          <a:xfrm>
+            <a:off x="1182847" y="1373698"/>
+            <a:ext cx="2550253" cy="728786"/>
+          </a:xfrm>
+          <a:prstGeom prst="rect">
+            <a:avLst/>
+          </a:prstGeom>
+        </p:spPr>
+      </p:pic>
+      <p:sp>
+        <p:nvSpPr>
+          <p:cNvPr id="13" name="TextBox 12">
+            <a:extLst>
+              <a:ext uri="{FF2B5EF4-FFF2-40B4-BE49-F238E27FC236}">
+                <a16:creationId xmlns:a16="http://schemas.microsoft.com/office/drawing/2014/main" id="{7C27C4B0-C470-4757-85CE-C962F8E8AF52}"/>
+              </a:ext>
+            </a:extLst>
+          </p:cNvPr>
+          <p:cNvSpPr txBox="1"/>
+          <p:nvPr/>
+        </p:nvSpPr>
+        <p:spPr>
+          <a:xfrm>
+            <a:off x="3932365" y="1879995"/>
+            <a:ext cx="4526537" cy="646331"/>
+          </a:xfrm>
+          <a:prstGeom prst="rect">
+            <a:avLst/>
+          </a:prstGeom>
+          <a:noFill/>
+        </p:spPr>
+        <p:txBody>
+          <a:bodyPr wrap="square" rtlCol="0">
+            <a:spAutoFit/>
+          </a:bodyPr>
+          <a:lstStyle/>
+          <a:p>
+            <a:pPr algn="ctr"/>
+            <a:r>
+              <a:rPr lang="en-US" b="1" dirty="0">
+                <a:solidFill>
+                  <a:srgbClr val="D1275D"/>
+                </a:solidFill>
+              </a:rPr>
+              <a:t>Each Ticket Commands ~15.5DCR</a:t>
+            </a:r>
+          </a:p>
+          <a:p>
+            <a:pPr algn="ctr"/>
+            <a:r>
+              <a:rPr lang="en-US" b="1" dirty="0">
+                <a:solidFill>
+                  <a:srgbClr val="D1275D"/>
+                </a:solidFill>
+              </a:rPr>
+              <a:t>of Treasury Value</a:t>
+            </a:r>
+          </a:p>
+        </p:txBody>
+      </p:sp>
+      <p:cxnSp>
+        <p:nvCxnSpPr>
+          <p:cNvPr id="14" name="Straight Connector 13">
+            <a:extLst>
+              <a:ext uri="{FF2B5EF4-FFF2-40B4-BE49-F238E27FC236}">
+                <a16:creationId xmlns:a16="http://schemas.microsoft.com/office/drawing/2014/main" id="{03A0DA0C-1CED-4478-B7DF-D5FAF2FF55AC}"/>
+              </a:ext>
+            </a:extLst>
+          </p:cNvPr>
+          <p:cNvCxnSpPr>
+            <a:cxnSpLocks/>
+          </p:cNvCxnSpPr>
+          <p:nvPr/>
+        </p:nvCxnSpPr>
+        <p:spPr>
+          <a:xfrm flipH="1">
+            <a:off x="9076888" y="3524774"/>
+            <a:ext cx="1377192" cy="0"/>
+          </a:xfrm>
+          <a:prstGeom prst="line">
+            <a:avLst/>
+          </a:prstGeom>
+          <a:ln w="28575">
+            <a:solidFill>
+              <a:srgbClr val="23DBCE"/>
+            </a:solidFill>
+            <a:prstDash val="lgDash"/>
+          </a:ln>
+        </p:spPr>
+        <p:style>
+          <a:lnRef idx="1">
+            <a:schemeClr val="accent1"/>
+          </a:lnRef>
+          <a:fillRef idx="0">
+            <a:schemeClr val="accent1"/>
+          </a:fillRef>
+          <a:effectRef idx="0">
+            <a:schemeClr val="accent1"/>
+          </a:effectRef>
+          <a:fontRef idx="minor">
+            <a:schemeClr val="tx1"/>
+          </a:fontRef>
+        </p:style>
+      </p:cxnSp>
+      <p:sp>
+        <p:nvSpPr>
+          <p:cNvPr id="16" name="TextBox 15">
+            <a:extLst>
+              <a:ext uri="{FF2B5EF4-FFF2-40B4-BE49-F238E27FC236}">
+                <a16:creationId xmlns:a16="http://schemas.microsoft.com/office/drawing/2014/main" id="{296038F4-1AA5-490A-B8F5-61F405D1E914}"/>
+              </a:ext>
+            </a:extLst>
+          </p:cNvPr>
+          <p:cNvSpPr txBox="1"/>
+          <p:nvPr/>
+        </p:nvSpPr>
+        <p:spPr>
+          <a:xfrm>
+            <a:off x="7430547" y="3738824"/>
+            <a:ext cx="2923566" cy="646331"/>
+          </a:xfrm>
+          <a:prstGeom prst="rect">
+            <a:avLst/>
+          </a:prstGeom>
+          <a:noFill/>
+        </p:spPr>
+        <p:txBody>
+          <a:bodyPr wrap="square" rtlCol="0">
+            <a:spAutoFit/>
+          </a:bodyPr>
+          <a:lstStyle/>
+          <a:p>
+            <a:pPr algn="ctr"/>
+            <a:r>
+              <a:rPr lang="en-US" b="1" dirty="0">
+                <a:solidFill>
+                  <a:srgbClr val="23DBCE"/>
+                </a:solidFill>
+              </a:rPr>
+              <a:t>15.5DCR Equivalent to</a:t>
+            </a:r>
+          </a:p>
+          <a:p>
+            <a:pPr algn="ctr"/>
+            <a:r>
+              <a:rPr lang="en-US" b="1" dirty="0">
+                <a:solidFill>
+                  <a:srgbClr val="23DBCE"/>
+                </a:solidFill>
+              </a:rPr>
+              <a:t>~11% of Ticket Value</a:t>
+            </a:r>
+          </a:p>
+        </p:txBody>
+      </p:sp>
+      <p:pic>
+        <p:nvPicPr>
+          <p:cNvPr id="18" name="Picture 17">
+            <a:extLst>
+              <a:ext uri="{FF2B5EF4-FFF2-40B4-BE49-F238E27FC236}">
+                <a16:creationId xmlns:a16="http://schemas.microsoft.com/office/drawing/2014/main" id="{0EB0F4AF-7A41-4CFF-B658-C33AE0885AC7}"/>
+              </a:ext>
+            </a:extLst>
+          </p:cNvPr>
+          <p:cNvPicPr>
+            <a:picLocks noChangeAspect="1"/>
+          </p:cNvPicPr>
+          <p:nvPr/>
+        </p:nvPicPr>
+        <p:blipFill>
+          <a:blip r:embed="rId4"/>
+          <a:stretch>
+            <a:fillRect/>
+          </a:stretch>
+        </p:blipFill>
+        <p:spPr>
+          <a:xfrm>
+            <a:off x="2338387" y="247208"/>
+            <a:ext cx="6276975" cy="657225"/>
+          </a:xfrm>
+          <a:prstGeom prst="rect">
+            <a:avLst/>
+          </a:prstGeom>
+        </p:spPr>
+      </p:pic>
+    </p:spTree>
+    <p:extLst>
+      <p:ext uri="{BB962C8B-B14F-4D97-AF65-F5344CB8AC3E}">
+        <p14:creationId xmlns:p14="http://schemas.microsoft.com/office/powerpoint/2010/main" val="2945493968"/>
+      </p:ext>
+    </p:extLst>
+  </p:cSld>
+  <p:clrMapOvr>
+    <a:masterClrMapping/>
+  </p:clrMapOvr>
+</p:sld>
+</file>
+
+<file path=ppt/slides/slide32.xml><?xml version="1.0" encoding="utf-8"?>
+<p:sld xmlns:a="http://schemas.openxmlformats.org/drawingml/2006/main" xmlns:r="http://schemas.openxmlformats.org/officeDocument/2006/relationships" xmlns:p="http://schemas.openxmlformats.org/presentationml/2006/main">
+  <p:cSld>
+    <p:spTree>
+      <p:nvGrpSpPr>
+        <p:cNvPr id="1" name=""/>
+        <p:cNvGrpSpPr/>
+        <p:nvPr/>
+      </p:nvGrpSpPr>
+      <p:grpSpPr>
+        <a:xfrm>
+          <a:off x="0" y="0"/>
+          <a:ext cx="0" cy="0"/>
+          <a:chOff x="0" y="0"/>
+          <a:chExt cx="0" cy="0"/>
+        </a:xfrm>
+      </p:grpSpPr>
+      <p:sp>
+        <p:nvSpPr>
+          <p:cNvPr id="2" name="Title 1">
+            <a:extLst>
+              <a:ext uri="{FF2B5EF4-FFF2-40B4-BE49-F238E27FC236}">
+                <a16:creationId xmlns:a16="http://schemas.microsoft.com/office/drawing/2014/main" id="{DB9E8E45-3BE1-4C78-8472-1714E89AB129}"/>
+              </a:ext>
+            </a:extLst>
+          </p:cNvPr>
+          <p:cNvSpPr>
+            <a:spLocks noGrp="1"/>
+          </p:cNvSpPr>
+          <p:nvPr>
+            <p:ph type="title"/>
+          </p:nvPr>
+        </p:nvSpPr>
+        <p:spPr/>
+        <p:txBody>
+          <a:bodyPr/>
+          <a:lstStyle/>
+          <a:p>
+            <a:r>
+              <a:rPr lang="en-US" dirty="0"/>
+              <a:t>Summary</a:t>
+            </a:r>
+            <a:endParaRPr lang="en-AU" dirty="0"/>
+          </a:p>
+        </p:txBody>
+      </p:sp>
+      <p:sp>
+        <p:nvSpPr>
+          <p:cNvPr id="3" name="Content Placeholder 2">
+            <a:extLst>
+              <a:ext uri="{FF2B5EF4-FFF2-40B4-BE49-F238E27FC236}">
+                <a16:creationId xmlns:a16="http://schemas.microsoft.com/office/drawing/2014/main" id="{32132A16-D761-4B9A-9032-B5A4FC5198EE}"/>
+              </a:ext>
+            </a:extLst>
+          </p:cNvPr>
+          <p:cNvSpPr>
+            <a:spLocks noGrp="1"/>
+          </p:cNvSpPr>
+          <p:nvPr>
+            <p:ph idx="1"/>
+          </p:nvPr>
+        </p:nvSpPr>
+        <p:spPr/>
+        <p:txBody>
+          <a:bodyPr>
+            <a:normAutofit fontScale="92500" lnSpcReduction="10000"/>
+          </a:bodyPr>
+          <a:lstStyle/>
+          <a:p>
+            <a:r>
+              <a:rPr lang="en-US" dirty="0"/>
+              <a:t>The Decred blockchain has a unique blend of:</a:t>
+            </a:r>
+          </a:p>
+          <a:p>
+            <a:pPr marL="457200" indent="-457200">
+              <a:buFont typeface="Arial" panose="020B0604020202020204" pitchFamily="34" charset="0"/>
+              <a:buChar char="•"/>
+            </a:pPr>
+            <a:r>
+              <a:rPr lang="en-US" b="1" dirty="0"/>
+              <a:t>Machine Consensus </a:t>
+            </a:r>
+            <a:r>
+              <a:rPr lang="en-US" dirty="0"/>
+              <a:t>in Proof-of-Work</a:t>
+            </a:r>
+          </a:p>
+          <a:p>
+            <a:pPr marL="457200" indent="-457200">
+              <a:buFont typeface="Arial" panose="020B0604020202020204" pitchFamily="34" charset="0"/>
+              <a:buChar char="•"/>
+            </a:pPr>
+            <a:r>
+              <a:rPr lang="en-US" b="1" dirty="0"/>
+              <a:t>Human Consensus </a:t>
+            </a:r>
+            <a:r>
+              <a:rPr lang="en-US" dirty="0"/>
+              <a:t>in Proof-of-Stake</a:t>
+            </a:r>
+          </a:p>
+          <a:p>
+            <a:pPr marL="457200" indent="-457200">
+              <a:buFont typeface="Arial" panose="020B0604020202020204" pitchFamily="34" charset="0"/>
+              <a:buChar char="•"/>
+            </a:pPr>
+            <a:endParaRPr lang="en-US" dirty="0"/>
+          </a:p>
+          <a:p>
+            <a:r>
+              <a:rPr lang="en-US" dirty="0"/>
+              <a:t>Holding DCR and participation in governance via tickets is a very high conviction signal of Network Sentiment.</a:t>
+            </a:r>
+          </a:p>
+          <a:p>
+            <a:endParaRPr lang="en-US" dirty="0"/>
+          </a:p>
+          <a:p>
+            <a:r>
+              <a:rPr lang="en-US" dirty="0"/>
+              <a:t>Cost Basis models provides insight into the economic stress or euphoria for various stakeholder and participants.</a:t>
+            </a:r>
+            <a:endParaRPr lang="en-AU" dirty="0"/>
+          </a:p>
+        </p:txBody>
+      </p:sp>
+    </p:spTree>
+    <p:extLst>
+      <p:ext uri="{BB962C8B-B14F-4D97-AF65-F5344CB8AC3E}">
+        <p14:creationId xmlns:p14="http://schemas.microsoft.com/office/powerpoint/2010/main" val="2900114589"/>
+      </p:ext>
+    </p:extLst>
+  </p:cSld>
+  <p:clrMapOvr>
+    <a:masterClrMapping/>
+  </p:clrMapOvr>
+</p:sld>
+</file>
+
+<file path=ppt/slides/slide33.xml><?xml version="1.0" encoding="utf-8"?>
+<p:sld xmlns:a="http://schemas.openxmlformats.org/drawingml/2006/main" xmlns:r="http://schemas.openxmlformats.org/officeDocument/2006/relationships" xmlns:p="http://schemas.openxmlformats.org/presentationml/2006/main">
+  <p:cSld>
+    <p:spTree>
+      <p:nvGrpSpPr>
+        <p:cNvPr id="1" name=""/>
+        <p:cNvGrpSpPr/>
+        <p:nvPr/>
+      </p:nvGrpSpPr>
+      <p:grpSpPr>
+        <a:xfrm>
+          <a:off x="0" y="0"/>
+          <a:ext cx="0" cy="0"/>
+          <a:chOff x="0" y="0"/>
+          <a:chExt cx="0" cy="0"/>
+        </a:xfrm>
+      </p:grpSpPr>
+      <p:sp>
+        <p:nvSpPr>
           <p:cNvPr id="2" name="Title 1">
             <a:extLst>
               <a:ext uri="{FF2B5EF4-FFF2-40B4-BE49-F238E27FC236}">
@@ -13460,7 +15668,11 @@
           <a:bodyPr/>
           <a:lstStyle/>
           <a:p>
-            <a:endParaRPr lang="en-AU"/>
+            <a:r>
+              <a:rPr lang="en-US" dirty="0"/>
+              <a:t>Realised Price is a metric that prices each UTXO at the time it last moved, representing the aggregate ‘cost basis’ of the market.</a:t>
+            </a:r>
+            <a:endParaRPr lang="en-AU" dirty="0"/>
           </a:p>
         </p:txBody>
       </p:sp>
@@ -17570,7 +19782,7 @@
           <p:cNvPr id="2" name="Title 1">
             <a:extLst>
               <a:ext uri="{FF2B5EF4-FFF2-40B4-BE49-F238E27FC236}">
-                <a16:creationId xmlns:a16="http://schemas.microsoft.com/office/drawing/2014/main" id="{0D8D6E23-A9D9-4BDA-8337-C6A01F6E438A}"/>
+                <a16:creationId xmlns:a16="http://schemas.microsoft.com/office/drawing/2014/main" id="{3F7CE378-E931-4054-BFD0-3B52578867C3}"/>
               </a:ext>
             </a:extLst>
           </p:cNvPr>
@@ -17578,7 +19790,7 @@
             <a:spLocks noGrp="1"/>
           </p:cNvSpPr>
           <p:nvPr>
-            <p:ph type="ctrTitle"/>
+            <p:ph type="title"/>
           </p:nvPr>
         </p:nvSpPr>
         <p:spPr/>
@@ -17586,20 +19798,16 @@
           <a:bodyPr/>
           <a:lstStyle/>
           <a:p>
-            <a:r>
-              <a:rPr lang="en-US" dirty="0"/>
-              <a:t>142-Day Sum of USD Ticket Value</a:t>
-            </a:r>
-            <a:endParaRPr lang="en-AU" dirty="0"/>
+            <a:endParaRPr lang="en-AU"/>
           </a:p>
         </p:txBody>
       </p:sp>
       <p:sp>
         <p:nvSpPr>
-          <p:cNvPr id="3" name="Subtitle 2">
-            <a:extLst>
-              <a:ext uri="{FF2B5EF4-FFF2-40B4-BE49-F238E27FC236}">
-                <a16:creationId xmlns:a16="http://schemas.microsoft.com/office/drawing/2014/main" id="{47CCABE3-5CA9-49CE-B1EB-BAA7C056352B}"/>
+          <p:cNvPr id="3" name="Content Placeholder 2">
+            <a:extLst>
+              <a:ext uri="{FF2B5EF4-FFF2-40B4-BE49-F238E27FC236}">
+                <a16:creationId xmlns:a16="http://schemas.microsoft.com/office/drawing/2014/main" id="{BCA473F6-CB0D-4578-A826-025643FE2CF8}"/>
               </a:ext>
             </a:extLst>
           </p:cNvPr>
@@ -17607,10 +19815,16 @@
             <a:spLocks noGrp="1"/>
           </p:cNvSpPr>
           <p:nvPr>
-            <p:ph type="subTitle" idx="1"/>
+            <p:ph idx="1"/>
           </p:nvPr>
         </p:nvSpPr>
-        <p:spPr/>
+        <p:spPr>
+          <a:ln w="28575">
+            <a:solidFill>
+              <a:schemeClr val="tx1"/>
+            </a:solidFill>
+          </a:ln>
+        </p:spPr>
         <p:txBody>
           <a:bodyPr/>
           <a:lstStyle/>
@@ -17619,10 +19833,1712 @@
           </a:p>
         </p:txBody>
       </p:sp>
+      <p:pic>
+        <p:nvPicPr>
+          <p:cNvPr id="4" name="Picture 3">
+            <a:extLst>
+              <a:ext uri="{FF2B5EF4-FFF2-40B4-BE49-F238E27FC236}">
+                <a16:creationId xmlns:a16="http://schemas.microsoft.com/office/drawing/2014/main" id="{1AAF2233-E9A7-4338-A9D8-0760D15F7B30}"/>
+              </a:ext>
+            </a:extLst>
+          </p:cNvPr>
+          <p:cNvPicPr>
+            <a:picLocks noChangeAspect="1"/>
+          </p:cNvPicPr>
+          <p:nvPr/>
+        </p:nvPicPr>
+        <p:blipFill>
+          <a:blip r:embed="rId2"/>
+          <a:stretch>
+            <a:fillRect/>
+          </a:stretch>
+        </p:blipFill>
+        <p:spPr>
+          <a:xfrm>
+            <a:off x="0" y="754811"/>
+            <a:ext cx="12192000" cy="5348377"/>
+          </a:xfrm>
+          <a:prstGeom prst="rect">
+            <a:avLst/>
+          </a:prstGeom>
+        </p:spPr>
+      </p:pic>
+      <p:cxnSp>
+        <p:nvCxnSpPr>
+          <p:cNvPr id="5" name="Straight Arrow Connector 4">
+            <a:extLst>
+              <a:ext uri="{FF2B5EF4-FFF2-40B4-BE49-F238E27FC236}">
+                <a16:creationId xmlns:a16="http://schemas.microsoft.com/office/drawing/2014/main" id="{48163C30-C029-4965-B876-74E4CD74A463}"/>
+              </a:ext>
+            </a:extLst>
+          </p:cNvPr>
+          <p:cNvCxnSpPr>
+            <a:cxnSpLocks/>
+          </p:cNvCxnSpPr>
+          <p:nvPr/>
+        </p:nvCxnSpPr>
+        <p:spPr>
+          <a:xfrm flipV="1">
+            <a:off x="3813245" y="4248493"/>
+            <a:ext cx="0" cy="164982"/>
+          </a:xfrm>
+          <a:prstGeom prst="straightConnector1">
+            <a:avLst/>
+          </a:prstGeom>
+          <a:ln w="28575">
+            <a:solidFill>
+              <a:srgbClr val="00A84C"/>
+            </a:solidFill>
+            <a:tailEnd type="triangle"/>
+          </a:ln>
+        </p:spPr>
+        <p:style>
+          <a:lnRef idx="1">
+            <a:schemeClr val="accent1"/>
+          </a:lnRef>
+          <a:fillRef idx="0">
+            <a:schemeClr val="accent1"/>
+          </a:fillRef>
+          <a:effectRef idx="0">
+            <a:schemeClr val="accent1"/>
+          </a:effectRef>
+          <a:fontRef idx="minor">
+            <a:schemeClr val="tx1"/>
+          </a:fontRef>
+        </p:style>
+      </p:cxnSp>
+      <p:cxnSp>
+        <p:nvCxnSpPr>
+          <p:cNvPr id="6" name="Straight Arrow Connector 5">
+            <a:extLst>
+              <a:ext uri="{FF2B5EF4-FFF2-40B4-BE49-F238E27FC236}">
+                <a16:creationId xmlns:a16="http://schemas.microsoft.com/office/drawing/2014/main" id="{BCEB65A6-6D9C-462B-B4B2-33FA9D628E46}"/>
+              </a:ext>
+            </a:extLst>
+          </p:cNvPr>
+          <p:cNvCxnSpPr>
+            <a:cxnSpLocks/>
+          </p:cNvCxnSpPr>
+          <p:nvPr/>
+        </p:nvCxnSpPr>
+        <p:spPr>
+          <a:xfrm flipV="1">
+            <a:off x="3775145" y="2902293"/>
+            <a:ext cx="0" cy="164982"/>
+          </a:xfrm>
+          <a:prstGeom prst="straightConnector1">
+            <a:avLst/>
+          </a:prstGeom>
+          <a:ln w="28575">
+            <a:solidFill>
+              <a:srgbClr val="00A84C"/>
+            </a:solidFill>
+            <a:tailEnd type="triangle"/>
+          </a:ln>
+        </p:spPr>
+        <p:style>
+          <a:lnRef idx="1">
+            <a:schemeClr val="accent1"/>
+          </a:lnRef>
+          <a:fillRef idx="0">
+            <a:schemeClr val="accent1"/>
+          </a:fillRef>
+          <a:effectRef idx="0">
+            <a:schemeClr val="accent1"/>
+          </a:effectRef>
+          <a:fontRef idx="minor">
+            <a:schemeClr val="tx1"/>
+          </a:fontRef>
+        </p:style>
+      </p:cxnSp>
+      <p:cxnSp>
+        <p:nvCxnSpPr>
+          <p:cNvPr id="8" name="Straight Arrow Connector 7">
+            <a:extLst>
+              <a:ext uri="{FF2B5EF4-FFF2-40B4-BE49-F238E27FC236}">
+                <a16:creationId xmlns:a16="http://schemas.microsoft.com/office/drawing/2014/main" id="{D26C1703-EE96-44D4-BC4D-3D0DA7E15D29}"/>
+              </a:ext>
+            </a:extLst>
+          </p:cNvPr>
+          <p:cNvCxnSpPr>
+            <a:cxnSpLocks/>
+          </p:cNvCxnSpPr>
+          <p:nvPr/>
+        </p:nvCxnSpPr>
+        <p:spPr>
+          <a:xfrm flipV="1">
+            <a:off x="3032195" y="4213568"/>
+            <a:ext cx="0" cy="164982"/>
+          </a:xfrm>
+          <a:prstGeom prst="straightConnector1">
+            <a:avLst/>
+          </a:prstGeom>
+          <a:ln w="28575">
+            <a:solidFill>
+              <a:srgbClr val="00A84C"/>
+            </a:solidFill>
+            <a:tailEnd type="triangle"/>
+          </a:ln>
+        </p:spPr>
+        <p:style>
+          <a:lnRef idx="1">
+            <a:schemeClr val="accent1"/>
+          </a:lnRef>
+          <a:fillRef idx="0">
+            <a:schemeClr val="accent1"/>
+          </a:fillRef>
+          <a:effectRef idx="0">
+            <a:schemeClr val="accent1"/>
+          </a:effectRef>
+          <a:fontRef idx="minor">
+            <a:schemeClr val="tx1"/>
+          </a:fontRef>
+        </p:style>
+      </p:cxnSp>
+      <p:cxnSp>
+        <p:nvCxnSpPr>
+          <p:cNvPr id="9" name="Straight Arrow Connector 8">
+            <a:extLst>
+              <a:ext uri="{FF2B5EF4-FFF2-40B4-BE49-F238E27FC236}">
+                <a16:creationId xmlns:a16="http://schemas.microsoft.com/office/drawing/2014/main" id="{23E165D9-7FFE-4A4A-B1E1-E514915A49F4}"/>
+              </a:ext>
+            </a:extLst>
+          </p:cNvPr>
+          <p:cNvCxnSpPr>
+            <a:cxnSpLocks/>
+          </p:cNvCxnSpPr>
+          <p:nvPr/>
+        </p:nvCxnSpPr>
+        <p:spPr>
+          <a:xfrm flipV="1">
+            <a:off x="3006795" y="3651593"/>
+            <a:ext cx="0" cy="164982"/>
+          </a:xfrm>
+          <a:prstGeom prst="straightConnector1">
+            <a:avLst/>
+          </a:prstGeom>
+          <a:ln w="28575">
+            <a:solidFill>
+              <a:srgbClr val="00A84C"/>
+            </a:solidFill>
+            <a:tailEnd type="triangle"/>
+          </a:ln>
+        </p:spPr>
+        <p:style>
+          <a:lnRef idx="1">
+            <a:schemeClr val="accent1"/>
+          </a:lnRef>
+          <a:fillRef idx="0">
+            <a:schemeClr val="accent1"/>
+          </a:fillRef>
+          <a:effectRef idx="0">
+            <a:schemeClr val="accent1"/>
+          </a:effectRef>
+          <a:fontRef idx="minor">
+            <a:schemeClr val="tx1"/>
+          </a:fontRef>
+        </p:style>
+      </p:cxnSp>
+      <p:cxnSp>
+        <p:nvCxnSpPr>
+          <p:cNvPr id="10" name="Straight Arrow Connector 9">
+            <a:extLst>
+              <a:ext uri="{FF2B5EF4-FFF2-40B4-BE49-F238E27FC236}">
+                <a16:creationId xmlns:a16="http://schemas.microsoft.com/office/drawing/2014/main" id="{E7EF0A4B-6AC4-4B01-8ECB-53C4138BC367}"/>
+              </a:ext>
+            </a:extLst>
+          </p:cNvPr>
+          <p:cNvCxnSpPr>
+            <a:cxnSpLocks/>
+          </p:cNvCxnSpPr>
+          <p:nvPr/>
+        </p:nvCxnSpPr>
+        <p:spPr>
+          <a:xfrm flipV="1">
+            <a:off x="4279970" y="4248493"/>
+            <a:ext cx="0" cy="164982"/>
+          </a:xfrm>
+          <a:prstGeom prst="straightConnector1">
+            <a:avLst/>
+          </a:prstGeom>
+          <a:ln w="28575">
+            <a:solidFill>
+              <a:srgbClr val="00A84C"/>
+            </a:solidFill>
+            <a:tailEnd type="triangle"/>
+          </a:ln>
+        </p:spPr>
+        <p:style>
+          <a:lnRef idx="1">
+            <a:schemeClr val="accent1"/>
+          </a:lnRef>
+          <a:fillRef idx="0">
+            <a:schemeClr val="accent1"/>
+          </a:fillRef>
+          <a:effectRef idx="0">
+            <a:schemeClr val="accent1"/>
+          </a:effectRef>
+          <a:fontRef idx="minor">
+            <a:schemeClr val="tx1"/>
+          </a:fontRef>
+        </p:style>
+      </p:cxnSp>
+      <p:cxnSp>
+        <p:nvCxnSpPr>
+          <p:cNvPr id="11" name="Straight Arrow Connector 10">
+            <a:extLst>
+              <a:ext uri="{FF2B5EF4-FFF2-40B4-BE49-F238E27FC236}">
+                <a16:creationId xmlns:a16="http://schemas.microsoft.com/office/drawing/2014/main" id="{A4E9F97C-5C1B-40A3-9658-D7CD8C48C439}"/>
+              </a:ext>
+            </a:extLst>
+          </p:cNvPr>
+          <p:cNvCxnSpPr>
+            <a:cxnSpLocks/>
+          </p:cNvCxnSpPr>
+          <p:nvPr/>
+        </p:nvCxnSpPr>
+        <p:spPr>
+          <a:xfrm flipV="1">
+            <a:off x="4260990" y="2797861"/>
+            <a:ext cx="0" cy="164982"/>
+          </a:xfrm>
+          <a:prstGeom prst="straightConnector1">
+            <a:avLst/>
+          </a:prstGeom>
+          <a:ln w="28575">
+            <a:solidFill>
+              <a:srgbClr val="00A84C"/>
+            </a:solidFill>
+            <a:tailEnd type="triangle"/>
+          </a:ln>
+        </p:spPr>
+        <p:style>
+          <a:lnRef idx="1">
+            <a:schemeClr val="accent1"/>
+          </a:lnRef>
+          <a:fillRef idx="0">
+            <a:schemeClr val="accent1"/>
+          </a:fillRef>
+          <a:effectRef idx="0">
+            <a:schemeClr val="accent1"/>
+          </a:effectRef>
+          <a:fontRef idx="minor">
+            <a:schemeClr val="tx1"/>
+          </a:fontRef>
+        </p:style>
+      </p:cxnSp>
+      <p:cxnSp>
+        <p:nvCxnSpPr>
+          <p:cNvPr id="12" name="Straight Arrow Connector 11">
+            <a:extLst>
+              <a:ext uri="{FF2B5EF4-FFF2-40B4-BE49-F238E27FC236}">
+                <a16:creationId xmlns:a16="http://schemas.microsoft.com/office/drawing/2014/main" id="{4ABA4722-C1BD-4012-9C73-0C9E44A95272}"/>
+              </a:ext>
+            </a:extLst>
+          </p:cNvPr>
+          <p:cNvCxnSpPr>
+            <a:cxnSpLocks/>
+          </p:cNvCxnSpPr>
+          <p:nvPr/>
+        </p:nvCxnSpPr>
+        <p:spPr>
+          <a:xfrm flipV="1">
+            <a:off x="5080070" y="4248493"/>
+            <a:ext cx="0" cy="164982"/>
+          </a:xfrm>
+          <a:prstGeom prst="straightConnector1">
+            <a:avLst/>
+          </a:prstGeom>
+          <a:ln w="28575">
+            <a:solidFill>
+              <a:srgbClr val="00A84C"/>
+            </a:solidFill>
+            <a:tailEnd type="triangle"/>
+          </a:ln>
+        </p:spPr>
+        <p:style>
+          <a:lnRef idx="1">
+            <a:schemeClr val="accent1"/>
+          </a:lnRef>
+          <a:fillRef idx="0">
+            <a:schemeClr val="accent1"/>
+          </a:fillRef>
+          <a:effectRef idx="0">
+            <a:schemeClr val="accent1"/>
+          </a:effectRef>
+          <a:fontRef idx="minor">
+            <a:schemeClr val="tx1"/>
+          </a:fontRef>
+        </p:style>
+      </p:cxnSp>
+      <p:cxnSp>
+        <p:nvCxnSpPr>
+          <p:cNvPr id="13" name="Straight Arrow Connector 12">
+            <a:extLst>
+              <a:ext uri="{FF2B5EF4-FFF2-40B4-BE49-F238E27FC236}">
+                <a16:creationId xmlns:a16="http://schemas.microsoft.com/office/drawing/2014/main" id="{0035609B-54B7-402F-9D25-EF49F639B8D2}"/>
+              </a:ext>
+            </a:extLst>
+          </p:cNvPr>
+          <p:cNvCxnSpPr>
+            <a:cxnSpLocks/>
+          </p:cNvCxnSpPr>
+          <p:nvPr/>
+        </p:nvCxnSpPr>
+        <p:spPr>
+          <a:xfrm flipV="1">
+            <a:off x="5032445" y="2594318"/>
+            <a:ext cx="0" cy="164982"/>
+          </a:xfrm>
+          <a:prstGeom prst="straightConnector1">
+            <a:avLst/>
+          </a:prstGeom>
+          <a:ln w="28575">
+            <a:solidFill>
+              <a:srgbClr val="00A84C"/>
+            </a:solidFill>
+            <a:tailEnd type="triangle"/>
+          </a:ln>
+        </p:spPr>
+        <p:style>
+          <a:lnRef idx="1">
+            <a:schemeClr val="accent1"/>
+          </a:lnRef>
+          <a:fillRef idx="0">
+            <a:schemeClr val="accent1"/>
+          </a:fillRef>
+          <a:effectRef idx="0">
+            <a:schemeClr val="accent1"/>
+          </a:effectRef>
+          <a:fontRef idx="minor">
+            <a:schemeClr val="tx1"/>
+          </a:fontRef>
+        </p:style>
+      </p:cxnSp>
+      <p:cxnSp>
+        <p:nvCxnSpPr>
+          <p:cNvPr id="14" name="Straight Arrow Connector 13">
+            <a:extLst>
+              <a:ext uri="{FF2B5EF4-FFF2-40B4-BE49-F238E27FC236}">
+                <a16:creationId xmlns:a16="http://schemas.microsoft.com/office/drawing/2014/main" id="{7C62BEB6-5AAB-4D96-8778-C66337DCBEC1}"/>
+              </a:ext>
+            </a:extLst>
+          </p:cNvPr>
+          <p:cNvCxnSpPr>
+            <a:cxnSpLocks/>
+          </p:cNvCxnSpPr>
+          <p:nvPr/>
+        </p:nvCxnSpPr>
+        <p:spPr>
+          <a:xfrm flipV="1">
+            <a:off x="5842070" y="4213568"/>
+            <a:ext cx="0" cy="164982"/>
+          </a:xfrm>
+          <a:prstGeom prst="straightConnector1">
+            <a:avLst/>
+          </a:prstGeom>
+          <a:ln w="28575">
+            <a:solidFill>
+              <a:srgbClr val="00A84C"/>
+            </a:solidFill>
+            <a:tailEnd type="triangle"/>
+          </a:ln>
+        </p:spPr>
+        <p:style>
+          <a:lnRef idx="1">
+            <a:schemeClr val="accent1"/>
+          </a:lnRef>
+          <a:fillRef idx="0">
+            <a:schemeClr val="accent1"/>
+          </a:fillRef>
+          <a:effectRef idx="0">
+            <a:schemeClr val="accent1"/>
+          </a:effectRef>
+          <a:fontRef idx="minor">
+            <a:schemeClr val="tx1"/>
+          </a:fontRef>
+        </p:style>
+      </p:cxnSp>
+      <p:cxnSp>
+        <p:nvCxnSpPr>
+          <p:cNvPr id="15" name="Straight Arrow Connector 14">
+            <a:extLst>
+              <a:ext uri="{FF2B5EF4-FFF2-40B4-BE49-F238E27FC236}">
+                <a16:creationId xmlns:a16="http://schemas.microsoft.com/office/drawing/2014/main" id="{27F1799C-BD1F-4545-90F4-ECDAD6C9B978}"/>
+              </a:ext>
+            </a:extLst>
+          </p:cNvPr>
+          <p:cNvCxnSpPr>
+            <a:cxnSpLocks/>
+          </p:cNvCxnSpPr>
+          <p:nvPr/>
+        </p:nvCxnSpPr>
+        <p:spPr>
+          <a:xfrm flipV="1">
+            <a:off x="5842070" y="2572093"/>
+            <a:ext cx="0" cy="164982"/>
+          </a:xfrm>
+          <a:prstGeom prst="straightConnector1">
+            <a:avLst/>
+          </a:prstGeom>
+          <a:ln w="28575">
+            <a:solidFill>
+              <a:srgbClr val="00A84C"/>
+            </a:solidFill>
+            <a:tailEnd type="triangle"/>
+          </a:ln>
+        </p:spPr>
+        <p:style>
+          <a:lnRef idx="1">
+            <a:schemeClr val="accent1"/>
+          </a:lnRef>
+          <a:fillRef idx="0">
+            <a:schemeClr val="accent1"/>
+          </a:fillRef>
+          <a:effectRef idx="0">
+            <a:schemeClr val="accent1"/>
+          </a:effectRef>
+          <a:fontRef idx="minor">
+            <a:schemeClr val="tx1"/>
+          </a:fontRef>
+        </p:style>
+      </p:cxnSp>
+      <p:cxnSp>
+        <p:nvCxnSpPr>
+          <p:cNvPr id="16" name="Straight Arrow Connector 15">
+            <a:extLst>
+              <a:ext uri="{FF2B5EF4-FFF2-40B4-BE49-F238E27FC236}">
+                <a16:creationId xmlns:a16="http://schemas.microsoft.com/office/drawing/2014/main" id="{A3E70570-825D-4967-8FA2-953D3E2273A8}"/>
+              </a:ext>
+            </a:extLst>
+          </p:cNvPr>
+          <p:cNvCxnSpPr>
+            <a:cxnSpLocks/>
+          </p:cNvCxnSpPr>
+          <p:nvPr/>
+        </p:nvCxnSpPr>
+        <p:spPr>
+          <a:xfrm flipV="1">
+            <a:off x="6423095" y="4213568"/>
+            <a:ext cx="0" cy="164982"/>
+          </a:xfrm>
+          <a:prstGeom prst="straightConnector1">
+            <a:avLst/>
+          </a:prstGeom>
+          <a:ln w="28575">
+            <a:solidFill>
+              <a:srgbClr val="00A84C"/>
+            </a:solidFill>
+            <a:tailEnd type="triangle"/>
+          </a:ln>
+        </p:spPr>
+        <p:style>
+          <a:lnRef idx="1">
+            <a:schemeClr val="accent1"/>
+          </a:lnRef>
+          <a:fillRef idx="0">
+            <a:schemeClr val="accent1"/>
+          </a:fillRef>
+          <a:effectRef idx="0">
+            <a:schemeClr val="accent1"/>
+          </a:effectRef>
+          <a:fontRef idx="minor">
+            <a:schemeClr val="tx1"/>
+          </a:fontRef>
+        </p:style>
+      </p:cxnSp>
+      <p:cxnSp>
+        <p:nvCxnSpPr>
+          <p:cNvPr id="17" name="Straight Arrow Connector 16">
+            <a:extLst>
+              <a:ext uri="{FF2B5EF4-FFF2-40B4-BE49-F238E27FC236}">
+                <a16:creationId xmlns:a16="http://schemas.microsoft.com/office/drawing/2014/main" id="{287D74E2-812F-4B37-A706-811117DDE3EF}"/>
+              </a:ext>
+            </a:extLst>
+          </p:cNvPr>
+          <p:cNvCxnSpPr>
+            <a:cxnSpLocks/>
+          </p:cNvCxnSpPr>
+          <p:nvPr/>
+        </p:nvCxnSpPr>
+        <p:spPr>
+          <a:xfrm flipV="1">
+            <a:off x="6375470" y="2845143"/>
+            <a:ext cx="0" cy="164982"/>
+          </a:xfrm>
+          <a:prstGeom prst="straightConnector1">
+            <a:avLst/>
+          </a:prstGeom>
+          <a:ln w="28575">
+            <a:solidFill>
+              <a:srgbClr val="00A84C"/>
+            </a:solidFill>
+            <a:tailEnd type="triangle"/>
+          </a:ln>
+        </p:spPr>
+        <p:style>
+          <a:lnRef idx="1">
+            <a:schemeClr val="accent1"/>
+          </a:lnRef>
+          <a:fillRef idx="0">
+            <a:schemeClr val="accent1"/>
+          </a:fillRef>
+          <a:effectRef idx="0">
+            <a:schemeClr val="accent1"/>
+          </a:effectRef>
+          <a:fontRef idx="minor">
+            <a:schemeClr val="tx1"/>
+          </a:fontRef>
+        </p:style>
+      </p:cxnSp>
+      <p:cxnSp>
+        <p:nvCxnSpPr>
+          <p:cNvPr id="18" name="Straight Arrow Connector 17">
+            <a:extLst>
+              <a:ext uri="{FF2B5EF4-FFF2-40B4-BE49-F238E27FC236}">
+                <a16:creationId xmlns:a16="http://schemas.microsoft.com/office/drawing/2014/main" id="{082B0D00-A966-4543-88E4-794E2D5805F5}"/>
+              </a:ext>
+            </a:extLst>
+          </p:cNvPr>
+          <p:cNvCxnSpPr>
+            <a:cxnSpLocks/>
+          </p:cNvCxnSpPr>
+          <p:nvPr/>
+        </p:nvCxnSpPr>
+        <p:spPr>
+          <a:xfrm flipV="1">
+            <a:off x="8023295" y="4213568"/>
+            <a:ext cx="0" cy="164982"/>
+          </a:xfrm>
+          <a:prstGeom prst="straightConnector1">
+            <a:avLst/>
+          </a:prstGeom>
+          <a:ln w="28575">
+            <a:solidFill>
+              <a:srgbClr val="00A84C"/>
+            </a:solidFill>
+            <a:tailEnd type="triangle"/>
+          </a:ln>
+        </p:spPr>
+        <p:style>
+          <a:lnRef idx="1">
+            <a:schemeClr val="accent1"/>
+          </a:lnRef>
+          <a:fillRef idx="0">
+            <a:schemeClr val="accent1"/>
+          </a:fillRef>
+          <a:effectRef idx="0">
+            <a:schemeClr val="accent1"/>
+          </a:effectRef>
+          <a:fontRef idx="minor">
+            <a:schemeClr val="tx1"/>
+          </a:fontRef>
+        </p:style>
+      </p:cxnSp>
+      <p:cxnSp>
+        <p:nvCxnSpPr>
+          <p:cNvPr id="19" name="Straight Arrow Connector 18">
+            <a:extLst>
+              <a:ext uri="{FF2B5EF4-FFF2-40B4-BE49-F238E27FC236}">
+                <a16:creationId xmlns:a16="http://schemas.microsoft.com/office/drawing/2014/main" id="{9E8C937E-AADD-4885-B639-9D1F026B0731}"/>
+              </a:ext>
+            </a:extLst>
+          </p:cNvPr>
+          <p:cNvCxnSpPr>
+            <a:cxnSpLocks/>
+          </p:cNvCxnSpPr>
+          <p:nvPr/>
+        </p:nvCxnSpPr>
+        <p:spPr>
+          <a:xfrm flipV="1">
+            <a:off x="8029715" y="2842536"/>
+            <a:ext cx="0" cy="164982"/>
+          </a:xfrm>
+          <a:prstGeom prst="straightConnector1">
+            <a:avLst/>
+          </a:prstGeom>
+          <a:ln w="28575">
+            <a:solidFill>
+              <a:srgbClr val="00A84C"/>
+            </a:solidFill>
+            <a:tailEnd type="triangle"/>
+          </a:ln>
+        </p:spPr>
+        <p:style>
+          <a:lnRef idx="1">
+            <a:schemeClr val="accent1"/>
+          </a:lnRef>
+          <a:fillRef idx="0">
+            <a:schemeClr val="accent1"/>
+          </a:fillRef>
+          <a:effectRef idx="0">
+            <a:schemeClr val="accent1"/>
+          </a:effectRef>
+          <a:fontRef idx="minor">
+            <a:schemeClr val="tx1"/>
+          </a:fontRef>
+        </p:style>
+      </p:cxnSp>
+      <p:cxnSp>
+        <p:nvCxnSpPr>
+          <p:cNvPr id="20" name="Straight Arrow Connector 19">
+            <a:extLst>
+              <a:ext uri="{FF2B5EF4-FFF2-40B4-BE49-F238E27FC236}">
+                <a16:creationId xmlns:a16="http://schemas.microsoft.com/office/drawing/2014/main" id="{59B165EA-8823-4CFC-B2E8-EBAD954E6C7F}"/>
+              </a:ext>
+            </a:extLst>
+          </p:cNvPr>
+          <p:cNvCxnSpPr>
+            <a:cxnSpLocks/>
+          </p:cNvCxnSpPr>
+          <p:nvPr/>
+        </p:nvCxnSpPr>
+        <p:spPr>
+          <a:xfrm flipV="1">
+            <a:off x="8458270" y="4213568"/>
+            <a:ext cx="0" cy="164982"/>
+          </a:xfrm>
+          <a:prstGeom prst="straightConnector1">
+            <a:avLst/>
+          </a:prstGeom>
+          <a:ln w="28575">
+            <a:solidFill>
+              <a:srgbClr val="00A84C"/>
+            </a:solidFill>
+            <a:tailEnd type="triangle"/>
+          </a:ln>
+        </p:spPr>
+        <p:style>
+          <a:lnRef idx="1">
+            <a:schemeClr val="accent1"/>
+          </a:lnRef>
+          <a:fillRef idx="0">
+            <a:schemeClr val="accent1"/>
+          </a:fillRef>
+          <a:effectRef idx="0">
+            <a:schemeClr val="accent1"/>
+          </a:effectRef>
+          <a:fontRef idx="minor">
+            <a:schemeClr val="tx1"/>
+          </a:fontRef>
+        </p:style>
+      </p:cxnSp>
+      <p:cxnSp>
+        <p:nvCxnSpPr>
+          <p:cNvPr id="21" name="Straight Arrow Connector 20">
+            <a:extLst>
+              <a:ext uri="{FF2B5EF4-FFF2-40B4-BE49-F238E27FC236}">
+                <a16:creationId xmlns:a16="http://schemas.microsoft.com/office/drawing/2014/main" id="{8522CD35-9C82-4701-87C5-E0AEDE203B46}"/>
+              </a:ext>
+            </a:extLst>
+          </p:cNvPr>
+          <p:cNvCxnSpPr>
+            <a:cxnSpLocks/>
+          </p:cNvCxnSpPr>
+          <p:nvPr/>
+        </p:nvCxnSpPr>
+        <p:spPr>
+          <a:xfrm flipV="1">
+            <a:off x="8458270" y="2759300"/>
+            <a:ext cx="0" cy="164982"/>
+          </a:xfrm>
+          <a:prstGeom prst="straightConnector1">
+            <a:avLst/>
+          </a:prstGeom>
+          <a:ln w="28575">
+            <a:solidFill>
+              <a:srgbClr val="00A84C"/>
+            </a:solidFill>
+            <a:tailEnd type="triangle"/>
+          </a:ln>
+        </p:spPr>
+        <p:style>
+          <a:lnRef idx="1">
+            <a:schemeClr val="accent1"/>
+          </a:lnRef>
+          <a:fillRef idx="0">
+            <a:schemeClr val="accent1"/>
+          </a:fillRef>
+          <a:effectRef idx="0">
+            <a:schemeClr val="accent1"/>
+          </a:effectRef>
+          <a:fontRef idx="minor">
+            <a:schemeClr val="tx1"/>
+          </a:fontRef>
+        </p:style>
+      </p:cxnSp>
+      <p:cxnSp>
+        <p:nvCxnSpPr>
+          <p:cNvPr id="22" name="Straight Arrow Connector 21">
+            <a:extLst>
+              <a:ext uri="{FF2B5EF4-FFF2-40B4-BE49-F238E27FC236}">
+                <a16:creationId xmlns:a16="http://schemas.microsoft.com/office/drawing/2014/main" id="{45438718-9F9E-406F-A153-A4D998CE3D31}"/>
+              </a:ext>
+            </a:extLst>
+          </p:cNvPr>
+          <p:cNvCxnSpPr>
+            <a:cxnSpLocks/>
+          </p:cNvCxnSpPr>
+          <p:nvPr/>
+        </p:nvCxnSpPr>
+        <p:spPr>
+          <a:xfrm flipV="1">
+            <a:off x="8899595" y="4213568"/>
+            <a:ext cx="0" cy="164982"/>
+          </a:xfrm>
+          <a:prstGeom prst="straightConnector1">
+            <a:avLst/>
+          </a:prstGeom>
+          <a:ln w="28575">
+            <a:solidFill>
+              <a:srgbClr val="00A84C"/>
+            </a:solidFill>
+            <a:tailEnd type="triangle"/>
+          </a:ln>
+        </p:spPr>
+        <p:style>
+          <a:lnRef idx="1">
+            <a:schemeClr val="accent1"/>
+          </a:lnRef>
+          <a:fillRef idx="0">
+            <a:schemeClr val="accent1"/>
+          </a:fillRef>
+          <a:effectRef idx="0">
+            <a:schemeClr val="accent1"/>
+          </a:effectRef>
+          <a:fontRef idx="minor">
+            <a:schemeClr val="tx1"/>
+          </a:fontRef>
+        </p:style>
+      </p:cxnSp>
+      <p:cxnSp>
+        <p:nvCxnSpPr>
+          <p:cNvPr id="23" name="Straight Arrow Connector 22">
+            <a:extLst>
+              <a:ext uri="{FF2B5EF4-FFF2-40B4-BE49-F238E27FC236}">
+                <a16:creationId xmlns:a16="http://schemas.microsoft.com/office/drawing/2014/main" id="{7AEB8F46-7554-4CB0-B628-A6572181EC8C}"/>
+              </a:ext>
+            </a:extLst>
+          </p:cNvPr>
+          <p:cNvCxnSpPr>
+            <a:cxnSpLocks/>
+          </p:cNvCxnSpPr>
+          <p:nvPr/>
+        </p:nvCxnSpPr>
+        <p:spPr>
+          <a:xfrm flipV="1">
+            <a:off x="8899595" y="2841791"/>
+            <a:ext cx="0" cy="164982"/>
+          </a:xfrm>
+          <a:prstGeom prst="straightConnector1">
+            <a:avLst/>
+          </a:prstGeom>
+          <a:ln w="28575">
+            <a:solidFill>
+              <a:srgbClr val="00A84C"/>
+            </a:solidFill>
+            <a:tailEnd type="triangle"/>
+          </a:ln>
+        </p:spPr>
+        <p:style>
+          <a:lnRef idx="1">
+            <a:schemeClr val="accent1"/>
+          </a:lnRef>
+          <a:fillRef idx="0">
+            <a:schemeClr val="accent1"/>
+          </a:fillRef>
+          <a:effectRef idx="0">
+            <a:schemeClr val="accent1"/>
+          </a:effectRef>
+          <a:fontRef idx="minor">
+            <a:schemeClr val="tx1"/>
+          </a:fontRef>
+        </p:style>
+      </p:cxnSp>
+      <p:cxnSp>
+        <p:nvCxnSpPr>
+          <p:cNvPr id="24" name="Straight Arrow Connector 23">
+            <a:extLst>
+              <a:ext uri="{FF2B5EF4-FFF2-40B4-BE49-F238E27FC236}">
+                <a16:creationId xmlns:a16="http://schemas.microsoft.com/office/drawing/2014/main" id="{61B6B81D-592E-463D-AA83-F55C89843B66}"/>
+              </a:ext>
+            </a:extLst>
+          </p:cNvPr>
+          <p:cNvCxnSpPr>
+            <a:cxnSpLocks/>
+          </p:cNvCxnSpPr>
+          <p:nvPr/>
+        </p:nvCxnSpPr>
+        <p:spPr>
+          <a:xfrm>
+            <a:off x="8609628" y="3950493"/>
+            <a:ext cx="0" cy="172418"/>
+          </a:xfrm>
+          <a:prstGeom prst="straightConnector1">
+            <a:avLst/>
+          </a:prstGeom>
+          <a:ln w="28575">
+            <a:solidFill>
+              <a:srgbClr val="F91727"/>
+            </a:solidFill>
+            <a:tailEnd type="triangle"/>
+          </a:ln>
+        </p:spPr>
+        <p:style>
+          <a:lnRef idx="1">
+            <a:schemeClr val="accent1"/>
+          </a:lnRef>
+          <a:fillRef idx="0">
+            <a:schemeClr val="accent1"/>
+          </a:fillRef>
+          <a:effectRef idx="0">
+            <a:schemeClr val="accent1"/>
+          </a:effectRef>
+          <a:fontRef idx="minor">
+            <a:schemeClr val="tx1"/>
+          </a:fontRef>
+        </p:style>
+      </p:cxnSp>
+      <p:cxnSp>
+        <p:nvCxnSpPr>
+          <p:cNvPr id="26" name="Straight Arrow Connector 25">
+            <a:extLst>
+              <a:ext uri="{FF2B5EF4-FFF2-40B4-BE49-F238E27FC236}">
+                <a16:creationId xmlns:a16="http://schemas.microsoft.com/office/drawing/2014/main" id="{478D58AC-F819-4BF9-84CB-DB9107574722}"/>
+              </a:ext>
+            </a:extLst>
+          </p:cNvPr>
+          <p:cNvCxnSpPr>
+            <a:cxnSpLocks/>
+          </p:cNvCxnSpPr>
+          <p:nvPr/>
+        </p:nvCxnSpPr>
+        <p:spPr>
+          <a:xfrm>
+            <a:off x="8605481" y="2421900"/>
+            <a:ext cx="0" cy="172418"/>
+          </a:xfrm>
+          <a:prstGeom prst="straightConnector1">
+            <a:avLst/>
+          </a:prstGeom>
+          <a:ln w="28575">
+            <a:solidFill>
+              <a:srgbClr val="F91727"/>
+            </a:solidFill>
+            <a:tailEnd type="triangle"/>
+          </a:ln>
+        </p:spPr>
+        <p:style>
+          <a:lnRef idx="1">
+            <a:schemeClr val="accent1"/>
+          </a:lnRef>
+          <a:fillRef idx="0">
+            <a:schemeClr val="accent1"/>
+          </a:fillRef>
+          <a:effectRef idx="0">
+            <a:schemeClr val="accent1"/>
+          </a:effectRef>
+          <a:fontRef idx="minor">
+            <a:schemeClr val="tx1"/>
+          </a:fontRef>
+        </p:style>
+      </p:cxnSp>
+      <p:cxnSp>
+        <p:nvCxnSpPr>
+          <p:cNvPr id="27" name="Straight Arrow Connector 26">
+            <a:extLst>
+              <a:ext uri="{FF2B5EF4-FFF2-40B4-BE49-F238E27FC236}">
+                <a16:creationId xmlns:a16="http://schemas.microsoft.com/office/drawing/2014/main" id="{DB2BC4E6-3B67-46D0-8175-BE5EBB05EF05}"/>
+              </a:ext>
+            </a:extLst>
+          </p:cNvPr>
+          <p:cNvCxnSpPr>
+            <a:cxnSpLocks/>
+          </p:cNvCxnSpPr>
+          <p:nvPr/>
+        </p:nvCxnSpPr>
+        <p:spPr>
+          <a:xfrm>
+            <a:off x="8222278" y="3950493"/>
+            <a:ext cx="0" cy="172418"/>
+          </a:xfrm>
+          <a:prstGeom prst="straightConnector1">
+            <a:avLst/>
+          </a:prstGeom>
+          <a:ln w="28575">
+            <a:solidFill>
+              <a:srgbClr val="F91727"/>
+            </a:solidFill>
+            <a:tailEnd type="triangle"/>
+          </a:ln>
+        </p:spPr>
+        <p:style>
+          <a:lnRef idx="1">
+            <a:schemeClr val="accent1"/>
+          </a:lnRef>
+          <a:fillRef idx="0">
+            <a:schemeClr val="accent1"/>
+          </a:fillRef>
+          <a:effectRef idx="0">
+            <a:schemeClr val="accent1"/>
+          </a:effectRef>
+          <a:fontRef idx="minor">
+            <a:schemeClr val="tx1"/>
+          </a:fontRef>
+        </p:style>
+      </p:cxnSp>
+      <p:cxnSp>
+        <p:nvCxnSpPr>
+          <p:cNvPr id="28" name="Straight Arrow Connector 27">
+            <a:extLst>
+              <a:ext uri="{FF2B5EF4-FFF2-40B4-BE49-F238E27FC236}">
+                <a16:creationId xmlns:a16="http://schemas.microsoft.com/office/drawing/2014/main" id="{C5A6B817-46A4-4710-9C0D-759DF347FDB2}"/>
+              </a:ext>
+            </a:extLst>
+          </p:cNvPr>
+          <p:cNvCxnSpPr>
+            <a:cxnSpLocks/>
+          </p:cNvCxnSpPr>
+          <p:nvPr/>
+        </p:nvCxnSpPr>
+        <p:spPr>
+          <a:xfrm>
+            <a:off x="8171478" y="2464936"/>
+            <a:ext cx="0" cy="172418"/>
+          </a:xfrm>
+          <a:prstGeom prst="straightConnector1">
+            <a:avLst/>
+          </a:prstGeom>
+          <a:ln w="28575">
+            <a:solidFill>
+              <a:srgbClr val="F91727"/>
+            </a:solidFill>
+            <a:tailEnd type="triangle"/>
+          </a:ln>
+        </p:spPr>
+        <p:style>
+          <a:lnRef idx="1">
+            <a:schemeClr val="accent1"/>
+          </a:lnRef>
+          <a:fillRef idx="0">
+            <a:schemeClr val="accent1"/>
+          </a:fillRef>
+          <a:effectRef idx="0">
+            <a:schemeClr val="accent1"/>
+          </a:effectRef>
+          <a:fontRef idx="minor">
+            <a:schemeClr val="tx1"/>
+          </a:fontRef>
+        </p:style>
+      </p:cxnSp>
+      <p:cxnSp>
+        <p:nvCxnSpPr>
+          <p:cNvPr id="29" name="Straight Arrow Connector 28">
+            <a:extLst>
+              <a:ext uri="{FF2B5EF4-FFF2-40B4-BE49-F238E27FC236}">
+                <a16:creationId xmlns:a16="http://schemas.microsoft.com/office/drawing/2014/main" id="{2D7E9BD5-F509-4E91-9059-47141A38FC22}"/>
+              </a:ext>
+            </a:extLst>
+          </p:cNvPr>
+          <p:cNvCxnSpPr>
+            <a:cxnSpLocks/>
+          </p:cNvCxnSpPr>
+          <p:nvPr/>
+        </p:nvCxnSpPr>
+        <p:spPr>
+          <a:xfrm>
+            <a:off x="7072928" y="3950493"/>
+            <a:ext cx="0" cy="172418"/>
+          </a:xfrm>
+          <a:prstGeom prst="straightConnector1">
+            <a:avLst/>
+          </a:prstGeom>
+          <a:ln w="28575">
+            <a:solidFill>
+              <a:srgbClr val="F91727"/>
+            </a:solidFill>
+            <a:tailEnd type="triangle"/>
+          </a:ln>
+        </p:spPr>
+        <p:style>
+          <a:lnRef idx="1">
+            <a:schemeClr val="accent1"/>
+          </a:lnRef>
+          <a:fillRef idx="0">
+            <a:schemeClr val="accent1"/>
+          </a:fillRef>
+          <a:effectRef idx="0">
+            <a:schemeClr val="accent1"/>
+          </a:effectRef>
+          <a:fontRef idx="minor">
+            <a:schemeClr val="tx1"/>
+          </a:fontRef>
+        </p:style>
+      </p:cxnSp>
+      <p:cxnSp>
+        <p:nvCxnSpPr>
+          <p:cNvPr id="30" name="Straight Arrow Connector 29">
+            <a:extLst>
+              <a:ext uri="{FF2B5EF4-FFF2-40B4-BE49-F238E27FC236}">
+                <a16:creationId xmlns:a16="http://schemas.microsoft.com/office/drawing/2014/main" id="{C3674DD7-2775-42A3-BBE6-8F83395A5FE4}"/>
+              </a:ext>
+            </a:extLst>
+          </p:cNvPr>
+          <p:cNvCxnSpPr>
+            <a:cxnSpLocks/>
+          </p:cNvCxnSpPr>
+          <p:nvPr/>
+        </p:nvCxnSpPr>
+        <p:spPr>
+          <a:xfrm>
+            <a:off x="7072928" y="2454927"/>
+            <a:ext cx="0" cy="172418"/>
+          </a:xfrm>
+          <a:prstGeom prst="straightConnector1">
+            <a:avLst/>
+          </a:prstGeom>
+          <a:ln w="28575">
+            <a:solidFill>
+              <a:srgbClr val="F91727"/>
+            </a:solidFill>
+            <a:tailEnd type="triangle"/>
+          </a:ln>
+        </p:spPr>
+        <p:style>
+          <a:lnRef idx="1">
+            <a:schemeClr val="accent1"/>
+          </a:lnRef>
+          <a:fillRef idx="0">
+            <a:schemeClr val="accent1"/>
+          </a:fillRef>
+          <a:effectRef idx="0">
+            <a:schemeClr val="accent1"/>
+          </a:effectRef>
+          <a:fontRef idx="minor">
+            <a:schemeClr val="tx1"/>
+          </a:fontRef>
+        </p:style>
+      </p:cxnSp>
+      <p:cxnSp>
+        <p:nvCxnSpPr>
+          <p:cNvPr id="31" name="Straight Arrow Connector 30">
+            <a:extLst>
+              <a:ext uri="{FF2B5EF4-FFF2-40B4-BE49-F238E27FC236}">
+                <a16:creationId xmlns:a16="http://schemas.microsoft.com/office/drawing/2014/main" id="{ED2E917A-34A6-4B90-B79E-30805628EEF4}"/>
+              </a:ext>
+            </a:extLst>
+          </p:cNvPr>
+          <p:cNvCxnSpPr>
+            <a:cxnSpLocks/>
+          </p:cNvCxnSpPr>
+          <p:nvPr/>
+        </p:nvCxnSpPr>
+        <p:spPr>
+          <a:xfrm>
+            <a:off x="7466628" y="3950493"/>
+            <a:ext cx="0" cy="172418"/>
+          </a:xfrm>
+          <a:prstGeom prst="straightConnector1">
+            <a:avLst/>
+          </a:prstGeom>
+          <a:ln w="28575">
+            <a:solidFill>
+              <a:srgbClr val="F91727"/>
+            </a:solidFill>
+            <a:tailEnd type="triangle"/>
+          </a:ln>
+        </p:spPr>
+        <p:style>
+          <a:lnRef idx="1">
+            <a:schemeClr val="accent1"/>
+          </a:lnRef>
+          <a:fillRef idx="0">
+            <a:schemeClr val="accent1"/>
+          </a:fillRef>
+          <a:effectRef idx="0">
+            <a:schemeClr val="accent1"/>
+          </a:effectRef>
+          <a:fontRef idx="minor">
+            <a:schemeClr val="tx1"/>
+          </a:fontRef>
+        </p:style>
+      </p:cxnSp>
+      <p:cxnSp>
+        <p:nvCxnSpPr>
+          <p:cNvPr id="32" name="Straight Arrow Connector 31">
+            <a:extLst>
+              <a:ext uri="{FF2B5EF4-FFF2-40B4-BE49-F238E27FC236}">
+                <a16:creationId xmlns:a16="http://schemas.microsoft.com/office/drawing/2014/main" id="{0FC553ED-B62D-4C64-80A2-42661449DEBB}"/>
+              </a:ext>
+            </a:extLst>
+          </p:cNvPr>
+          <p:cNvCxnSpPr>
+            <a:cxnSpLocks/>
+          </p:cNvCxnSpPr>
+          <p:nvPr/>
+        </p:nvCxnSpPr>
+        <p:spPr>
+          <a:xfrm>
+            <a:off x="7466628" y="2368718"/>
+            <a:ext cx="0" cy="172418"/>
+          </a:xfrm>
+          <a:prstGeom prst="straightConnector1">
+            <a:avLst/>
+          </a:prstGeom>
+          <a:ln w="28575">
+            <a:solidFill>
+              <a:srgbClr val="F91727"/>
+            </a:solidFill>
+            <a:tailEnd type="triangle"/>
+          </a:ln>
+        </p:spPr>
+        <p:style>
+          <a:lnRef idx="1">
+            <a:schemeClr val="accent1"/>
+          </a:lnRef>
+          <a:fillRef idx="0">
+            <a:schemeClr val="accent1"/>
+          </a:fillRef>
+          <a:effectRef idx="0">
+            <a:schemeClr val="accent1"/>
+          </a:effectRef>
+          <a:fontRef idx="minor">
+            <a:schemeClr val="tx1"/>
+          </a:fontRef>
+        </p:style>
+      </p:cxnSp>
+      <p:cxnSp>
+        <p:nvCxnSpPr>
+          <p:cNvPr id="33" name="Straight Arrow Connector 32">
+            <a:extLst>
+              <a:ext uri="{FF2B5EF4-FFF2-40B4-BE49-F238E27FC236}">
+                <a16:creationId xmlns:a16="http://schemas.microsoft.com/office/drawing/2014/main" id="{44126758-609A-40B3-9DE2-E6F372FB34DE}"/>
+              </a:ext>
+            </a:extLst>
+          </p:cNvPr>
+          <p:cNvCxnSpPr>
+            <a:cxnSpLocks/>
+          </p:cNvCxnSpPr>
+          <p:nvPr/>
+        </p:nvCxnSpPr>
+        <p:spPr>
+          <a:xfrm>
+            <a:off x="6202978" y="4004468"/>
+            <a:ext cx="0" cy="172418"/>
+          </a:xfrm>
+          <a:prstGeom prst="straightConnector1">
+            <a:avLst/>
+          </a:prstGeom>
+          <a:ln w="28575">
+            <a:solidFill>
+              <a:srgbClr val="F91727"/>
+            </a:solidFill>
+            <a:tailEnd type="triangle"/>
+          </a:ln>
+        </p:spPr>
+        <p:style>
+          <a:lnRef idx="1">
+            <a:schemeClr val="accent1"/>
+          </a:lnRef>
+          <a:fillRef idx="0">
+            <a:schemeClr val="accent1"/>
+          </a:fillRef>
+          <a:effectRef idx="0">
+            <a:schemeClr val="accent1"/>
+          </a:effectRef>
+          <a:fontRef idx="minor">
+            <a:schemeClr val="tx1"/>
+          </a:fontRef>
+        </p:style>
+      </p:cxnSp>
+      <p:cxnSp>
+        <p:nvCxnSpPr>
+          <p:cNvPr id="34" name="Straight Arrow Connector 33">
+            <a:extLst>
+              <a:ext uri="{FF2B5EF4-FFF2-40B4-BE49-F238E27FC236}">
+                <a16:creationId xmlns:a16="http://schemas.microsoft.com/office/drawing/2014/main" id="{450144B3-6692-47BA-A280-9BBDDE585B89}"/>
+              </a:ext>
+            </a:extLst>
+          </p:cNvPr>
+          <p:cNvCxnSpPr>
+            <a:cxnSpLocks/>
+          </p:cNvCxnSpPr>
+          <p:nvPr/>
+        </p:nvCxnSpPr>
+        <p:spPr>
+          <a:xfrm>
+            <a:off x="6202978" y="2335691"/>
+            <a:ext cx="0" cy="172418"/>
+          </a:xfrm>
+          <a:prstGeom prst="straightConnector1">
+            <a:avLst/>
+          </a:prstGeom>
+          <a:ln w="28575">
+            <a:solidFill>
+              <a:srgbClr val="F91727"/>
+            </a:solidFill>
+            <a:tailEnd type="triangle"/>
+          </a:ln>
+        </p:spPr>
+        <p:style>
+          <a:lnRef idx="1">
+            <a:schemeClr val="accent1"/>
+          </a:lnRef>
+          <a:fillRef idx="0">
+            <a:schemeClr val="accent1"/>
+          </a:fillRef>
+          <a:effectRef idx="0">
+            <a:schemeClr val="accent1"/>
+          </a:effectRef>
+          <a:fontRef idx="minor">
+            <a:schemeClr val="tx1"/>
+          </a:fontRef>
+        </p:style>
+      </p:cxnSp>
+      <p:cxnSp>
+        <p:nvCxnSpPr>
+          <p:cNvPr id="35" name="Straight Arrow Connector 34">
+            <a:extLst>
+              <a:ext uri="{FF2B5EF4-FFF2-40B4-BE49-F238E27FC236}">
+                <a16:creationId xmlns:a16="http://schemas.microsoft.com/office/drawing/2014/main" id="{B69DED81-A164-4AB6-8E8E-ABFDFA1E1447}"/>
+              </a:ext>
+            </a:extLst>
+          </p:cNvPr>
+          <p:cNvCxnSpPr>
+            <a:cxnSpLocks/>
+          </p:cNvCxnSpPr>
+          <p:nvPr/>
+        </p:nvCxnSpPr>
+        <p:spPr>
+          <a:xfrm>
+            <a:off x="5402878" y="3989870"/>
+            <a:ext cx="0" cy="172418"/>
+          </a:xfrm>
+          <a:prstGeom prst="straightConnector1">
+            <a:avLst/>
+          </a:prstGeom>
+          <a:ln w="28575">
+            <a:solidFill>
+              <a:srgbClr val="F91727"/>
+            </a:solidFill>
+            <a:tailEnd type="triangle"/>
+          </a:ln>
+        </p:spPr>
+        <p:style>
+          <a:lnRef idx="1">
+            <a:schemeClr val="accent1"/>
+          </a:lnRef>
+          <a:fillRef idx="0">
+            <a:schemeClr val="accent1"/>
+          </a:fillRef>
+          <a:effectRef idx="0">
+            <a:schemeClr val="accent1"/>
+          </a:effectRef>
+          <a:fontRef idx="minor">
+            <a:schemeClr val="tx1"/>
+          </a:fontRef>
+        </p:style>
+      </p:cxnSp>
+      <p:cxnSp>
+        <p:nvCxnSpPr>
+          <p:cNvPr id="36" name="Straight Arrow Connector 35">
+            <a:extLst>
+              <a:ext uri="{FF2B5EF4-FFF2-40B4-BE49-F238E27FC236}">
+                <a16:creationId xmlns:a16="http://schemas.microsoft.com/office/drawing/2014/main" id="{A07567D5-70A9-475E-BF95-EA1D7B949B88}"/>
+              </a:ext>
+            </a:extLst>
+          </p:cNvPr>
+          <p:cNvCxnSpPr>
+            <a:cxnSpLocks/>
+          </p:cNvCxnSpPr>
+          <p:nvPr/>
+        </p:nvCxnSpPr>
+        <p:spPr>
+          <a:xfrm>
+            <a:off x="5402878" y="2064543"/>
+            <a:ext cx="0" cy="172418"/>
+          </a:xfrm>
+          <a:prstGeom prst="straightConnector1">
+            <a:avLst/>
+          </a:prstGeom>
+          <a:ln w="28575">
+            <a:solidFill>
+              <a:srgbClr val="F91727"/>
+            </a:solidFill>
+            <a:tailEnd type="triangle"/>
+          </a:ln>
+        </p:spPr>
+        <p:style>
+          <a:lnRef idx="1">
+            <a:schemeClr val="accent1"/>
+          </a:lnRef>
+          <a:fillRef idx="0">
+            <a:schemeClr val="accent1"/>
+          </a:fillRef>
+          <a:effectRef idx="0">
+            <a:schemeClr val="accent1"/>
+          </a:effectRef>
+          <a:fontRef idx="minor">
+            <a:schemeClr val="tx1"/>
+          </a:fontRef>
+        </p:style>
+      </p:cxnSp>
+      <p:cxnSp>
+        <p:nvCxnSpPr>
+          <p:cNvPr id="37" name="Straight Arrow Connector 36">
+            <a:extLst>
+              <a:ext uri="{FF2B5EF4-FFF2-40B4-BE49-F238E27FC236}">
+                <a16:creationId xmlns:a16="http://schemas.microsoft.com/office/drawing/2014/main" id="{821E6A37-CC30-4C0B-A412-51AB3C70D62C}"/>
+              </a:ext>
+            </a:extLst>
+          </p:cNvPr>
+          <p:cNvCxnSpPr>
+            <a:cxnSpLocks/>
+          </p:cNvCxnSpPr>
+          <p:nvPr/>
+        </p:nvCxnSpPr>
+        <p:spPr>
+          <a:xfrm>
+            <a:off x="4659928" y="3935411"/>
+            <a:ext cx="0" cy="172418"/>
+          </a:xfrm>
+          <a:prstGeom prst="straightConnector1">
+            <a:avLst/>
+          </a:prstGeom>
+          <a:ln w="28575">
+            <a:solidFill>
+              <a:srgbClr val="F91727"/>
+            </a:solidFill>
+            <a:tailEnd type="triangle"/>
+          </a:ln>
+        </p:spPr>
+        <p:style>
+          <a:lnRef idx="1">
+            <a:schemeClr val="accent1"/>
+          </a:lnRef>
+          <a:fillRef idx="0">
+            <a:schemeClr val="accent1"/>
+          </a:fillRef>
+          <a:effectRef idx="0">
+            <a:schemeClr val="accent1"/>
+          </a:effectRef>
+          <a:fontRef idx="minor">
+            <a:schemeClr val="tx1"/>
+          </a:fontRef>
+        </p:style>
+      </p:cxnSp>
+      <p:cxnSp>
+        <p:nvCxnSpPr>
+          <p:cNvPr id="38" name="Straight Arrow Connector 37">
+            <a:extLst>
+              <a:ext uri="{FF2B5EF4-FFF2-40B4-BE49-F238E27FC236}">
+                <a16:creationId xmlns:a16="http://schemas.microsoft.com/office/drawing/2014/main" id="{C55BF7C9-F02A-4514-9062-AA5196ED0131}"/>
+              </a:ext>
+            </a:extLst>
+          </p:cNvPr>
+          <p:cNvCxnSpPr>
+            <a:cxnSpLocks/>
+          </p:cNvCxnSpPr>
+          <p:nvPr/>
+        </p:nvCxnSpPr>
+        <p:spPr>
+          <a:xfrm>
+            <a:off x="4710728" y="2100745"/>
+            <a:ext cx="0" cy="172418"/>
+          </a:xfrm>
+          <a:prstGeom prst="straightConnector1">
+            <a:avLst/>
+          </a:prstGeom>
+          <a:ln w="28575">
+            <a:solidFill>
+              <a:srgbClr val="F91727"/>
+            </a:solidFill>
+            <a:tailEnd type="triangle"/>
+          </a:ln>
+        </p:spPr>
+        <p:style>
+          <a:lnRef idx="1">
+            <a:schemeClr val="accent1"/>
+          </a:lnRef>
+          <a:fillRef idx="0">
+            <a:schemeClr val="accent1"/>
+          </a:fillRef>
+          <a:effectRef idx="0">
+            <a:schemeClr val="accent1"/>
+          </a:effectRef>
+          <a:fontRef idx="minor">
+            <a:schemeClr val="tx1"/>
+          </a:fontRef>
+        </p:style>
+      </p:cxnSp>
+      <p:cxnSp>
+        <p:nvCxnSpPr>
+          <p:cNvPr id="39" name="Straight Arrow Connector 38">
+            <a:extLst>
+              <a:ext uri="{FF2B5EF4-FFF2-40B4-BE49-F238E27FC236}">
+                <a16:creationId xmlns:a16="http://schemas.microsoft.com/office/drawing/2014/main" id="{CF874EE3-EE94-48E8-9546-544ECDCA95B1}"/>
+              </a:ext>
+            </a:extLst>
+          </p:cNvPr>
+          <p:cNvCxnSpPr>
+            <a:cxnSpLocks/>
+          </p:cNvCxnSpPr>
+          <p:nvPr/>
+        </p:nvCxnSpPr>
+        <p:spPr>
+          <a:xfrm>
+            <a:off x="3961428" y="3961295"/>
+            <a:ext cx="0" cy="172418"/>
+          </a:xfrm>
+          <a:prstGeom prst="straightConnector1">
+            <a:avLst/>
+          </a:prstGeom>
+          <a:ln w="28575">
+            <a:solidFill>
+              <a:srgbClr val="F91727"/>
+            </a:solidFill>
+            <a:tailEnd type="triangle"/>
+          </a:ln>
+        </p:spPr>
+        <p:style>
+          <a:lnRef idx="1">
+            <a:schemeClr val="accent1"/>
+          </a:lnRef>
+          <a:fillRef idx="0">
+            <a:schemeClr val="accent1"/>
+          </a:fillRef>
+          <a:effectRef idx="0">
+            <a:schemeClr val="accent1"/>
+          </a:effectRef>
+          <a:fontRef idx="minor">
+            <a:schemeClr val="tx1"/>
+          </a:fontRef>
+        </p:style>
+      </p:cxnSp>
+      <p:cxnSp>
+        <p:nvCxnSpPr>
+          <p:cNvPr id="40" name="Straight Arrow Connector 39">
+            <a:extLst>
+              <a:ext uri="{FF2B5EF4-FFF2-40B4-BE49-F238E27FC236}">
+                <a16:creationId xmlns:a16="http://schemas.microsoft.com/office/drawing/2014/main" id="{51D7031F-2CFA-4015-9EC8-131710CD6525}"/>
+              </a:ext>
+            </a:extLst>
+          </p:cNvPr>
+          <p:cNvCxnSpPr>
+            <a:cxnSpLocks/>
+          </p:cNvCxnSpPr>
+          <p:nvPr/>
+        </p:nvCxnSpPr>
+        <p:spPr>
+          <a:xfrm>
+            <a:off x="3928706" y="2454927"/>
+            <a:ext cx="0" cy="172418"/>
+          </a:xfrm>
+          <a:prstGeom prst="straightConnector1">
+            <a:avLst/>
+          </a:prstGeom>
+          <a:ln w="28575">
+            <a:solidFill>
+              <a:srgbClr val="F91727"/>
+            </a:solidFill>
+            <a:tailEnd type="triangle"/>
+          </a:ln>
+        </p:spPr>
+        <p:style>
+          <a:lnRef idx="1">
+            <a:schemeClr val="accent1"/>
+          </a:lnRef>
+          <a:fillRef idx="0">
+            <a:schemeClr val="accent1"/>
+          </a:fillRef>
+          <a:effectRef idx="0">
+            <a:schemeClr val="accent1"/>
+          </a:effectRef>
+          <a:fontRef idx="minor">
+            <a:schemeClr val="tx1"/>
+          </a:fontRef>
+        </p:style>
+      </p:cxnSp>
+      <p:cxnSp>
+        <p:nvCxnSpPr>
+          <p:cNvPr id="41" name="Straight Arrow Connector 40">
+            <a:extLst>
+              <a:ext uri="{FF2B5EF4-FFF2-40B4-BE49-F238E27FC236}">
+                <a16:creationId xmlns:a16="http://schemas.microsoft.com/office/drawing/2014/main" id="{FBF8A924-2B15-4D09-9873-45874AC3D832}"/>
+              </a:ext>
+            </a:extLst>
+          </p:cNvPr>
+          <p:cNvCxnSpPr>
+            <a:cxnSpLocks/>
+          </p:cNvCxnSpPr>
+          <p:nvPr/>
+        </p:nvCxnSpPr>
+        <p:spPr>
+          <a:xfrm>
+            <a:off x="3599478" y="3961295"/>
+            <a:ext cx="0" cy="172418"/>
+          </a:xfrm>
+          <a:prstGeom prst="straightConnector1">
+            <a:avLst/>
+          </a:prstGeom>
+          <a:ln w="28575">
+            <a:solidFill>
+              <a:srgbClr val="F91727"/>
+            </a:solidFill>
+            <a:tailEnd type="triangle"/>
+          </a:ln>
+        </p:spPr>
+        <p:style>
+          <a:lnRef idx="1">
+            <a:schemeClr val="accent1"/>
+          </a:lnRef>
+          <a:fillRef idx="0">
+            <a:schemeClr val="accent1"/>
+          </a:fillRef>
+          <a:effectRef idx="0">
+            <a:schemeClr val="accent1"/>
+          </a:effectRef>
+          <a:fontRef idx="minor">
+            <a:schemeClr val="tx1"/>
+          </a:fontRef>
+        </p:style>
+      </p:cxnSp>
+      <p:cxnSp>
+        <p:nvCxnSpPr>
+          <p:cNvPr id="42" name="Straight Arrow Connector 41">
+            <a:extLst>
+              <a:ext uri="{FF2B5EF4-FFF2-40B4-BE49-F238E27FC236}">
+                <a16:creationId xmlns:a16="http://schemas.microsoft.com/office/drawing/2014/main" id="{FBB98BCF-2F68-4E63-9EA3-283993921FCB}"/>
+              </a:ext>
+            </a:extLst>
+          </p:cNvPr>
+          <p:cNvCxnSpPr>
+            <a:cxnSpLocks/>
+          </p:cNvCxnSpPr>
+          <p:nvPr/>
+        </p:nvCxnSpPr>
+        <p:spPr>
+          <a:xfrm>
+            <a:off x="3617556" y="2482166"/>
+            <a:ext cx="0" cy="172418"/>
+          </a:xfrm>
+          <a:prstGeom prst="straightConnector1">
+            <a:avLst/>
+          </a:prstGeom>
+          <a:ln w="28575">
+            <a:solidFill>
+              <a:srgbClr val="F91727"/>
+            </a:solidFill>
+            <a:tailEnd type="triangle"/>
+          </a:ln>
+        </p:spPr>
+        <p:style>
+          <a:lnRef idx="1">
+            <a:schemeClr val="accent1"/>
+          </a:lnRef>
+          <a:fillRef idx="0">
+            <a:schemeClr val="accent1"/>
+          </a:fillRef>
+          <a:effectRef idx="0">
+            <a:schemeClr val="accent1"/>
+          </a:effectRef>
+          <a:fontRef idx="minor">
+            <a:schemeClr val="tx1"/>
+          </a:fontRef>
+        </p:style>
+      </p:cxnSp>
+      <p:cxnSp>
+        <p:nvCxnSpPr>
+          <p:cNvPr id="43" name="Straight Arrow Connector 42">
+            <a:extLst>
+              <a:ext uri="{FF2B5EF4-FFF2-40B4-BE49-F238E27FC236}">
+                <a16:creationId xmlns:a16="http://schemas.microsoft.com/office/drawing/2014/main" id="{7E231744-C5CE-4F04-B121-E426B239217F}"/>
+              </a:ext>
+            </a:extLst>
+          </p:cNvPr>
+          <p:cNvCxnSpPr>
+            <a:cxnSpLocks/>
+          </p:cNvCxnSpPr>
+          <p:nvPr/>
+        </p:nvCxnSpPr>
+        <p:spPr>
+          <a:xfrm flipV="1">
+            <a:off x="7381310" y="4248493"/>
+            <a:ext cx="0" cy="164982"/>
+          </a:xfrm>
+          <a:prstGeom prst="straightConnector1">
+            <a:avLst/>
+          </a:prstGeom>
+          <a:ln w="28575">
+            <a:solidFill>
+              <a:srgbClr val="00A84C"/>
+            </a:solidFill>
+            <a:tailEnd type="triangle"/>
+          </a:ln>
+        </p:spPr>
+        <p:style>
+          <a:lnRef idx="1">
+            <a:schemeClr val="accent1"/>
+          </a:lnRef>
+          <a:fillRef idx="0">
+            <a:schemeClr val="accent1"/>
+          </a:fillRef>
+          <a:effectRef idx="0">
+            <a:schemeClr val="accent1"/>
+          </a:effectRef>
+          <a:fontRef idx="minor">
+            <a:schemeClr val="tx1"/>
+          </a:fontRef>
+        </p:style>
+      </p:cxnSp>
+      <p:cxnSp>
+        <p:nvCxnSpPr>
+          <p:cNvPr id="44" name="Straight Arrow Connector 43">
+            <a:extLst>
+              <a:ext uri="{FF2B5EF4-FFF2-40B4-BE49-F238E27FC236}">
+                <a16:creationId xmlns:a16="http://schemas.microsoft.com/office/drawing/2014/main" id="{C2406A33-90D6-4271-A7CB-7050FB03501B}"/>
+              </a:ext>
+            </a:extLst>
+          </p:cNvPr>
+          <p:cNvCxnSpPr>
+            <a:cxnSpLocks/>
+          </p:cNvCxnSpPr>
+          <p:nvPr/>
+        </p:nvCxnSpPr>
+        <p:spPr>
+          <a:xfrm flipV="1">
+            <a:off x="7381310" y="2595872"/>
+            <a:ext cx="0" cy="164982"/>
+          </a:xfrm>
+          <a:prstGeom prst="straightConnector1">
+            <a:avLst/>
+          </a:prstGeom>
+          <a:ln w="28575">
+            <a:solidFill>
+              <a:srgbClr val="00A84C"/>
+            </a:solidFill>
+            <a:tailEnd type="triangle"/>
+          </a:ln>
+        </p:spPr>
+        <p:style>
+          <a:lnRef idx="1">
+            <a:schemeClr val="accent1"/>
+          </a:lnRef>
+          <a:fillRef idx="0">
+            <a:schemeClr val="accent1"/>
+          </a:fillRef>
+          <a:effectRef idx="0">
+            <a:schemeClr val="accent1"/>
+          </a:effectRef>
+          <a:fontRef idx="minor">
+            <a:schemeClr val="tx1"/>
+          </a:fontRef>
+        </p:style>
+      </p:cxnSp>
     </p:spTree>
     <p:extLst>
       <p:ext uri="{BB962C8B-B14F-4D97-AF65-F5344CB8AC3E}">
-        <p14:creationId xmlns:p14="http://schemas.microsoft.com/office/powerpoint/2010/main" val="2899407925"/>
+        <p14:creationId xmlns:p14="http://schemas.microsoft.com/office/powerpoint/2010/main" val="2998760911"/>
       </p:ext>
     </p:extLst>
   </p:cSld>

--- a/research_articles/masterclasses/consensus_distributed/consensus_distributed.pptx
+++ b/research_articles/masterclasses/consensus_distributed/consensus_distributed.pptx
@@ -244,7 +244,7 @@
           <a:p>
             <a:fld id="{0E14D5B3-C0ED-4E5B-BEFF-6A7BA239570E}" type="datetimeFigureOut">
               <a:rPr lang="en-AU" smtClean="0"/>
-              <a:t>06-May-20</a:t>
+              <a:t>14-May-20</a:t>
             </a:fld>
             <a:endParaRPr lang="en-AU"/>
           </a:p>
@@ -2336,7 +2336,7 @@
           <a:p>
             <a:fld id="{B897D379-7DB5-4F5B-A6CE-2518FE7EEDA5}" type="datetime1">
               <a:rPr lang="en-AU" smtClean="0"/>
-              <a:t>06-May-20</a:t>
+              <a:t>14-May-20</a:t>
             </a:fld>
             <a:endParaRPr lang="en-AU"/>
           </a:p>
@@ -3131,6 +3131,197 @@
               <a:t>@_checkmatey_</a:t>
             </a:r>
             <a:endParaRPr lang="en-AU" sz="1300" i="1" dirty="0"/>
+          </a:p>
+        </p:txBody>
+      </p:sp>
+      <p:pic>
+        <p:nvPicPr>
+          <p:cNvPr id="4" name="Picture 3">
+            <a:extLst>
+              <a:ext uri="{FF2B5EF4-FFF2-40B4-BE49-F238E27FC236}">
+                <a16:creationId xmlns:a16="http://schemas.microsoft.com/office/drawing/2014/main" id="{C33D8767-0F26-4904-BF22-ABF293689258}"/>
+              </a:ext>
+            </a:extLst>
+          </p:cNvPr>
+          <p:cNvPicPr>
+            <a:picLocks noChangeAspect="1"/>
+          </p:cNvPicPr>
+          <p:nvPr/>
+        </p:nvPicPr>
+        <p:blipFill rotWithShape="1">
+          <a:blip r:embed="rId2"/>
+          <a:srcRect l="2854" b="11667"/>
+          <a:stretch/>
+        </p:blipFill>
+        <p:spPr>
+          <a:xfrm>
+            <a:off x="2743200" y="594360"/>
+            <a:ext cx="3840072" cy="807720"/>
+          </a:xfrm>
+          <a:prstGeom prst="rect">
+            <a:avLst/>
+          </a:prstGeom>
+        </p:spPr>
+      </p:pic>
+      <p:sp>
+        <p:nvSpPr>
+          <p:cNvPr id="5" name="Rectangle 4">
+            <a:extLst>
+              <a:ext uri="{FF2B5EF4-FFF2-40B4-BE49-F238E27FC236}">
+                <a16:creationId xmlns:a16="http://schemas.microsoft.com/office/drawing/2014/main" id="{EBFCD9EC-E838-4F48-9C80-19368AB4C37A}"/>
+              </a:ext>
+            </a:extLst>
+          </p:cNvPr>
+          <p:cNvSpPr/>
+          <p:nvPr/>
+        </p:nvSpPr>
+        <p:spPr>
+          <a:xfrm>
+            <a:off x="5956663" y="844731"/>
+            <a:ext cx="409303" cy="200298"/>
+          </a:xfrm>
+          <a:prstGeom prst="rect">
+            <a:avLst/>
+          </a:prstGeom>
+          <a:solidFill>
+            <a:srgbClr val="223767"/>
+          </a:solidFill>
+          <a:ln>
+            <a:solidFill>
+              <a:srgbClr val="223767"/>
+            </a:solidFill>
+          </a:ln>
+        </p:spPr>
+        <p:style>
+          <a:lnRef idx="2">
+            <a:schemeClr val="accent1">
+              <a:shade val="50000"/>
+            </a:schemeClr>
+          </a:lnRef>
+          <a:fillRef idx="1">
+            <a:schemeClr val="accent1"/>
+          </a:fillRef>
+          <a:effectRef idx="0">
+            <a:schemeClr val="accent1"/>
+          </a:effectRef>
+          <a:fontRef idx="minor">
+            <a:schemeClr val="lt1"/>
+          </a:fontRef>
+        </p:style>
+        <p:txBody>
+          <a:bodyPr rtlCol="0" anchor="ctr"/>
+          <a:lstStyle/>
+          <a:p>
+            <a:pPr algn="ctr"/>
+            <a:endParaRPr lang="en-AU"/>
+          </a:p>
+        </p:txBody>
+      </p:sp>
+      <p:sp>
+        <p:nvSpPr>
+          <p:cNvPr id="6" name="Rectangle 5">
+            <a:extLst>
+              <a:ext uri="{FF2B5EF4-FFF2-40B4-BE49-F238E27FC236}">
+                <a16:creationId xmlns:a16="http://schemas.microsoft.com/office/drawing/2014/main" id="{F4AA3B38-B97A-4905-8B97-D547204332F1}"/>
+              </a:ext>
+            </a:extLst>
+          </p:cNvPr>
+          <p:cNvSpPr/>
+          <p:nvPr/>
+        </p:nvSpPr>
+        <p:spPr>
+          <a:xfrm>
+            <a:off x="3257006" y="1097280"/>
+            <a:ext cx="657497" cy="139337"/>
+          </a:xfrm>
+          <a:prstGeom prst="rect">
+            <a:avLst/>
+          </a:prstGeom>
+          <a:solidFill>
+            <a:srgbClr val="223767"/>
+          </a:solidFill>
+          <a:ln>
+            <a:solidFill>
+              <a:srgbClr val="223767"/>
+            </a:solidFill>
+          </a:ln>
+        </p:spPr>
+        <p:style>
+          <a:lnRef idx="2">
+            <a:schemeClr val="accent1">
+              <a:shade val="50000"/>
+            </a:schemeClr>
+          </a:lnRef>
+          <a:fillRef idx="1">
+            <a:schemeClr val="accent1"/>
+          </a:fillRef>
+          <a:effectRef idx="0">
+            <a:schemeClr val="accent1"/>
+          </a:effectRef>
+          <a:fontRef idx="minor">
+            <a:schemeClr val="lt1"/>
+          </a:fontRef>
+        </p:style>
+        <p:txBody>
+          <a:bodyPr rtlCol="0" anchor="ctr"/>
+          <a:lstStyle/>
+          <a:p>
+            <a:pPr algn="ctr"/>
+            <a:endParaRPr lang="en-AU"/>
+          </a:p>
+        </p:txBody>
+      </p:sp>
+      <p:sp>
+        <p:nvSpPr>
+          <p:cNvPr id="7" name="Rectangle 6">
+            <a:extLst>
+              <a:ext uri="{FF2B5EF4-FFF2-40B4-BE49-F238E27FC236}">
+                <a16:creationId xmlns:a16="http://schemas.microsoft.com/office/drawing/2014/main" id="{2FF81FCE-5FB4-4566-924A-264B8ED116E6}"/>
+              </a:ext>
+            </a:extLst>
+          </p:cNvPr>
+          <p:cNvSpPr/>
+          <p:nvPr/>
+        </p:nvSpPr>
+        <p:spPr>
+          <a:xfrm>
+            <a:off x="5627915" y="1139952"/>
+            <a:ext cx="163286" cy="139337"/>
+          </a:xfrm>
+          <a:prstGeom prst="rect">
+            <a:avLst/>
+          </a:prstGeom>
+          <a:solidFill>
+            <a:srgbClr val="223767"/>
+          </a:solidFill>
+          <a:ln>
+            <a:solidFill>
+              <a:srgbClr val="223767"/>
+            </a:solidFill>
+          </a:ln>
+        </p:spPr>
+        <p:style>
+          <a:lnRef idx="2">
+            <a:schemeClr val="accent1">
+              <a:shade val="50000"/>
+            </a:schemeClr>
+          </a:lnRef>
+          <a:fillRef idx="1">
+            <a:schemeClr val="accent1"/>
+          </a:fillRef>
+          <a:effectRef idx="0">
+            <a:schemeClr val="accent1"/>
+          </a:effectRef>
+          <a:fontRef idx="minor">
+            <a:schemeClr val="lt1"/>
+          </a:fontRef>
+        </p:style>
+        <p:txBody>
+          <a:bodyPr rtlCol="0" anchor="ctr"/>
+          <a:lstStyle/>
+          <a:p>
+            <a:pPr algn="ctr"/>
+            <a:endParaRPr lang="en-AU"/>
           </a:p>
         </p:txBody>
       </p:sp>
